--- a/presentaciones/continuidad-negocio/Opcion2_Oscuro_Moderno.pptx
+++ b/presentaciones/continuidad-negocio/Opcion2_Oscuro_Moderno.pptx
@@ -4,13 +4,14 @@
   <p:sldMasterIdLst>
     <p:sldMasterId id="2147483648" r:id="rId1"/>
   </p:sldMasterIdLst>
+  <p:notesMasterIdLst>
+    <p:notesMasterId r:id="rId5"/>
+  </p:notesMasterIdLst>
   <p:sldIdLst>
-    <p:sldId id="256" r:id="rId2"/>
-    <p:sldId id="257" r:id="rId3"/>
+    <p:sldId id="258" r:id="rId2"/>
+    <p:sldId id="256" r:id="rId3"/>
+    <p:sldId id="257" r:id="rId4"/>
   </p:sldIdLst>
-  <p:notesMasterIdLst>
-    <p:notesMasterId r:id="rId4"/>
-  </p:notesMasterIdLst>
   <p:sldSz cx="12192000" cy="6858000"/>
   <p:notesSz cx="6858000" cy="12192000"/>
   <p:defaultTextStyle>
@@ -105,6 +106,11 @@
       </a:defRPr>
     </a:lvl9pPr>
   </p:defaultTextStyle>
+  <p:extLst>
+    <p:ext uri="{EFAFB233-063F-42B5-8137-9DF3F51BA10A}">
+      <p15:sldGuideLst xmlns:p15="http://schemas.microsoft.com/office/powerpoint/2012/main"/>
+    </p:ext>
+  </p:extLst>
 </p:presentation>
 </file>
 
@@ -130,234 +136,10 @@
           <a:chExt cx="0" cy="0"/>
         </a:xfrm>
       </p:grpSpPr>
-      <p:sp>
-        <p:nvSpPr>
-          <p:cNvPr id="2" name="Header Placeholder 1"/>
-          <p:cNvSpPr>
-            <a:spLocks noGrp="1"/>
-          </p:cNvSpPr>
-          <p:nvPr>
-            <p:ph type="hdr" sz="quarter"/>
-          </p:nvPr>
-        </p:nvSpPr>
-        <p:spPr>
-          <a:xfrm>
-            <a:off x="0" y="0"/>
-            <a:ext cx="2971800" cy="458788"/>
-          </a:xfrm>
-          <a:prstGeom prst="rect">
-            <a:avLst/>
-          </a:prstGeom>
-        </p:spPr>
-        <p:txBody>
-          <a:bodyPr vert="horz" lIns="91440" tIns="45720" rIns="91440" bIns="45720" rtlCol="0"/>
-          <a:lstStyle>
-            <a:lvl1pPr algn="l">
-              <a:defRPr sz="1200"/>
-            </a:lvl1pPr>
-          </a:lstStyle>
-          <a:p>
-            <a:endParaRPr lang="en-US"/>
-          </a:p>
-        </p:txBody>
-      </p:sp>
-      <p:sp>
-        <p:nvSpPr>
-          <p:cNvPr id="3" name="Date Placeholder 2"/>
-          <p:cNvSpPr>
-            <a:spLocks noGrp="1"/>
-          </p:cNvSpPr>
-          <p:nvPr>
-            <p:ph type="dt" idx="1"/>
-          </p:nvPr>
-        </p:nvSpPr>
-        <p:spPr>
-          <a:xfrm>
-            <a:off x="3884613" y="0"/>
-            <a:ext cx="2971800" cy="458788"/>
-          </a:xfrm>
-          <a:prstGeom prst="rect">
-            <a:avLst/>
-          </a:prstGeom>
-        </p:spPr>
-        <p:txBody>
-          <a:bodyPr vert="horz" lIns="91440" tIns="45720" rIns="91440" bIns="45720" rtlCol="0"/>
-          <a:lstStyle>
-            <a:lvl1pPr algn="r">
-              <a:defRPr sz="1200"/>
-            </a:lvl1pPr>
-          </a:lstStyle>
-          <a:p>
-            <a:fld id="{5282F153-3F37-0F45-9E97-73ACFA13230C}" type="datetimeFigureOut">
-              <a:rPr lang="en-US"/>
-              <a:t>7/23/19</a:t>
-            </a:fld>
-            <a:endParaRPr lang="en-US"/>
-          </a:p>
-        </p:txBody>
-      </p:sp>
-      <p:sp>
-        <p:nvSpPr>
-          <p:cNvPr id="4" name="Slide Image Placeholder 3"/>
-          <p:cNvSpPr>
-            <a:spLocks noGrp="1" noRot="1" noChangeAspect="1"/>
-          </p:cNvSpPr>
-          <p:nvPr>
-            <p:ph type="sldImg" idx="2"/>
-          </p:nvPr>
-        </p:nvSpPr>
-        <p:spPr>
-          <a:xfrm>
-            <a:off x="685800" y="1143000"/>
-            <a:ext cx="5486400" cy="3086100"/>
-          </a:xfrm>
-          <a:prstGeom prst="rect">
-            <a:avLst/>
-          </a:prstGeom>
-          <a:noFill/>
-          <a:ln w="12700">
-            <a:solidFill>
-              <a:prstClr val="black"/>
-            </a:solidFill>
-          </a:ln>
-        </p:spPr>
-        <p:txBody>
-          <a:bodyPr vert="horz" lIns="91440" tIns="45720" rIns="91440" bIns="45720" rtlCol="0" anchor="ctr"/>
-          <a:lstStyle/>
-          <a:p>
-            <a:endParaRPr lang="en-US"/>
-          </a:p>
-        </p:txBody>
-      </p:sp>
-      <p:sp>
-        <p:nvSpPr>
-          <p:cNvPr id="5" name="Notes Placeholder 4"/>
-          <p:cNvSpPr>
-            <a:spLocks noGrp="1"/>
-          </p:cNvSpPr>
-          <p:nvPr>
-            <p:ph type="body" sz="quarter" idx="3"/>
-          </p:nvPr>
-        </p:nvSpPr>
-        <p:spPr>
-          <a:xfrm>
-            <a:off x="685800" y="4400550"/>
-            <a:ext cx="5486400" cy="3600450"/>
-          </a:xfrm>
-          <a:prstGeom prst="rect">
-            <a:avLst/>
-          </a:prstGeom>
-        </p:spPr>
-        <p:txBody>
-          <a:bodyPr vert="horz" lIns="91440" tIns="45720" rIns="91440" bIns="45720" rtlCol="0"/>
-          <a:lstStyle/>
-          <a:p>
-            <a:pPr lvl="0"/>
-            <a:r>
-              <a:rPr lang="en-US"/>
-              <a:t>Click to edit Master text styles</a:t>
-            </a:r>
-          </a:p>
-          <a:p>
-            <a:pPr lvl="1"/>
-            <a:r>
-              <a:rPr lang="en-US"/>
-              <a:t>Second level</a:t>
-            </a:r>
-          </a:p>
-          <a:p>
-            <a:pPr lvl="2"/>
-            <a:r>
-              <a:rPr lang="en-US"/>
-              <a:t>Third level</a:t>
-            </a:r>
-          </a:p>
-          <a:p>
-            <a:pPr lvl="3"/>
-            <a:r>
-              <a:rPr lang="en-US"/>
-              <a:t>Fourth level</a:t>
-            </a:r>
-          </a:p>
-          <a:p>
-            <a:pPr lvl="4"/>
-            <a:r>
-              <a:rPr lang="en-US"/>
-              <a:t>Fifth level</a:t>
-            </a:r>
-          </a:p>
-        </p:txBody>
-      </p:sp>
-      <p:sp>
-        <p:nvSpPr>
-          <p:cNvPr id="6" name="Footer Placeholder 5"/>
-          <p:cNvSpPr>
-            <a:spLocks noGrp="1"/>
-          </p:cNvSpPr>
-          <p:nvPr>
-            <p:ph type="ftr" sz="quarter" idx="4"/>
-          </p:nvPr>
-        </p:nvSpPr>
-        <p:spPr>
-          <a:xfrm>
-            <a:off x="0" y="8685213"/>
-            <a:ext cx="2971800" cy="458787"/>
-          </a:xfrm>
-          <a:prstGeom prst="rect">
-            <a:avLst/>
-          </a:prstGeom>
-        </p:spPr>
-        <p:txBody>
-          <a:bodyPr vert="horz" lIns="91440" tIns="45720" rIns="91440" bIns="45720" rtlCol="0" anchor="b"/>
-          <a:lstStyle>
-            <a:lvl1pPr algn="l">
-              <a:defRPr sz="1200"/>
-            </a:lvl1pPr>
-          </a:lstStyle>
-          <a:p>
-            <a:endParaRPr lang="en-US"/>
-          </a:p>
-        </p:txBody>
-      </p:sp>
-      <p:sp>
-        <p:nvSpPr>
-          <p:cNvPr id="7" name="Slide Number Placeholder 6"/>
-          <p:cNvSpPr>
-            <a:spLocks noGrp="1"/>
-          </p:cNvSpPr>
-          <p:nvPr>
-            <p:ph type="sldNum" sz="quarter" idx="5"/>
-          </p:nvPr>
-        </p:nvSpPr>
-        <p:spPr>
-          <a:xfrm>
-            <a:off x="3884613" y="8685213"/>
-            <a:ext cx="2971800" cy="458787"/>
-          </a:xfrm>
-          <a:prstGeom prst="rect">
-            <a:avLst/>
-          </a:prstGeom>
-        </p:spPr>
-        <p:txBody>
-          <a:bodyPr vert="horz" lIns="91440" tIns="45720" rIns="91440" bIns="45720" rtlCol="0" anchor="b"/>
-          <a:lstStyle>
-            <a:lvl1pPr algn="r">
-              <a:defRPr sz="1200"/>
-            </a:lvl1pPr>
-          </a:lstStyle>
-          <a:p>
-            <a:fld id="{CE5E9CC1-C706-0F49-92D6-E571CC5EEA8F}" type="slidenum">
-              <a:rPr lang="en-US"/>
-              <a:t>‹#›</a:t>
-            </a:fld>
-            <a:endParaRPr lang="en-US"/>
-          </a:p>
-        </p:txBody>
-      </p:sp>
     </p:spTree>
     <p:extLst>
       <p:ext uri="{BB962C8B-B14F-4D97-AF65-F5344CB8AC3E}">
-        <p14:creationId xmlns:p14="http://schemas.microsoft.com/office/powerpoint/2010/main" val="1024086991"/>
+        <p14:creationId xmlns:p14="http://schemas.microsoft.com/office/powerpoint/2010/main" val="1856607204"/>
       </p:ext>
     </p:extLst>
   </p:cSld>
@@ -501,10 +283,6 @@
           <a:bodyPr/>
           <a:lstStyle/>
           <a:p>
-            <a:r>
-              <a:rPr lang="en-US" dirty="0"/>
-              <a:t/>
-            </a:r>
             <a:endParaRPr lang="en-US" dirty="0"/>
           </a:p>
         </p:txBody>
@@ -526,7 +304,7 @@
           <a:p>
             <a:fld id="{F7021451-1387-4CA6-816F-3879F97B5CBC}" type="slidenum">
               <a:rPr lang="en-US"/>
-              <a:t>1</a:t>
+              <a:t>2</a:t>
             </a:fld>
             <a:endParaRPr lang="en-US"/>
           </a:p>
@@ -589,10 +367,6 @@
           <a:bodyPr/>
           <a:lstStyle/>
           <a:p>
-            <a:r>
-              <a:rPr lang="en-US" dirty="0"/>
-              <a:t/>
-            </a:r>
             <a:endParaRPr lang="en-US" dirty="0"/>
           </a:p>
         </p:txBody>
@@ -614,7 +388,7 @@
           <a:p>
             <a:fld id="{F7021451-1387-4CA6-816F-3879F97B5CBC}" type="slidenum">
               <a:rPr lang="en-US"/>
-              <a:t>2</a:t>
+              <a:t>3</a:t>
             </a:fld>
             <a:endParaRPr lang="en-US"/>
           </a:p>
@@ -663,9 +437,236 @@
 </p:sldLayout>
 </file>
 
+<file path=ppt/slideLayouts/slideLayout2.xml><?xml version="1.0" encoding="utf-8"?>
+<p:sldLayout xmlns:a="http://schemas.openxmlformats.org/drawingml/2006/main" xmlns:r="http://schemas.openxmlformats.org/officeDocument/2006/relationships" xmlns:p="http://schemas.openxmlformats.org/presentationml/2006/main" type="title">
+  <p:cSld name="Diapositiva de título">
+    <p:spTree>
+      <p:nvGrpSpPr>
+        <p:cNvPr id="1" name=""/>
+        <p:cNvGrpSpPr/>
+        <p:nvPr/>
+      </p:nvGrpSpPr>
+      <p:grpSpPr>
+        <a:xfrm>
+          <a:off x="0" y="0"/>
+          <a:ext cx="0" cy="0"/>
+          <a:chOff x="0" y="0"/>
+          <a:chExt cx="0" cy="0"/>
+        </a:xfrm>
+      </p:grpSpPr>
+      <p:sp>
+        <p:nvSpPr>
+          <p:cNvPr id="2" name="Título 1">
+            <a:extLst>
+              <a:ext uri="{FF2B5EF4-FFF2-40B4-BE49-F238E27FC236}">
+                <a16:creationId xmlns:a16="http://schemas.microsoft.com/office/drawing/2014/main" id="{926A5246-1289-2501-E76B-99FD1AAC6CB4}"/>
+              </a:ext>
+            </a:extLst>
+          </p:cNvPr>
+          <p:cNvSpPr>
+            <a:spLocks noGrp="1"/>
+          </p:cNvSpPr>
+          <p:nvPr>
+            <p:ph type="ctrTitle"/>
+          </p:nvPr>
+        </p:nvSpPr>
+        <p:spPr>
+          <a:xfrm>
+            <a:off x="1524000" y="1122363"/>
+            <a:ext cx="9144000" cy="2387600"/>
+          </a:xfrm>
+        </p:spPr>
+        <p:txBody>
+          <a:bodyPr anchor="b"/>
+          <a:lstStyle>
+            <a:lvl1pPr algn="ctr">
+              <a:defRPr sz="6000"/>
+            </a:lvl1pPr>
+          </a:lstStyle>
+          <a:p>
+            <a:r>
+              <a:rPr lang="es-MX"/>
+              <a:t>Haz clic para modificar el estilo de título del patrón</a:t>
+            </a:r>
+            <a:endParaRPr lang="es-SV"/>
+          </a:p>
+        </p:txBody>
+      </p:sp>
+      <p:sp>
+        <p:nvSpPr>
+          <p:cNvPr id="3" name="Subtítulo 2">
+            <a:extLst>
+              <a:ext uri="{FF2B5EF4-FFF2-40B4-BE49-F238E27FC236}">
+                <a16:creationId xmlns:a16="http://schemas.microsoft.com/office/drawing/2014/main" id="{84844576-B082-FD49-EBFF-D88CB1856DAD}"/>
+              </a:ext>
+            </a:extLst>
+          </p:cNvPr>
+          <p:cNvSpPr>
+            <a:spLocks noGrp="1"/>
+          </p:cNvSpPr>
+          <p:nvPr>
+            <p:ph type="subTitle" idx="1"/>
+          </p:nvPr>
+        </p:nvSpPr>
+        <p:spPr>
+          <a:xfrm>
+            <a:off x="1524000" y="3602038"/>
+            <a:ext cx="9144000" cy="1655762"/>
+          </a:xfrm>
+        </p:spPr>
+        <p:txBody>
+          <a:bodyPr/>
+          <a:lstStyle>
+            <a:lvl1pPr marL="0" indent="0" algn="ctr">
+              <a:buNone/>
+              <a:defRPr sz="2400"/>
+            </a:lvl1pPr>
+            <a:lvl2pPr marL="457200" indent="0" algn="ctr">
+              <a:buNone/>
+              <a:defRPr sz="2000"/>
+            </a:lvl2pPr>
+            <a:lvl3pPr marL="914400" indent="0" algn="ctr">
+              <a:buNone/>
+              <a:defRPr sz="1800"/>
+            </a:lvl3pPr>
+            <a:lvl4pPr marL="1371600" indent="0" algn="ctr">
+              <a:buNone/>
+              <a:defRPr sz="1600"/>
+            </a:lvl4pPr>
+            <a:lvl5pPr marL="1828800" indent="0" algn="ctr">
+              <a:buNone/>
+              <a:defRPr sz="1600"/>
+            </a:lvl5pPr>
+            <a:lvl6pPr marL="2286000" indent="0" algn="ctr">
+              <a:buNone/>
+              <a:defRPr sz="1600"/>
+            </a:lvl6pPr>
+            <a:lvl7pPr marL="2743200" indent="0" algn="ctr">
+              <a:buNone/>
+              <a:defRPr sz="1600"/>
+            </a:lvl7pPr>
+            <a:lvl8pPr marL="3200400" indent="0" algn="ctr">
+              <a:buNone/>
+              <a:defRPr sz="1600"/>
+            </a:lvl8pPr>
+            <a:lvl9pPr marL="3657600" indent="0" algn="ctr">
+              <a:buNone/>
+              <a:defRPr sz="1600"/>
+            </a:lvl9pPr>
+          </a:lstStyle>
+          <a:p>
+            <a:r>
+              <a:rPr lang="es-MX"/>
+              <a:t>Haz clic para editar el estilo de subtítulo del patrón</a:t>
+            </a:r>
+            <a:endParaRPr lang="es-SV"/>
+          </a:p>
+        </p:txBody>
+      </p:sp>
+      <p:sp>
+        <p:nvSpPr>
+          <p:cNvPr id="4" name="Marcador de fecha 3">
+            <a:extLst>
+              <a:ext uri="{FF2B5EF4-FFF2-40B4-BE49-F238E27FC236}">
+                <a16:creationId xmlns:a16="http://schemas.microsoft.com/office/drawing/2014/main" id="{99F51356-BC70-4A72-C845-C6BAA0817DF8}"/>
+              </a:ext>
+            </a:extLst>
+          </p:cNvPr>
+          <p:cNvSpPr>
+            <a:spLocks noGrp="1"/>
+          </p:cNvSpPr>
+          <p:nvPr>
+            <p:ph type="dt" sz="half" idx="10"/>
+          </p:nvPr>
+        </p:nvSpPr>
+        <p:spPr/>
+        <p:txBody>
+          <a:bodyPr/>
+          <a:lstStyle/>
+          <a:p>
+            <a:fld id="{B6B18277-A37D-4F4A-BC70-5B646CB73774}" type="datetimeFigureOut">
+              <a:rPr lang="es-SV" smtClean="0"/>
+              <a:t>22/10/2026</a:t>
+            </a:fld>
+            <a:endParaRPr lang="es-SV"/>
+          </a:p>
+        </p:txBody>
+      </p:sp>
+      <p:sp>
+        <p:nvSpPr>
+          <p:cNvPr id="5" name="Marcador de pie de página 4">
+            <a:extLst>
+              <a:ext uri="{FF2B5EF4-FFF2-40B4-BE49-F238E27FC236}">
+                <a16:creationId xmlns:a16="http://schemas.microsoft.com/office/drawing/2014/main" id="{50C911C6-CCCD-EFCE-3DC3-663F37E53805}"/>
+              </a:ext>
+            </a:extLst>
+          </p:cNvPr>
+          <p:cNvSpPr>
+            <a:spLocks noGrp="1"/>
+          </p:cNvSpPr>
+          <p:nvPr>
+            <p:ph type="ftr" sz="quarter" idx="11"/>
+          </p:nvPr>
+        </p:nvSpPr>
+        <p:spPr/>
+        <p:txBody>
+          <a:bodyPr/>
+          <a:lstStyle/>
+          <a:p>
+            <a:endParaRPr lang="es-SV"/>
+          </a:p>
+        </p:txBody>
+      </p:sp>
+      <p:sp>
+        <p:nvSpPr>
+          <p:cNvPr id="6" name="Marcador de número de diapositiva 5">
+            <a:extLst>
+              <a:ext uri="{FF2B5EF4-FFF2-40B4-BE49-F238E27FC236}">
+                <a16:creationId xmlns:a16="http://schemas.microsoft.com/office/drawing/2014/main" id="{C0085E2B-4DFB-D2D2-C203-7C543DA2861F}"/>
+              </a:ext>
+            </a:extLst>
+          </p:cNvPr>
+          <p:cNvSpPr>
+            <a:spLocks noGrp="1"/>
+          </p:cNvSpPr>
+          <p:nvPr>
+            <p:ph type="sldNum" sz="quarter" idx="12"/>
+          </p:nvPr>
+        </p:nvSpPr>
+        <p:spPr/>
+        <p:txBody>
+          <a:bodyPr/>
+          <a:lstStyle/>
+          <a:p>
+            <a:fld id="{AEE9AB63-2DD0-DF4B-A7F0-7BF2582936DD}" type="slidenum">
+              <a:rPr lang="es-SV" smtClean="0"/>
+              <a:t>‹Nº›</a:t>
+            </a:fld>
+            <a:endParaRPr lang="es-SV"/>
+          </a:p>
+        </p:txBody>
+      </p:sp>
+    </p:spTree>
+    <p:extLst>
+      <p:ext uri="{BB962C8B-B14F-4D97-AF65-F5344CB8AC3E}">
+        <p14:creationId xmlns:p14="http://schemas.microsoft.com/office/powerpoint/2010/main" val="1839321620"/>
+      </p:ext>
+    </p:extLst>
+  </p:cSld>
+  <p:clrMapOvr>
+    <a:masterClrMapping/>
+  </p:clrMapOvr>
+</p:sldLayout>
+</file>
+
 <file path=ppt/slideMasters/slideMaster1.xml><?xml version="1.0" encoding="utf-8"?>
 <p:sldMaster xmlns:a="http://schemas.openxmlformats.org/drawingml/2006/main" xmlns:r="http://schemas.openxmlformats.org/officeDocument/2006/relationships" xmlns:p="http://schemas.openxmlformats.org/presentationml/2006/main">
   <p:cSld>
+    <p:bg>
+      <p:bgRef idx="1001">
+        <a:schemeClr val="bg1"/>
+      </p:bgRef>
+    </p:bg>
     <p:spTree>
       <p:nvGrpSpPr>
         <p:cNvPr id="1" name=""/>
@@ -685,6 +686,7 @@
   <p:clrMap bg1="lt1" tx1="dk1" bg2="lt2" tx2="dk2" accent1="accent1" accent2="accent2" accent3="accent3" accent4="accent4" accent5="accent5" accent6="accent6" hlink="hlink" folHlink="folHlink"/>
   <p:sldLayoutIdLst>
     <p:sldLayoutId id="2147483649" r:id="rId1"/>
+    <p:sldLayoutId id="2147483650" r:id="rId2"/>
   </p:sldLayoutIdLst>
   <p:hf sldNum="0" hdr="0" ftr="0" dt="0"/>
   <p:txStyles>
@@ -942,12 +944,1401 @@
 
 <file path=ppt/slides/slide1.xml><?xml version="1.0" encoding="utf-8"?>
 <p:sld xmlns:a="http://schemas.openxmlformats.org/drawingml/2006/main" xmlns:r="http://schemas.openxmlformats.org/officeDocument/2006/relationships" xmlns:p="http://schemas.openxmlformats.org/presentationml/2006/main">
+  <p:cSld>
+    <p:spTree>
+      <p:nvGrpSpPr>
+        <p:cNvPr id="1" name=""/>
+        <p:cNvGrpSpPr/>
+        <p:nvPr/>
+      </p:nvGrpSpPr>
+      <p:grpSpPr>
+        <a:xfrm>
+          <a:off x="0" y="0"/>
+          <a:ext cx="0" cy="0"/>
+          <a:chOff x="0" y="0"/>
+          <a:chExt cx="0" cy="0"/>
+        </a:xfrm>
+      </p:grpSpPr>
+      <p:sp>
+        <p:nvSpPr>
+          <p:cNvPr id="2" name="Columna azul"/>
+          <p:cNvSpPr/>
+          <p:nvPr/>
+        </p:nvSpPr>
+        <p:spPr>
+          <a:xfrm>
+            <a:off x="0" y="0"/>
+            <a:ext cx="3538728" cy="6858000"/>
+          </a:xfrm>
+          <a:prstGeom prst="rect">
+            <a:avLst/>
+          </a:prstGeom>
+          <a:solidFill>
+            <a:srgbClr val="00376E"/>
+          </a:solidFill>
+          <a:ln>
+            <a:noFill/>
+          </a:ln>
+          <a:effectLst/>
+        </p:spPr>
+        <p:style>
+          <a:lnRef idx="1">
+            <a:schemeClr val="accent1"/>
+          </a:lnRef>
+          <a:fillRef idx="3">
+            <a:schemeClr val="accent1"/>
+          </a:fillRef>
+          <a:effectRef idx="2">
+            <a:schemeClr val="accent1"/>
+          </a:effectRef>
+          <a:fontRef idx="minor">
+            <a:schemeClr val="lt1"/>
+          </a:fontRef>
+        </p:style>
+        <p:txBody>
+          <a:bodyPr rtlCol="0" anchor="ctr"/>
+          <a:lstStyle/>
+          <a:p>
+            <a:pPr algn="ctr"/>
+            <a:endParaRPr lang="es-SV" noProof="0" dirty="0">
+              <a:latin typeface="Arial" panose="020B0604020202020204" pitchFamily="34" charset="0"/>
+              <a:cs typeface="Arial" panose="020B0604020202020204" pitchFamily="34" charset="0"/>
+            </a:endParaRPr>
+          </a:p>
+        </p:txBody>
+      </p:sp>
+      <p:sp>
+        <p:nvSpPr>
+          <p:cNvPr id="3" name="Acento"/>
+          <p:cNvSpPr/>
+          <p:nvPr/>
+        </p:nvSpPr>
+        <p:spPr>
+          <a:xfrm>
+            <a:off x="0" y="1216152"/>
+            <a:ext cx="201168" cy="1216152"/>
+          </a:xfrm>
+          <a:prstGeom prst="rect">
+            <a:avLst/>
+          </a:prstGeom>
+          <a:solidFill>
+            <a:srgbClr val="005C9F"/>
+          </a:solidFill>
+          <a:ln>
+            <a:noFill/>
+          </a:ln>
+          <a:effectLst/>
+        </p:spPr>
+        <p:style>
+          <a:lnRef idx="1">
+            <a:schemeClr val="accent1"/>
+          </a:lnRef>
+          <a:fillRef idx="3">
+            <a:schemeClr val="accent1"/>
+          </a:fillRef>
+          <a:effectRef idx="2">
+            <a:schemeClr val="accent1"/>
+          </a:effectRef>
+          <a:fontRef idx="minor">
+            <a:schemeClr val="lt1"/>
+          </a:fontRef>
+        </p:style>
+        <p:txBody>
+          <a:bodyPr rtlCol="0" anchor="ctr"/>
+          <a:lstStyle/>
+          <a:p>
+            <a:pPr algn="ctr"/>
+            <a:endParaRPr lang="es-SV" noProof="0" dirty="0">
+              <a:latin typeface="Arial" panose="020B0604020202020204" pitchFamily="34" charset="0"/>
+              <a:cs typeface="Arial" panose="020B0604020202020204" pitchFamily="34" charset="0"/>
+            </a:endParaRPr>
+          </a:p>
+        </p:txBody>
+      </p:sp>
+      <p:sp>
+        <p:nvSpPr>
+          <p:cNvPr id="6" name="Departamento"/>
+          <p:cNvSpPr/>
+          <p:nvPr/>
+        </p:nvSpPr>
+        <p:spPr>
+          <a:xfrm>
+            <a:off x="45720" y="5422392"/>
+            <a:ext cx="3447288" cy="960120"/>
+          </a:xfrm>
+          <a:prstGeom prst="rect">
+            <a:avLst/>
+          </a:prstGeom>
+          <a:solidFill>
+            <a:srgbClr val="005C9F"/>
+          </a:solidFill>
+          <a:ln>
+            <a:noFill/>
+          </a:ln>
+          <a:effectLst/>
+        </p:spPr>
+        <p:style>
+          <a:lnRef idx="1">
+            <a:schemeClr val="accent1"/>
+          </a:lnRef>
+          <a:fillRef idx="3">
+            <a:schemeClr val="accent1"/>
+          </a:fillRef>
+          <a:effectRef idx="2">
+            <a:schemeClr val="accent1"/>
+          </a:effectRef>
+          <a:fontRef idx="minor">
+            <a:schemeClr val="lt1"/>
+          </a:fontRef>
+        </p:style>
+        <p:txBody>
+          <a:bodyPr rtlCol="0" anchor="ctr"/>
+          <a:lstStyle/>
+          <a:p>
+            <a:pPr algn="ctr"/>
+            <a:endParaRPr lang="es-SV" noProof="0" dirty="0">
+              <a:latin typeface="Arial" panose="020B0604020202020204" pitchFamily="34" charset="0"/>
+              <a:cs typeface="Arial" panose="020B0604020202020204" pitchFamily="34" charset="0"/>
+            </a:endParaRPr>
+          </a:p>
+        </p:txBody>
+      </p:sp>
+      <p:sp>
+        <p:nvSpPr>
+          <p:cNvPr id="7" name="TextBox 6"/>
+          <p:cNvSpPr txBox="1"/>
+          <p:nvPr/>
+        </p:nvSpPr>
+        <p:spPr>
+          <a:xfrm>
+            <a:off x="45720" y="5656231"/>
+            <a:ext cx="3447288" cy="492443"/>
+          </a:xfrm>
+          <a:prstGeom prst="rect">
+            <a:avLst/>
+          </a:prstGeom>
+          <a:noFill/>
+        </p:spPr>
+        <p:txBody>
+          <a:bodyPr wrap="square" lIns="0" tIns="0" rIns="0" bIns="0" anchor="ctr">
+            <a:spAutoFit/>
+          </a:bodyPr>
+          <a:lstStyle/>
+          <a:p>
+            <a:pPr algn="ctr"/>
+            <a:r>
+              <a:rPr lang="es-SV" sz="1600" b="1" noProof="0" dirty="0">
+                <a:solidFill>
+                  <a:srgbClr val="FFFFFF"/>
+                </a:solidFill>
+                <a:latin typeface="Arial" panose="020B0604020202020204" pitchFamily="34" charset="0"/>
+                <a:cs typeface="Arial" panose="020B0604020202020204" pitchFamily="34" charset="0"/>
+              </a:rPr>
+              <a:t>Departamento de</a:t>
+            </a:r>
+          </a:p>
+          <a:p>
+            <a:pPr algn="ctr"/>
+            <a:r>
+              <a:rPr lang="es-SV" sz="1600" b="1" noProof="0" dirty="0">
+                <a:solidFill>
+                  <a:srgbClr val="FFFFFF"/>
+                </a:solidFill>
+                <a:latin typeface="Arial" panose="020B0604020202020204" pitchFamily="34" charset="0"/>
+                <a:cs typeface="Arial" panose="020B0604020202020204" pitchFamily="34" charset="0"/>
+              </a:rPr>
+              <a:t>Administración de Riesgos</a:t>
+            </a:r>
+          </a:p>
+        </p:txBody>
+      </p:sp>
+      <p:sp>
+        <p:nvSpPr>
+          <p:cNvPr id="8" name="TextBox 7"/>
+          <p:cNvSpPr txBox="1"/>
+          <p:nvPr/>
+        </p:nvSpPr>
+        <p:spPr>
+          <a:xfrm>
+            <a:off x="45720" y="6503167"/>
+            <a:ext cx="3447288" cy="261610"/>
+          </a:xfrm>
+          <a:prstGeom prst="rect">
+            <a:avLst/>
+          </a:prstGeom>
+          <a:noFill/>
+        </p:spPr>
+        <p:txBody>
+          <a:bodyPr wrap="square" lIns="0" tIns="0" rIns="0" bIns="0" anchor="ctr">
+            <a:spAutoFit/>
+          </a:bodyPr>
+          <a:lstStyle/>
+          <a:p>
+            <a:pPr algn="ctr"/>
+            <a:r>
+              <a:rPr lang="es-SV" sz="1700" b="1" noProof="0" dirty="0">
+                <a:solidFill>
+                  <a:srgbClr val="9DC3E6"/>
+                </a:solidFill>
+                <a:latin typeface="Arial" panose="020B0604020202020204" pitchFamily="34" charset="0"/>
+                <a:cs typeface="Arial" panose="020B0604020202020204" pitchFamily="34" charset="0"/>
+              </a:rPr>
+              <a:t>OCTUBRE 2026</a:t>
+            </a:r>
+          </a:p>
+        </p:txBody>
+      </p:sp>
+      <p:sp>
+        <p:nvSpPr>
+          <p:cNvPr id="9" name="TextBox 8"/>
+          <p:cNvSpPr txBox="1"/>
+          <p:nvPr/>
+        </p:nvSpPr>
+        <p:spPr>
+          <a:xfrm>
+            <a:off x="3921313" y="872424"/>
+            <a:ext cx="8001000" cy="984885"/>
+          </a:xfrm>
+          <a:prstGeom prst="rect">
+            <a:avLst/>
+          </a:prstGeom>
+          <a:noFill/>
+        </p:spPr>
+        <p:txBody>
+          <a:bodyPr wrap="square" lIns="0" tIns="0" rIns="0" bIns="0" anchor="ctr">
+            <a:spAutoFit/>
+          </a:bodyPr>
+          <a:lstStyle/>
+          <a:p>
+            <a:pPr algn="ctr"/>
+            <a:r>
+              <a:rPr lang="es-SV" sz="3200" b="1" noProof="0" dirty="0">
+                <a:solidFill>
+                  <a:srgbClr val="00376E"/>
+                </a:solidFill>
+                <a:latin typeface="+mj-lt"/>
+                <a:cs typeface="Arial" panose="020B0604020202020204" pitchFamily="34" charset="0"/>
+              </a:rPr>
+              <a:t>PRUEBAS DE CONTINUIDAD DEL NEGOCIO</a:t>
+            </a:r>
+          </a:p>
+        </p:txBody>
+      </p:sp>
+      <p:pic>
+        <p:nvPicPr>
+          <p:cNvPr id="12" name="logo" descr="/tmp/claude-0/-home-user-riesgo/74e9c8ad-7a43-5903-a089-2edd8047c387/scratchpad/assets/logo_white.png">
+            <a:extLst>
+              <a:ext uri="{FF2B5EF4-FFF2-40B4-BE49-F238E27FC236}">
+                <a16:creationId xmlns:a16="http://schemas.microsoft.com/office/drawing/2014/main" id="{6158355E-8FBE-C9ED-F166-BCDD022F7FC1}"/>
+              </a:ext>
+            </a:extLst>
+          </p:cNvPr>
+          <p:cNvPicPr>
+            <a:picLocks noChangeAspect="1"/>
+          </p:cNvPicPr>
+          <p:nvPr/>
+        </p:nvPicPr>
+        <p:blipFill>
+          <a:blip r:embed="rId2"/>
+          <a:stretch>
+            <a:fillRect/>
+          </a:stretch>
+        </p:blipFill>
+        <p:spPr>
+          <a:xfrm>
+            <a:off x="602040" y="1857309"/>
+            <a:ext cx="2334648" cy="1571691"/>
+          </a:xfrm>
+          <a:prstGeom prst="rect">
+            <a:avLst/>
+          </a:prstGeom>
+        </p:spPr>
+      </p:pic>
+      <p:sp>
+        <p:nvSpPr>
+          <p:cNvPr id="5" name="CuadroTexto 4">
+            <a:extLst>
+              <a:ext uri="{FF2B5EF4-FFF2-40B4-BE49-F238E27FC236}">
+                <a16:creationId xmlns:a16="http://schemas.microsoft.com/office/drawing/2014/main" id="{D6D03B21-56FD-FAE9-A731-93F56E7B5C50}"/>
+              </a:ext>
+            </a:extLst>
+          </p:cNvPr>
+          <p:cNvSpPr txBox="1"/>
+          <p:nvPr/>
+        </p:nvSpPr>
+        <p:spPr>
+          <a:xfrm>
+            <a:off x="4709221" y="2159731"/>
+            <a:ext cx="6096000" cy="523220"/>
+          </a:xfrm>
+          <a:prstGeom prst="rect">
+            <a:avLst/>
+          </a:prstGeom>
+          <a:noFill/>
+        </p:spPr>
+        <p:txBody>
+          <a:bodyPr wrap="square">
+            <a:spAutoFit/>
+          </a:bodyPr>
+          <a:lstStyle/>
+          <a:p>
+            <a:pPr marL="0" indent="0" algn="ctr">
+              <a:buNone/>
+            </a:pPr>
+            <a:r>
+              <a:rPr lang="es-SV" sz="1400" noProof="0" dirty="0">
+                <a:solidFill>
+                  <a:srgbClr val="002060"/>
+                </a:solidFill>
+                <a:latin typeface="+mj-lt"/>
+              </a:rPr>
+              <a:t>Evaluación de Continuidad y Desempeño del Proveedor Crítico de Comunicaciones ante Interrupción Simulada de Conectividad</a:t>
+            </a:r>
+          </a:p>
+        </p:txBody>
+      </p:sp>
+      <p:sp>
+        <p:nvSpPr>
+          <p:cNvPr id="13" name="Text 4">
+            <a:extLst>
+              <a:ext uri="{FF2B5EF4-FFF2-40B4-BE49-F238E27FC236}">
+                <a16:creationId xmlns:a16="http://schemas.microsoft.com/office/drawing/2014/main" id="{372E7078-9CEF-42DA-BD8A-74E587305C89}"/>
+              </a:ext>
+            </a:extLst>
+          </p:cNvPr>
+          <p:cNvSpPr txBox="1"/>
+          <p:nvPr/>
+        </p:nvSpPr>
+        <p:spPr>
+          <a:xfrm>
+            <a:off x="6721354" y="3285341"/>
+            <a:ext cx="2346446" cy="640080"/>
+          </a:xfrm>
+          <a:prstGeom prst="rect">
+            <a:avLst/>
+          </a:prstGeom>
+          <a:noFill/>
+          <a:ln/>
+        </p:spPr>
+        <p:txBody>
+          <a:bodyPr wrap="square" lIns="0" tIns="0" rIns="0" bIns="0" rtlCol="0" anchor="ctr"/>
+          <a:lstStyle/>
+          <a:p>
+            <a:pPr marL="0" indent="0">
+              <a:buNone/>
+            </a:pPr>
+            <a:r>
+              <a:rPr lang="es-SV" sz="1200" b="1" noProof="0" dirty="0">
+                <a:solidFill>
+                  <a:srgbClr val="14284B"/>
+                </a:solidFill>
+                <a:latin typeface="+mj-lt"/>
+                <a:ea typeface="Cambria" pitchFamily="34" charset="-122"/>
+                <a:cs typeface="Cambria" pitchFamily="34" charset="-120"/>
+              </a:rPr>
+              <a:t>CONTROL DE LAS PRUEBAS</a:t>
+            </a:r>
+            <a:endParaRPr lang="es-SV" sz="1200" noProof="0" dirty="0">
+              <a:latin typeface="+mj-lt"/>
+            </a:endParaRPr>
+          </a:p>
+        </p:txBody>
+      </p:sp>
+      <p:grpSp>
+        <p:nvGrpSpPr>
+          <p:cNvPr id="57" name="Grupo 56">
+            <a:extLst>
+              <a:ext uri="{FF2B5EF4-FFF2-40B4-BE49-F238E27FC236}">
+                <a16:creationId xmlns:a16="http://schemas.microsoft.com/office/drawing/2014/main" id="{D4EB83BF-17BE-487C-22F9-35F6C42C48B9}"/>
+              </a:ext>
+            </a:extLst>
+          </p:cNvPr>
+          <p:cNvGrpSpPr/>
+          <p:nvPr/>
+        </p:nvGrpSpPr>
+        <p:grpSpPr>
+          <a:xfrm>
+            <a:off x="5920773" y="3945887"/>
+            <a:ext cx="1779971" cy="640080"/>
+            <a:chOff x="5937442" y="4289111"/>
+            <a:chExt cx="1779971" cy="640080"/>
+          </a:xfrm>
+        </p:grpSpPr>
+        <p:sp>
+          <p:nvSpPr>
+            <p:cNvPr id="15" name="Shape 5">
+              <a:extLst>
+                <a:ext uri="{FF2B5EF4-FFF2-40B4-BE49-F238E27FC236}">
+                  <a16:creationId xmlns:a16="http://schemas.microsoft.com/office/drawing/2014/main" id="{BECE3F04-54B0-3F93-C75F-D554CEA14DEB}"/>
+                </a:ext>
+              </a:extLst>
+            </p:cNvPr>
+            <p:cNvSpPr/>
+            <p:nvPr/>
+          </p:nvSpPr>
+          <p:spPr>
+            <a:xfrm>
+              <a:off x="5937442" y="4289111"/>
+              <a:ext cx="1779971" cy="640080"/>
+            </a:xfrm>
+            <a:prstGeom prst="roundRect">
+              <a:avLst>
+                <a:gd name="adj" fmla="val 11429"/>
+              </a:avLst>
+            </a:prstGeom>
+            <a:solidFill>
+              <a:srgbClr val="EEF4F8"/>
+            </a:solidFill>
+            <a:ln w="9525">
+              <a:solidFill>
+                <a:srgbClr val="EEF4F8"/>
+              </a:solidFill>
+              <a:prstDash val="solid"/>
+            </a:ln>
+          </p:spPr>
+          <p:txBody>
+            <a:bodyPr/>
+            <a:lstStyle/>
+            <a:p>
+              <a:endParaRPr lang="es-SV" noProof="0" dirty="0">
+                <a:latin typeface="+mj-lt"/>
+              </a:endParaRPr>
+            </a:p>
+          </p:txBody>
+        </p:sp>
+        <p:sp>
+          <p:nvSpPr>
+            <p:cNvPr id="17" name="Shape 6">
+              <a:extLst>
+                <a:ext uri="{FF2B5EF4-FFF2-40B4-BE49-F238E27FC236}">
+                  <a16:creationId xmlns:a16="http://schemas.microsoft.com/office/drawing/2014/main" id="{E68A931B-4FDE-4438-E106-155A128E6625}"/>
+                </a:ext>
+              </a:extLst>
+            </p:cNvPr>
+            <p:cNvSpPr/>
+            <p:nvPr/>
+          </p:nvSpPr>
+          <p:spPr>
+            <a:xfrm>
+              <a:off x="6028790" y="4460669"/>
+              <a:ext cx="329184" cy="329184"/>
+            </a:xfrm>
+            <a:prstGeom prst="ellipse">
+              <a:avLst/>
+            </a:prstGeom>
+            <a:solidFill>
+              <a:srgbClr val="14284B"/>
+            </a:solidFill>
+            <a:ln w="12700">
+              <a:solidFill>
+                <a:srgbClr val="14284B"/>
+              </a:solidFill>
+              <a:prstDash val="solid"/>
+            </a:ln>
+          </p:spPr>
+          <p:txBody>
+            <a:bodyPr/>
+            <a:lstStyle/>
+            <a:p>
+              <a:endParaRPr lang="es-SV" noProof="0" dirty="0">
+                <a:latin typeface="+mj-lt"/>
+              </a:endParaRPr>
+            </a:p>
+          </p:txBody>
+        </p:sp>
+        <p:pic>
+          <p:nvPicPr>
+            <p:cNvPr id="19" name="Image 1" descr="preencoded.png">
+              <a:extLst>
+                <a:ext uri="{FF2B5EF4-FFF2-40B4-BE49-F238E27FC236}">
+                  <a16:creationId xmlns:a16="http://schemas.microsoft.com/office/drawing/2014/main" id="{683F1FAC-28AB-A175-D3E5-BDBA0B6F2547}"/>
+                </a:ext>
+              </a:extLst>
+            </p:cNvPr>
+            <p:cNvPicPr>
+              <a:picLocks noChangeAspect="1"/>
+            </p:cNvPicPr>
+            <p:nvPr/>
+          </p:nvPicPr>
+          <p:blipFill>
+            <a:blip r:embed="rId3"/>
+            <a:stretch>
+              <a:fillRect/>
+            </a:stretch>
+          </p:blipFill>
+          <p:spPr>
+            <a:xfrm>
+              <a:off x="6114378" y="4546257"/>
+              <a:ext cx="158008" cy="158008"/>
+            </a:xfrm>
+            <a:prstGeom prst="rect">
+              <a:avLst/>
+            </a:prstGeom>
+          </p:spPr>
+        </p:pic>
+        <p:sp>
+          <p:nvSpPr>
+            <p:cNvPr id="21" name="Text 7">
+              <a:extLst>
+                <a:ext uri="{FF2B5EF4-FFF2-40B4-BE49-F238E27FC236}">
+                  <a16:creationId xmlns:a16="http://schemas.microsoft.com/office/drawing/2014/main" id="{3B799D0C-6E9F-821A-D5F4-EA66B0456C08}"/>
+                </a:ext>
+              </a:extLst>
+            </p:cNvPr>
+            <p:cNvSpPr txBox="1"/>
+            <p:nvPr/>
+          </p:nvSpPr>
+          <p:spPr>
+            <a:xfrm>
+              <a:off x="6440270" y="4378373"/>
+              <a:ext cx="1213043" cy="512064"/>
+            </a:xfrm>
+            <a:prstGeom prst="rect">
+              <a:avLst/>
+            </a:prstGeom>
+            <a:noFill/>
+            <a:ln/>
+          </p:spPr>
+          <p:txBody>
+            <a:bodyPr wrap="square" lIns="0" tIns="0" rIns="0" bIns="0" rtlCol="0" anchor="ctr"/>
+            <a:lstStyle/>
+            <a:p>
+              <a:pPr marL="0" indent="0" algn="ctr">
+                <a:buNone/>
+              </a:pPr>
+              <a:r>
+                <a:rPr lang="es-SV" sz="900" b="1" noProof="0" dirty="0">
+                  <a:solidFill>
+                    <a:srgbClr val="14284B"/>
+                  </a:solidFill>
+                  <a:latin typeface="+mj-lt"/>
+                </a:rPr>
+                <a:t>Fecha de ejecución de prueba:</a:t>
+              </a:r>
+              <a:endParaRPr lang="es-SV" sz="900" noProof="0" dirty="0">
+                <a:latin typeface="+mj-lt"/>
+              </a:endParaRPr>
+            </a:p>
+            <a:p>
+              <a:pPr marL="0" indent="0" algn="ctr">
+                <a:buNone/>
+              </a:pPr>
+              <a:r>
+                <a:rPr lang="es-SV" sz="1000" noProof="0" dirty="0">
+                  <a:solidFill>
+                    <a:srgbClr val="002060"/>
+                  </a:solidFill>
+                  <a:latin typeface="+mj-lt"/>
+                </a:rPr>
+                <a:t>04-Nov-2026</a:t>
+              </a:r>
+              <a:endParaRPr lang="es-SV" sz="900" noProof="0" dirty="0">
+                <a:solidFill>
+                  <a:srgbClr val="002060"/>
+                </a:solidFill>
+                <a:latin typeface="+mj-lt"/>
+              </a:endParaRPr>
+            </a:p>
+          </p:txBody>
+        </p:sp>
+      </p:grpSp>
+      <p:grpSp>
+        <p:nvGrpSpPr>
+          <p:cNvPr id="58" name="Grupo 57">
+            <a:extLst>
+              <a:ext uri="{FF2B5EF4-FFF2-40B4-BE49-F238E27FC236}">
+                <a16:creationId xmlns:a16="http://schemas.microsoft.com/office/drawing/2014/main" id="{A74015C2-3A8A-9EEA-F4F9-A71A4A24396E}"/>
+              </a:ext>
+            </a:extLst>
+          </p:cNvPr>
+          <p:cNvGrpSpPr/>
+          <p:nvPr/>
+        </p:nvGrpSpPr>
+        <p:grpSpPr>
+          <a:xfrm>
+            <a:off x="5923913" y="4741415"/>
+            <a:ext cx="1779971" cy="640080"/>
+            <a:chOff x="5940582" y="5084639"/>
+            <a:chExt cx="1779971" cy="640080"/>
+          </a:xfrm>
+        </p:grpSpPr>
+        <p:sp>
+          <p:nvSpPr>
+            <p:cNvPr id="23" name="Shape 8">
+              <a:extLst>
+                <a:ext uri="{FF2B5EF4-FFF2-40B4-BE49-F238E27FC236}">
+                  <a16:creationId xmlns:a16="http://schemas.microsoft.com/office/drawing/2014/main" id="{B84A7D2D-9983-B3A4-E90A-99592A5E1D17}"/>
+                </a:ext>
+              </a:extLst>
+            </p:cNvPr>
+            <p:cNvSpPr/>
+            <p:nvPr/>
+          </p:nvSpPr>
+          <p:spPr>
+            <a:xfrm>
+              <a:off x="5940582" y="5084639"/>
+              <a:ext cx="1779971" cy="640080"/>
+            </a:xfrm>
+            <a:prstGeom prst="roundRect">
+              <a:avLst>
+                <a:gd name="adj" fmla="val 11429"/>
+              </a:avLst>
+            </a:prstGeom>
+            <a:solidFill>
+              <a:srgbClr val="EEF4F8"/>
+            </a:solidFill>
+            <a:ln w="9525">
+              <a:solidFill>
+                <a:srgbClr val="EEF4F8"/>
+              </a:solidFill>
+              <a:prstDash val="solid"/>
+            </a:ln>
+          </p:spPr>
+          <p:txBody>
+            <a:bodyPr/>
+            <a:lstStyle/>
+            <a:p>
+              <a:endParaRPr lang="es-SV" noProof="0" dirty="0">
+                <a:latin typeface="+mj-lt"/>
+              </a:endParaRPr>
+            </a:p>
+          </p:txBody>
+        </p:sp>
+        <p:sp>
+          <p:nvSpPr>
+            <p:cNvPr id="25" name="Shape 9">
+              <a:extLst>
+                <a:ext uri="{FF2B5EF4-FFF2-40B4-BE49-F238E27FC236}">
+                  <a16:creationId xmlns:a16="http://schemas.microsoft.com/office/drawing/2014/main" id="{300E058F-D5A4-1C35-58A9-B101A1A81B81}"/>
+                </a:ext>
+              </a:extLst>
+            </p:cNvPr>
+            <p:cNvSpPr/>
+            <p:nvPr/>
+          </p:nvSpPr>
+          <p:spPr>
+            <a:xfrm>
+              <a:off x="6031930" y="5256197"/>
+              <a:ext cx="329184" cy="329184"/>
+            </a:xfrm>
+            <a:prstGeom prst="ellipse">
+              <a:avLst/>
+            </a:prstGeom>
+            <a:solidFill>
+              <a:srgbClr val="14284B"/>
+            </a:solidFill>
+            <a:ln w="12700">
+              <a:solidFill>
+                <a:srgbClr val="14284B"/>
+              </a:solidFill>
+              <a:prstDash val="solid"/>
+            </a:ln>
+          </p:spPr>
+          <p:txBody>
+            <a:bodyPr/>
+            <a:lstStyle/>
+            <a:p>
+              <a:endParaRPr lang="es-SV" noProof="0" dirty="0">
+                <a:latin typeface="+mj-lt"/>
+              </a:endParaRPr>
+            </a:p>
+          </p:txBody>
+        </p:sp>
+        <p:pic>
+          <p:nvPicPr>
+            <p:cNvPr id="27" name="Image 2" descr="preencoded.png">
+              <a:extLst>
+                <a:ext uri="{FF2B5EF4-FFF2-40B4-BE49-F238E27FC236}">
+                  <a16:creationId xmlns:a16="http://schemas.microsoft.com/office/drawing/2014/main" id="{F1F136FA-48AF-0B85-ECCB-26B8417395A1}"/>
+                </a:ext>
+              </a:extLst>
+            </p:cNvPr>
+            <p:cNvPicPr>
+              <a:picLocks noChangeAspect="1"/>
+            </p:cNvPicPr>
+            <p:nvPr/>
+          </p:nvPicPr>
+          <p:blipFill>
+            <a:blip r:embed="rId4"/>
+            <a:stretch>
+              <a:fillRect/>
+            </a:stretch>
+          </p:blipFill>
+          <p:spPr>
+            <a:xfrm>
+              <a:off x="6117518" y="5341785"/>
+              <a:ext cx="158008" cy="158008"/>
+            </a:xfrm>
+            <a:prstGeom prst="rect">
+              <a:avLst/>
+            </a:prstGeom>
+          </p:spPr>
+        </p:pic>
+        <p:sp>
+          <p:nvSpPr>
+            <p:cNvPr id="29" name="Text 10">
+              <a:extLst>
+                <a:ext uri="{FF2B5EF4-FFF2-40B4-BE49-F238E27FC236}">
+                  <a16:creationId xmlns:a16="http://schemas.microsoft.com/office/drawing/2014/main" id="{0BFB0185-F804-8792-C344-8A2F86491406}"/>
+                </a:ext>
+              </a:extLst>
+            </p:cNvPr>
+            <p:cNvSpPr txBox="1"/>
+            <p:nvPr/>
+          </p:nvSpPr>
+          <p:spPr>
+            <a:xfrm>
+              <a:off x="6443410" y="5173901"/>
+              <a:ext cx="1213043" cy="512064"/>
+            </a:xfrm>
+            <a:prstGeom prst="rect">
+              <a:avLst/>
+            </a:prstGeom>
+            <a:noFill/>
+            <a:ln/>
+          </p:spPr>
+          <p:txBody>
+            <a:bodyPr wrap="square" lIns="0" tIns="0" rIns="0" bIns="0" rtlCol="0" anchor="ctr"/>
+            <a:lstStyle/>
+            <a:p>
+              <a:pPr marL="0" indent="0" algn="ctr">
+                <a:buNone/>
+              </a:pPr>
+              <a:r>
+                <a:rPr lang="es-SV" sz="900" b="1" noProof="0" dirty="0">
+                  <a:solidFill>
+                    <a:srgbClr val="14284B"/>
+                  </a:solidFill>
+                  <a:latin typeface="+mj-lt"/>
+                </a:rPr>
+                <a:t>Tipo de prueba</a:t>
+              </a:r>
+              <a:endParaRPr lang="es-SV" sz="900" noProof="0" dirty="0">
+                <a:latin typeface="+mj-lt"/>
+              </a:endParaRPr>
+            </a:p>
+            <a:p>
+              <a:pPr marL="0" indent="0" algn="ctr">
+                <a:buNone/>
+              </a:pPr>
+              <a:r>
+                <a:rPr lang="es-SV" sz="1000" b="1" noProof="0" dirty="0">
+                  <a:solidFill>
+                    <a:srgbClr val="0E9AA7"/>
+                  </a:solidFill>
+                  <a:latin typeface="+mj-lt"/>
+                </a:rPr>
+                <a:t>Simulación</a:t>
+              </a:r>
+              <a:endParaRPr lang="es-SV" sz="900" noProof="0" dirty="0">
+                <a:latin typeface="+mj-lt"/>
+              </a:endParaRPr>
+            </a:p>
+          </p:txBody>
+        </p:sp>
+      </p:grpSp>
+      <p:grpSp>
+        <p:nvGrpSpPr>
+          <p:cNvPr id="56" name="Grupo 55">
+            <a:extLst>
+              <a:ext uri="{FF2B5EF4-FFF2-40B4-BE49-F238E27FC236}">
+                <a16:creationId xmlns:a16="http://schemas.microsoft.com/office/drawing/2014/main" id="{D929BAC2-075D-0ED1-BC86-DFBC5D3F2588}"/>
+              </a:ext>
+            </a:extLst>
+          </p:cNvPr>
+          <p:cNvGrpSpPr/>
+          <p:nvPr/>
+        </p:nvGrpSpPr>
+        <p:grpSpPr>
+          <a:xfrm>
+            <a:off x="7861116" y="3973585"/>
+            <a:ext cx="1779971" cy="640080"/>
+            <a:chOff x="7857621" y="4305221"/>
+            <a:chExt cx="1779971" cy="640080"/>
+          </a:xfrm>
+        </p:grpSpPr>
+        <p:sp>
+          <p:nvSpPr>
+            <p:cNvPr id="31" name="Shape 11">
+              <a:extLst>
+                <a:ext uri="{FF2B5EF4-FFF2-40B4-BE49-F238E27FC236}">
+                  <a16:creationId xmlns:a16="http://schemas.microsoft.com/office/drawing/2014/main" id="{2C8BAAAA-CBA7-F6D3-A1E9-1B4D81B74E35}"/>
+                </a:ext>
+              </a:extLst>
+            </p:cNvPr>
+            <p:cNvSpPr/>
+            <p:nvPr/>
+          </p:nvSpPr>
+          <p:spPr>
+            <a:xfrm>
+              <a:off x="7857621" y="4305221"/>
+              <a:ext cx="1779971" cy="640080"/>
+            </a:xfrm>
+            <a:prstGeom prst="roundRect">
+              <a:avLst>
+                <a:gd name="adj" fmla="val 11429"/>
+              </a:avLst>
+            </a:prstGeom>
+            <a:solidFill>
+              <a:srgbClr val="EEF4F8"/>
+            </a:solidFill>
+            <a:ln w="9525">
+              <a:solidFill>
+                <a:srgbClr val="EEF4F8"/>
+              </a:solidFill>
+              <a:prstDash val="solid"/>
+            </a:ln>
+          </p:spPr>
+          <p:txBody>
+            <a:bodyPr/>
+            <a:lstStyle/>
+            <a:p>
+              <a:endParaRPr lang="es-SV" noProof="0" dirty="0">
+                <a:latin typeface="+mj-lt"/>
+              </a:endParaRPr>
+            </a:p>
+          </p:txBody>
+        </p:sp>
+        <p:sp>
+          <p:nvSpPr>
+            <p:cNvPr id="33" name="Shape 12">
+              <a:extLst>
+                <a:ext uri="{FF2B5EF4-FFF2-40B4-BE49-F238E27FC236}">
+                  <a16:creationId xmlns:a16="http://schemas.microsoft.com/office/drawing/2014/main" id="{3C3498C7-F08A-5354-B3DD-69AA3D0BF04C}"/>
+                </a:ext>
+              </a:extLst>
+            </p:cNvPr>
+            <p:cNvSpPr/>
+            <p:nvPr/>
+          </p:nvSpPr>
+          <p:spPr>
+            <a:xfrm>
+              <a:off x="7949061" y="4460669"/>
+              <a:ext cx="329184" cy="329184"/>
+            </a:xfrm>
+            <a:prstGeom prst="ellipse">
+              <a:avLst/>
+            </a:prstGeom>
+            <a:solidFill>
+              <a:srgbClr val="14284B"/>
+            </a:solidFill>
+            <a:ln w="12700">
+              <a:solidFill>
+                <a:srgbClr val="14284B"/>
+              </a:solidFill>
+              <a:prstDash val="solid"/>
+            </a:ln>
+          </p:spPr>
+          <p:txBody>
+            <a:bodyPr/>
+            <a:lstStyle/>
+            <a:p>
+              <a:endParaRPr lang="es-SV" noProof="0" dirty="0">
+                <a:latin typeface="+mj-lt"/>
+              </a:endParaRPr>
+            </a:p>
+          </p:txBody>
+        </p:sp>
+        <p:pic>
+          <p:nvPicPr>
+            <p:cNvPr id="35" name="Image 3" descr="preencoded.png">
+              <a:extLst>
+                <a:ext uri="{FF2B5EF4-FFF2-40B4-BE49-F238E27FC236}">
+                  <a16:creationId xmlns:a16="http://schemas.microsoft.com/office/drawing/2014/main" id="{44657688-72EF-C163-380A-DC8B25E47AE3}"/>
+                </a:ext>
+              </a:extLst>
+            </p:cNvPr>
+            <p:cNvPicPr>
+              <a:picLocks noChangeAspect="1"/>
+            </p:cNvPicPr>
+            <p:nvPr/>
+          </p:nvPicPr>
+          <p:blipFill>
+            <a:blip r:embed="rId5"/>
+            <a:stretch>
+              <a:fillRect/>
+            </a:stretch>
+          </p:blipFill>
+          <p:spPr>
+            <a:xfrm>
+              <a:off x="8034649" y="4546257"/>
+              <a:ext cx="158008" cy="158008"/>
+            </a:xfrm>
+            <a:prstGeom prst="rect">
+              <a:avLst/>
+            </a:prstGeom>
+          </p:spPr>
+        </p:pic>
+        <p:sp>
+          <p:nvSpPr>
+            <p:cNvPr id="37" name="Text 13">
+              <a:extLst>
+                <a:ext uri="{FF2B5EF4-FFF2-40B4-BE49-F238E27FC236}">
+                  <a16:creationId xmlns:a16="http://schemas.microsoft.com/office/drawing/2014/main" id="{D4D39153-8904-B4C4-C6DE-7E08CB633762}"/>
+                </a:ext>
+              </a:extLst>
+            </p:cNvPr>
+            <p:cNvSpPr txBox="1"/>
+            <p:nvPr/>
+          </p:nvSpPr>
+          <p:spPr>
+            <a:xfrm>
+              <a:off x="8360541" y="4378373"/>
+              <a:ext cx="1213043" cy="512064"/>
+            </a:xfrm>
+            <a:prstGeom prst="rect">
+              <a:avLst/>
+            </a:prstGeom>
+            <a:noFill/>
+            <a:ln/>
+          </p:spPr>
+          <p:txBody>
+            <a:bodyPr wrap="square" lIns="0" tIns="0" rIns="0" bIns="0" rtlCol="0" anchor="ctr"/>
+            <a:lstStyle/>
+            <a:p>
+              <a:pPr marL="0" indent="0" algn="ctr">
+                <a:buNone/>
+              </a:pPr>
+              <a:r>
+                <a:rPr lang="es-SV" sz="900" b="1" noProof="0" dirty="0">
+                  <a:solidFill>
+                    <a:srgbClr val="14284B"/>
+                  </a:solidFill>
+                  <a:latin typeface="+mj-lt"/>
+                </a:rPr>
+                <a:t>Hora de inicio:</a:t>
+              </a:r>
+            </a:p>
+            <a:p>
+              <a:pPr marL="0" indent="0" algn="ctr">
+                <a:buNone/>
+              </a:pPr>
+              <a:r>
+                <a:rPr lang="es-SV" sz="1000" noProof="0" dirty="0">
+                  <a:solidFill>
+                    <a:srgbClr val="002060"/>
+                  </a:solidFill>
+                  <a:latin typeface="+mj-lt"/>
+                </a:rPr>
+                <a:t>9:00 am</a:t>
+              </a:r>
+              <a:endParaRPr lang="es-SV" sz="900" noProof="0" dirty="0">
+                <a:solidFill>
+                  <a:srgbClr val="002060"/>
+                </a:solidFill>
+                <a:latin typeface="+mj-lt"/>
+              </a:endParaRPr>
+            </a:p>
+          </p:txBody>
+        </p:sp>
+      </p:grpSp>
+      <p:grpSp>
+        <p:nvGrpSpPr>
+          <p:cNvPr id="55" name="Grupo 54">
+            <a:extLst>
+              <a:ext uri="{FF2B5EF4-FFF2-40B4-BE49-F238E27FC236}">
+                <a16:creationId xmlns:a16="http://schemas.microsoft.com/office/drawing/2014/main" id="{530FB907-73A4-8216-2C05-4799BC0B7C45}"/>
+              </a:ext>
+            </a:extLst>
+          </p:cNvPr>
+          <p:cNvGrpSpPr/>
+          <p:nvPr/>
+        </p:nvGrpSpPr>
+        <p:grpSpPr>
+          <a:xfrm>
+            <a:off x="7840952" y="4756411"/>
+            <a:ext cx="1779971" cy="640080"/>
+            <a:chOff x="7857621" y="5099635"/>
+            <a:chExt cx="1779971" cy="640080"/>
+          </a:xfrm>
+        </p:grpSpPr>
+        <p:sp>
+          <p:nvSpPr>
+            <p:cNvPr id="39" name="Shape 14">
+              <a:extLst>
+                <a:ext uri="{FF2B5EF4-FFF2-40B4-BE49-F238E27FC236}">
+                  <a16:creationId xmlns:a16="http://schemas.microsoft.com/office/drawing/2014/main" id="{4D33B98B-B2D9-88D3-5CEE-268956617781}"/>
+                </a:ext>
+              </a:extLst>
+            </p:cNvPr>
+            <p:cNvSpPr/>
+            <p:nvPr/>
+          </p:nvSpPr>
+          <p:spPr>
+            <a:xfrm>
+              <a:off x="7857621" y="5099635"/>
+              <a:ext cx="1779971" cy="640080"/>
+            </a:xfrm>
+            <a:prstGeom prst="roundRect">
+              <a:avLst>
+                <a:gd name="adj" fmla="val 11429"/>
+              </a:avLst>
+            </a:prstGeom>
+            <a:solidFill>
+              <a:srgbClr val="EEF4F8"/>
+            </a:solidFill>
+            <a:ln w="9525">
+              <a:solidFill>
+                <a:srgbClr val="EEF4F8"/>
+              </a:solidFill>
+              <a:prstDash val="solid"/>
+            </a:ln>
+          </p:spPr>
+          <p:txBody>
+            <a:bodyPr/>
+            <a:lstStyle/>
+            <a:p>
+              <a:endParaRPr lang="es-SV" noProof="0" dirty="0">
+                <a:latin typeface="+mj-lt"/>
+              </a:endParaRPr>
+            </a:p>
+          </p:txBody>
+        </p:sp>
+        <p:sp>
+          <p:nvSpPr>
+            <p:cNvPr id="41" name="Shape 15">
+              <a:extLst>
+                <a:ext uri="{FF2B5EF4-FFF2-40B4-BE49-F238E27FC236}">
+                  <a16:creationId xmlns:a16="http://schemas.microsoft.com/office/drawing/2014/main" id="{0FD3067D-A36C-2660-8673-9A877155BFF6}"/>
+                </a:ext>
+              </a:extLst>
+            </p:cNvPr>
+            <p:cNvSpPr/>
+            <p:nvPr/>
+          </p:nvSpPr>
+          <p:spPr>
+            <a:xfrm>
+              <a:off x="7949061" y="5255083"/>
+              <a:ext cx="329184" cy="329184"/>
+            </a:xfrm>
+            <a:prstGeom prst="ellipse">
+              <a:avLst/>
+            </a:prstGeom>
+            <a:solidFill>
+              <a:srgbClr val="14284B"/>
+            </a:solidFill>
+            <a:ln w="12700">
+              <a:solidFill>
+                <a:srgbClr val="14284B"/>
+              </a:solidFill>
+              <a:prstDash val="solid"/>
+            </a:ln>
+          </p:spPr>
+          <p:txBody>
+            <a:bodyPr/>
+            <a:lstStyle/>
+            <a:p>
+              <a:endParaRPr lang="es-SV" noProof="0" dirty="0">
+                <a:latin typeface="+mj-lt"/>
+              </a:endParaRPr>
+            </a:p>
+          </p:txBody>
+        </p:sp>
+        <p:pic>
+          <p:nvPicPr>
+            <p:cNvPr id="43" name="Image 4" descr="preencoded.png">
+              <a:extLst>
+                <a:ext uri="{FF2B5EF4-FFF2-40B4-BE49-F238E27FC236}">
+                  <a16:creationId xmlns:a16="http://schemas.microsoft.com/office/drawing/2014/main" id="{C4ACB6E5-E42A-F9AD-FA7C-4DB1B5988CB0}"/>
+                </a:ext>
+              </a:extLst>
+            </p:cNvPr>
+            <p:cNvPicPr>
+              <a:picLocks noChangeAspect="1"/>
+            </p:cNvPicPr>
+            <p:nvPr/>
+          </p:nvPicPr>
+          <p:blipFill>
+            <a:blip r:embed="rId6"/>
+            <a:stretch>
+              <a:fillRect/>
+            </a:stretch>
+          </p:blipFill>
+          <p:spPr>
+            <a:xfrm>
+              <a:off x="8034649" y="5340671"/>
+              <a:ext cx="158008" cy="158008"/>
+            </a:xfrm>
+            <a:prstGeom prst="rect">
+              <a:avLst/>
+            </a:prstGeom>
+          </p:spPr>
+        </p:pic>
+        <p:sp>
+          <p:nvSpPr>
+            <p:cNvPr id="45" name="Text 16">
+              <a:extLst>
+                <a:ext uri="{FF2B5EF4-FFF2-40B4-BE49-F238E27FC236}">
+                  <a16:creationId xmlns:a16="http://schemas.microsoft.com/office/drawing/2014/main" id="{DA9D524A-893D-5DE4-40A5-EC781929C7C3}"/>
+                </a:ext>
+              </a:extLst>
+            </p:cNvPr>
+            <p:cNvSpPr txBox="1"/>
+            <p:nvPr/>
+          </p:nvSpPr>
+          <p:spPr>
+            <a:xfrm>
+              <a:off x="8360541" y="5172787"/>
+              <a:ext cx="1213043" cy="512064"/>
+            </a:xfrm>
+            <a:prstGeom prst="rect">
+              <a:avLst/>
+            </a:prstGeom>
+            <a:noFill/>
+            <a:ln/>
+          </p:spPr>
+          <p:txBody>
+            <a:bodyPr wrap="square" lIns="0" tIns="0" rIns="0" bIns="0" rtlCol="0" anchor="ctr"/>
+            <a:lstStyle/>
+            <a:p>
+              <a:pPr marL="0" indent="0" algn="ctr">
+                <a:buNone/>
+              </a:pPr>
+              <a:r>
+                <a:rPr lang="es-SV" sz="900" b="1" noProof="0" dirty="0">
+                  <a:solidFill>
+                    <a:srgbClr val="14284B"/>
+                  </a:solidFill>
+                  <a:latin typeface="+mj-lt"/>
+                </a:rPr>
+                <a:t>Lugar de Ejecución: </a:t>
+              </a:r>
+              <a:r>
+                <a:rPr lang="es-SV" sz="900" noProof="0" dirty="0">
+                  <a:solidFill>
+                    <a:srgbClr val="14284B"/>
+                  </a:solidFill>
+                  <a:latin typeface="+mj-lt"/>
+                </a:rPr>
+                <a:t>Agencia Plaza Mundo</a:t>
+              </a:r>
+              <a:endParaRPr lang="es-SV" sz="900" noProof="0" dirty="0">
+                <a:latin typeface="+mj-lt"/>
+              </a:endParaRPr>
+            </a:p>
+          </p:txBody>
+        </p:sp>
+      </p:grpSp>
+      <p:grpSp>
+        <p:nvGrpSpPr>
+          <p:cNvPr id="54" name="Grupo 53">
+            <a:extLst>
+              <a:ext uri="{FF2B5EF4-FFF2-40B4-BE49-F238E27FC236}">
+                <a16:creationId xmlns:a16="http://schemas.microsoft.com/office/drawing/2014/main" id="{20164FFF-FB54-56D8-05FE-E4A152EEAB52}"/>
+              </a:ext>
+            </a:extLst>
+          </p:cNvPr>
+          <p:cNvGrpSpPr/>
+          <p:nvPr/>
+        </p:nvGrpSpPr>
+        <p:grpSpPr>
+          <a:xfrm>
+            <a:off x="6856634" y="5584267"/>
+            <a:ext cx="1779971" cy="640080"/>
+            <a:chOff x="9902951" y="4631113"/>
+            <a:chExt cx="1779971" cy="640080"/>
+          </a:xfrm>
+        </p:grpSpPr>
+        <p:sp>
+          <p:nvSpPr>
+            <p:cNvPr id="47" name="Shape 17">
+              <a:extLst>
+                <a:ext uri="{FF2B5EF4-FFF2-40B4-BE49-F238E27FC236}">
+                  <a16:creationId xmlns:a16="http://schemas.microsoft.com/office/drawing/2014/main" id="{29194627-45CB-0718-6136-7656B544E957}"/>
+                </a:ext>
+              </a:extLst>
+            </p:cNvPr>
+            <p:cNvSpPr/>
+            <p:nvPr/>
+          </p:nvSpPr>
+          <p:spPr>
+            <a:xfrm>
+              <a:off x="9902951" y="4631113"/>
+              <a:ext cx="1779971" cy="640080"/>
+            </a:xfrm>
+            <a:prstGeom prst="roundRect">
+              <a:avLst>
+                <a:gd name="adj" fmla="val 11429"/>
+              </a:avLst>
+            </a:prstGeom>
+            <a:solidFill>
+              <a:srgbClr val="EEF4F8"/>
+            </a:solidFill>
+            <a:ln w="9525">
+              <a:solidFill>
+                <a:srgbClr val="EEF4F8"/>
+              </a:solidFill>
+              <a:prstDash val="solid"/>
+            </a:ln>
+          </p:spPr>
+          <p:txBody>
+            <a:bodyPr/>
+            <a:lstStyle/>
+            <a:p>
+              <a:endParaRPr lang="es-SV" noProof="0" dirty="0">
+                <a:latin typeface="+mj-lt"/>
+              </a:endParaRPr>
+            </a:p>
+          </p:txBody>
+        </p:sp>
+        <p:sp>
+          <p:nvSpPr>
+            <p:cNvPr id="49" name="Shape 18">
+              <a:extLst>
+                <a:ext uri="{FF2B5EF4-FFF2-40B4-BE49-F238E27FC236}">
+                  <a16:creationId xmlns:a16="http://schemas.microsoft.com/office/drawing/2014/main" id="{0D0A0E0D-A942-D34C-0F38-37391A3069D1}"/>
+                </a:ext>
+              </a:extLst>
+            </p:cNvPr>
+            <p:cNvSpPr/>
+            <p:nvPr/>
+          </p:nvSpPr>
+          <p:spPr>
+            <a:xfrm>
+              <a:off x="9994391" y="4786561"/>
+              <a:ext cx="329184" cy="329184"/>
+            </a:xfrm>
+            <a:prstGeom prst="ellipse">
+              <a:avLst/>
+            </a:prstGeom>
+            <a:solidFill>
+              <a:srgbClr val="14284B"/>
+            </a:solidFill>
+            <a:ln w="12700">
+              <a:solidFill>
+                <a:srgbClr val="14284B"/>
+              </a:solidFill>
+              <a:prstDash val="solid"/>
+            </a:ln>
+          </p:spPr>
+          <p:txBody>
+            <a:bodyPr/>
+            <a:lstStyle/>
+            <a:p>
+              <a:endParaRPr lang="es-SV" noProof="0" dirty="0">
+                <a:latin typeface="+mj-lt"/>
+              </a:endParaRPr>
+            </a:p>
+          </p:txBody>
+        </p:sp>
+        <p:pic>
+          <p:nvPicPr>
+            <p:cNvPr id="51" name="Image 5" descr="preencoded.png">
+              <a:extLst>
+                <a:ext uri="{FF2B5EF4-FFF2-40B4-BE49-F238E27FC236}">
+                  <a16:creationId xmlns:a16="http://schemas.microsoft.com/office/drawing/2014/main" id="{60AC4715-702D-CE32-97BE-B0961B539737}"/>
+                </a:ext>
+              </a:extLst>
+            </p:cNvPr>
+            <p:cNvPicPr>
+              <a:picLocks noChangeAspect="1"/>
+            </p:cNvPicPr>
+            <p:nvPr/>
+          </p:nvPicPr>
+          <p:blipFill>
+            <a:blip r:embed="rId7"/>
+            <a:stretch>
+              <a:fillRect/>
+            </a:stretch>
+          </p:blipFill>
+          <p:spPr>
+            <a:xfrm>
+              <a:off x="10079979" y="4872149"/>
+              <a:ext cx="158008" cy="158008"/>
+            </a:xfrm>
+            <a:prstGeom prst="rect">
+              <a:avLst/>
+            </a:prstGeom>
+          </p:spPr>
+        </p:pic>
+        <p:sp>
+          <p:nvSpPr>
+            <p:cNvPr id="53" name="Text 19">
+              <a:extLst>
+                <a:ext uri="{FF2B5EF4-FFF2-40B4-BE49-F238E27FC236}">
+                  <a16:creationId xmlns:a16="http://schemas.microsoft.com/office/drawing/2014/main" id="{F7203846-94EA-2FCC-81A1-BCC0D010E421}"/>
+                </a:ext>
+              </a:extLst>
+            </p:cNvPr>
+            <p:cNvSpPr txBox="1"/>
+            <p:nvPr/>
+          </p:nvSpPr>
+          <p:spPr>
+            <a:xfrm>
+              <a:off x="10405871" y="4704265"/>
+              <a:ext cx="1213043" cy="512064"/>
+            </a:xfrm>
+            <a:prstGeom prst="rect">
+              <a:avLst/>
+            </a:prstGeom>
+            <a:noFill/>
+            <a:ln/>
+          </p:spPr>
+          <p:txBody>
+            <a:bodyPr wrap="square" lIns="0" tIns="0" rIns="0" bIns="0" rtlCol="0" anchor="ctr"/>
+            <a:lstStyle/>
+            <a:p>
+              <a:pPr marL="0" indent="0" algn="ctr">
+                <a:buNone/>
+              </a:pPr>
+              <a:r>
+                <a:rPr lang="es-SV" sz="900" b="1" noProof="0" dirty="0">
+                  <a:solidFill>
+                    <a:srgbClr val="14284B"/>
+                  </a:solidFill>
+                  <a:latin typeface="+mj-lt"/>
+                </a:rPr>
+                <a:t>Hora de fin:</a:t>
+              </a:r>
+              <a:endParaRPr lang="es-SV" sz="900" noProof="0" dirty="0">
+                <a:latin typeface="+mj-lt"/>
+              </a:endParaRPr>
+            </a:p>
+            <a:p>
+              <a:pPr marL="0" indent="0" algn="ctr">
+                <a:buNone/>
+              </a:pPr>
+              <a:r>
+                <a:rPr lang="es-SV" sz="1000" noProof="0" dirty="0">
+                  <a:solidFill>
+                    <a:srgbClr val="002060"/>
+                  </a:solidFill>
+                  <a:latin typeface="+mj-lt"/>
+                </a:rPr>
+                <a:t>11:00 am</a:t>
+              </a:r>
+              <a:endParaRPr lang="es-SV" sz="900" noProof="0" dirty="0">
+                <a:solidFill>
+                  <a:srgbClr val="002060"/>
+                </a:solidFill>
+                <a:latin typeface="+mj-lt"/>
+              </a:endParaRPr>
+            </a:p>
+          </p:txBody>
+        </p:sp>
+      </p:grpSp>
+    </p:spTree>
+    <p:extLst>
+      <p:ext uri="{BB962C8B-B14F-4D97-AF65-F5344CB8AC3E}">
+        <p14:creationId xmlns:p14="http://schemas.microsoft.com/office/powerpoint/2010/main" val="3585465700"/>
+      </p:ext>
+    </p:extLst>
+  </p:cSld>
+  <p:clrMapOvr>
+    <a:masterClrMapping/>
+  </p:clrMapOvr>
+</p:sld>
+</file>
+
+<file path=ppt/slides/slide2.xml><?xml version="1.0" encoding="utf-8"?>
+<p:sld xmlns:a="http://schemas.openxmlformats.org/drawingml/2006/main" xmlns:r="http://schemas.openxmlformats.org/officeDocument/2006/relationships" xmlns:p="http://schemas.openxmlformats.org/presentationml/2006/main">
   <p:cSld name="Slide 1">
     <p:bg>
       <p:bgPr>
         <a:solidFill>
-          <a:srgbClr val="0B1220"/>
+          <a:schemeClr val="bg1"/>
         </a:solidFill>
+        <a:effectLst/>
       </p:bgPr>
     </p:bg>
     <p:spTree>
@@ -966,691 +2357,14 @@
       </p:grpSpPr>
       <p:sp>
         <p:nvSpPr>
-          <p:cNvPr id="2" name="Shape 0"/>
+          <p:cNvPr id="23" name="Shape 15"/>
           <p:cNvSpPr/>
           <p:nvPr/>
         </p:nvSpPr>
         <p:spPr>
           <a:xfrm>
-            <a:off x="457200" y="457200"/>
-            <a:ext cx="3566160" cy="5943600"/>
-          </a:xfrm>
-          <a:prstGeom prst="roundRect">
-            <a:avLst>
-              <a:gd name="adj" fmla="val 2051"/>
-            </a:avLst>
-          </a:prstGeom>
-          <a:solidFill>
-            <a:srgbClr val="1E2F4D"/>
-          </a:solidFill>
-          <a:ln w="9525">
-            <a:solidFill>
-              <a:srgbClr val="1E2F4D"/>
-            </a:solidFill>
-            <a:prstDash val="solid"/>
-          </a:ln>
-          <a:effectLst>
-            <a:outerShdw sx="100000" sy="100000" kx="0" ky="0" algn="bl" rotWithShape="0" blurRad="76200" dist="19050" dir="5400000">
-              <a:srgbClr val="000000">
-                <a:alpha val="35000"/>
-              </a:srgbClr>
-            </a:outerShdw>
-          </a:effectLst>
-        </p:spPr>
-      </p:sp>
-      <p:sp>
-        <p:nvSpPr>
-          <p:cNvPr id="3" name="Shape 1"/>
-          <p:cNvSpPr/>
-          <p:nvPr/>
-        </p:nvSpPr>
-        <p:spPr>
-          <a:xfrm>
-            <a:off x="731520" y="731520"/>
-            <a:ext cx="640080" cy="640080"/>
-          </a:xfrm>
-          <a:prstGeom prst="ellipse">
-            <a:avLst/>
-          </a:prstGeom>
-          <a:solidFill>
-            <a:srgbClr val="F5B841"/>
-          </a:solidFill>
-          <a:ln w="12700">
-            <a:solidFill>
-              <a:srgbClr val="F5B841"/>
-            </a:solidFill>
-            <a:prstDash val="solid"/>
-          </a:ln>
-        </p:spPr>
-      </p:sp>
-      <p:pic>
-        <p:nvPicPr>
-          <p:cNvPr id="4" name="Image 0" descr="preencoded.png">    </p:cNvPr>
-          <p:cNvPicPr>
-            <a:picLocks noChangeAspect="1"/>
-          </p:cNvPicPr>
-          <p:nvPr/>
-        </p:nvPicPr>
-        <p:blipFill>
-          <a:blip r:embed="rId1"/>
-          <a:stretch>
-            <a:fillRect/>
-          </a:stretch>
-        </p:blipFill>
-        <p:spPr>
-          <a:xfrm>
-            <a:off x="897941" y="897941"/>
-            <a:ext cx="307238" cy="307238"/>
-          </a:xfrm>
-          <a:prstGeom prst="rect">
-            <a:avLst/>
-          </a:prstGeom>
-        </p:spPr>
-      </p:pic>
-      <p:sp>
-        <p:nvSpPr>
-          <p:cNvPr id="5" name="Text 2"/>
-          <p:cNvSpPr txBox="1"/>
-          <p:nvPr/>
-        </p:nvSpPr>
-        <p:spPr>
-          <a:xfrm>
-            <a:off x="731520" y="1554480"/>
-            <a:ext cx="3017520" cy="1463040"/>
-          </a:xfrm>
-          <a:prstGeom prst="rect">
-            <a:avLst/>
-          </a:prstGeom>
-          <a:noFill/>
-          <a:ln/>
-        </p:spPr>
-        <p:txBody>
-          <a:bodyPr wrap="square" lIns="0" tIns="0" rIns="0" bIns="0" rtlCol="0" anchor="t"/>
-          <a:lstStyle/>
-          <a:p>
-            <a:pPr indent="0" marL="0">
-              <a:buNone/>
-            </a:pPr>
-            <a:r>
-              <a:rPr lang="en-US" sz="2000" b="1" dirty="0">
-                <a:solidFill>
-                  <a:srgbClr val="FFFFFF"/>
-                </a:solidFill>
-                <a:latin typeface="Arial" pitchFamily="34" charset="0"/>
-                <a:ea typeface="Arial" pitchFamily="34" charset="-122"/>
-                <a:cs typeface="Arial" pitchFamily="34" charset="-120"/>
-              </a:rPr>
-              <a:t>FORMULARIO GUIÓN DE PRUEBAS DE CONTINUIDAD DEL NEGOCIO</a:t>
-            </a:r>
-            <a:endParaRPr lang="en-US" sz="2000" dirty="0"/>
-          </a:p>
-        </p:txBody>
-      </p:sp>
-      <p:sp>
-        <p:nvSpPr>
-          <p:cNvPr id="6" name="Text 3"/>
-          <p:cNvSpPr txBox="1"/>
-          <p:nvPr/>
-        </p:nvSpPr>
-        <p:spPr>
-          <a:xfrm>
-            <a:off x="731520" y="3063240"/>
-            <a:ext cx="3017520" cy="914400"/>
-          </a:xfrm>
-          <a:prstGeom prst="rect">
-            <a:avLst/>
-          </a:prstGeom>
-          <a:noFill/>
-          <a:ln/>
-        </p:spPr>
-        <p:txBody>
-          <a:bodyPr wrap="square" lIns="0" tIns="0" rIns="0" bIns="0" rtlCol="0" anchor="t"/>
-          <a:lstStyle/>
-          <a:p>
-            <a:pPr indent="0" marL="0">
-              <a:buNone/>
-            </a:pPr>
-            <a:r>
-              <a:rPr lang="en-US" sz="1200" dirty="0">
-                <a:solidFill>
-                  <a:srgbClr val="5CC8F0"/>
-                </a:solidFill>
-              </a:rPr>
-              <a:t>Evaluación de Continuidad y Desempeño del Proveedor Crítico de Comunicaciones ante Interrupción Simulada de Conectividad</a:t>
-            </a:r>
-            <a:endParaRPr lang="en-US" sz="1200" dirty="0"/>
-          </a:p>
-        </p:txBody>
-      </p:sp>
-      <p:sp>
-        <p:nvSpPr>
-          <p:cNvPr id="7" name="Text 4"/>
-          <p:cNvSpPr txBox="1"/>
-          <p:nvPr/>
-        </p:nvSpPr>
-        <p:spPr>
-          <a:xfrm>
-            <a:off x="731520" y="4114800"/>
-            <a:ext cx="3017520" cy="274320"/>
-          </a:xfrm>
-          <a:prstGeom prst="rect">
-            <a:avLst/>
-          </a:prstGeom>
-          <a:noFill/>
-          <a:ln/>
-        </p:spPr>
-        <p:txBody>
-          <a:bodyPr wrap="square" lIns="0" tIns="0" rIns="0" bIns="0" rtlCol="0" anchor="t"/>
-          <a:lstStyle/>
-          <a:p>
-            <a:pPr indent="0" marL="0">
-              <a:buNone/>
-            </a:pPr>
-            <a:r>
-              <a:rPr lang="en-US" sz="1000" b="1" spc="100" kern="0" dirty="0">
-                <a:solidFill>
-                  <a:srgbClr val="F5B841"/>
-                </a:solidFill>
-                <a:latin typeface="Arial" pitchFamily="34" charset="0"/>
-                <a:ea typeface="Arial" pitchFamily="34" charset="-122"/>
-                <a:cs typeface="Arial" pitchFamily="34" charset="-120"/>
-              </a:rPr>
-              <a:t>CONTROL DE LAS PRUEBAS</a:t>
-            </a:r>
-            <a:endParaRPr lang="en-US" sz="1000" dirty="0"/>
-          </a:p>
-        </p:txBody>
-      </p:sp>
-      <p:sp>
-        <p:nvSpPr>
-          <p:cNvPr id="8" name="Shape 5"/>
-          <p:cNvSpPr/>
-          <p:nvPr/>
-        </p:nvSpPr>
-        <p:spPr>
-          <a:xfrm>
-            <a:off x="731520" y="4462272"/>
-            <a:ext cx="292608" cy="292608"/>
-          </a:xfrm>
-          <a:prstGeom prst="ellipse">
-            <a:avLst/>
-          </a:prstGeom>
-          <a:solidFill>
-            <a:srgbClr val="16233A"/>
-          </a:solidFill>
-          <a:ln w="12700">
-            <a:solidFill>
-              <a:srgbClr val="16233A"/>
-            </a:solidFill>
-            <a:prstDash val="solid"/>
-          </a:ln>
-        </p:spPr>
-      </p:sp>
-      <p:pic>
-        <p:nvPicPr>
-          <p:cNvPr id="9" name="Image 1" descr="preencoded.png">    </p:cNvPr>
-          <p:cNvPicPr>
-            <a:picLocks noChangeAspect="1"/>
-          </p:cNvPicPr>
-          <p:nvPr/>
-        </p:nvPicPr>
-        <p:blipFill>
-          <a:blip r:embed="rId2"/>
-          <a:stretch>
-            <a:fillRect/>
-          </a:stretch>
-        </p:blipFill>
-        <p:spPr>
-          <a:xfrm>
-            <a:off x="807598" y="4538350"/>
-            <a:ext cx="140452" cy="140452"/>
-          </a:xfrm>
-          <a:prstGeom prst="rect">
-            <a:avLst/>
-          </a:prstGeom>
-        </p:spPr>
-      </p:pic>
-      <p:sp>
-        <p:nvSpPr>
-          <p:cNvPr id="10" name="Text 6"/>
-          <p:cNvSpPr txBox="1"/>
-          <p:nvPr/>
-        </p:nvSpPr>
-        <p:spPr>
-          <a:xfrm>
-            <a:off x="1115568" y="4462272"/>
-            <a:ext cx="2697480" cy="292608"/>
-          </a:xfrm>
-          <a:prstGeom prst="rect">
-            <a:avLst/>
-          </a:prstGeom>
-          <a:noFill/>
-          <a:ln/>
-        </p:spPr>
-        <p:txBody>
-          <a:bodyPr wrap="square" lIns="0" tIns="0" rIns="0" bIns="0" rtlCol="0" anchor="ctr"/>
-          <a:lstStyle/>
-          <a:p>
-            <a:pPr indent="0" marL="0">
-              <a:buNone/>
-            </a:pPr>
-            <a:r>
-              <a:rPr lang="en-US" sz="900" dirty="0">
-                <a:solidFill>
-                  <a:srgbClr val="9FB0C6"/>
-                </a:solidFill>
-              </a:rPr>
-              <a:t>Fecha de ejecución de prueba:  </a:t>
-            </a:r>
-            <a:pPr indent="0" marL="0">
-              <a:buNone/>
-            </a:pPr>
-            <a:r>
-              <a:rPr lang="en-US" sz="950" dirty="0">
-                <a:solidFill>
-                  <a:srgbClr val="5B6B84"/>
-                </a:solidFill>
-              </a:rPr>
-              <a:t>________________</a:t>
-            </a:r>
-            <a:endParaRPr lang="en-US" sz="900" dirty="0"/>
-          </a:p>
-        </p:txBody>
-      </p:sp>
-      <p:sp>
-        <p:nvSpPr>
-          <p:cNvPr id="11" name="Shape 7"/>
-          <p:cNvSpPr/>
-          <p:nvPr/>
-        </p:nvSpPr>
-        <p:spPr>
-          <a:xfrm>
-            <a:off x="731520" y="4837176"/>
-            <a:ext cx="292608" cy="292608"/>
-          </a:xfrm>
-          <a:prstGeom prst="ellipse">
-            <a:avLst/>
-          </a:prstGeom>
-          <a:solidFill>
-            <a:srgbClr val="16233A"/>
-          </a:solidFill>
-          <a:ln w="12700">
-            <a:solidFill>
-              <a:srgbClr val="16233A"/>
-            </a:solidFill>
-            <a:prstDash val="solid"/>
-          </a:ln>
-        </p:spPr>
-      </p:sp>
-      <p:pic>
-        <p:nvPicPr>
-          <p:cNvPr id="12" name="Image 2" descr="preencoded.png">    </p:cNvPr>
-          <p:cNvPicPr>
-            <a:picLocks noChangeAspect="1"/>
-          </p:cNvPicPr>
-          <p:nvPr/>
-        </p:nvPicPr>
-        <p:blipFill>
-          <a:blip r:embed="rId3"/>
-          <a:stretch>
-            <a:fillRect/>
-          </a:stretch>
-        </p:blipFill>
-        <p:spPr>
-          <a:xfrm>
-            <a:off x="807598" y="4913254"/>
-            <a:ext cx="140452" cy="140452"/>
-          </a:xfrm>
-          <a:prstGeom prst="rect">
-            <a:avLst/>
-          </a:prstGeom>
-        </p:spPr>
-      </p:pic>
-      <p:sp>
-        <p:nvSpPr>
-          <p:cNvPr id="13" name="Text 8"/>
-          <p:cNvSpPr txBox="1"/>
-          <p:nvPr/>
-        </p:nvSpPr>
-        <p:spPr>
-          <a:xfrm>
-            <a:off x="1115568" y="4837176"/>
-            <a:ext cx="2697480" cy="292608"/>
-          </a:xfrm>
-          <a:prstGeom prst="rect">
-            <a:avLst/>
-          </a:prstGeom>
-          <a:noFill/>
-          <a:ln/>
-        </p:spPr>
-        <p:txBody>
-          <a:bodyPr wrap="square" lIns="0" tIns="0" rIns="0" bIns="0" rtlCol="0" anchor="ctr"/>
-          <a:lstStyle/>
-          <a:p>
-            <a:pPr indent="0" marL="0">
-              <a:buNone/>
-            </a:pPr>
-            <a:r>
-              <a:rPr lang="en-US" sz="900" dirty="0">
-                <a:solidFill>
-                  <a:srgbClr val="9FB0C6"/>
-                </a:solidFill>
-              </a:rPr>
-              <a:t>Tipo de prueba  </a:t>
-            </a:r>
-            <a:pPr indent="0" marL="0">
-              <a:buNone/>
-            </a:pPr>
-            <a:r>
-              <a:rPr lang="en-US" sz="950" b="1" dirty="0">
-                <a:solidFill>
-                  <a:srgbClr val="FFFFFF"/>
-                </a:solidFill>
-              </a:rPr>
-              <a:t>Simulación</a:t>
-            </a:r>
-            <a:endParaRPr lang="en-US" sz="900" dirty="0"/>
-          </a:p>
-        </p:txBody>
-      </p:sp>
-      <p:sp>
-        <p:nvSpPr>
-          <p:cNvPr id="14" name="Shape 9"/>
-          <p:cNvSpPr/>
-          <p:nvPr/>
-        </p:nvSpPr>
-        <p:spPr>
-          <a:xfrm>
-            <a:off x="731520" y="5212080"/>
-            <a:ext cx="292608" cy="292608"/>
-          </a:xfrm>
-          <a:prstGeom prst="ellipse">
-            <a:avLst/>
-          </a:prstGeom>
-          <a:solidFill>
-            <a:srgbClr val="16233A"/>
-          </a:solidFill>
-          <a:ln w="12700">
-            <a:solidFill>
-              <a:srgbClr val="16233A"/>
-            </a:solidFill>
-            <a:prstDash val="solid"/>
-          </a:ln>
-        </p:spPr>
-      </p:sp>
-      <p:pic>
-        <p:nvPicPr>
-          <p:cNvPr id="15" name="Image 3" descr="preencoded.png">    </p:cNvPr>
-          <p:cNvPicPr>
-            <a:picLocks noChangeAspect="1"/>
-          </p:cNvPicPr>
-          <p:nvPr/>
-        </p:nvPicPr>
-        <p:blipFill>
-          <a:blip r:embed="rId4"/>
-          <a:stretch>
-            <a:fillRect/>
-          </a:stretch>
-        </p:blipFill>
-        <p:spPr>
-          <a:xfrm>
-            <a:off x="807598" y="5288158"/>
-            <a:ext cx="140452" cy="140452"/>
-          </a:xfrm>
-          <a:prstGeom prst="rect">
-            <a:avLst/>
-          </a:prstGeom>
-        </p:spPr>
-      </p:pic>
-      <p:sp>
-        <p:nvSpPr>
-          <p:cNvPr id="16" name="Text 10"/>
-          <p:cNvSpPr txBox="1"/>
-          <p:nvPr/>
-        </p:nvSpPr>
-        <p:spPr>
-          <a:xfrm>
-            <a:off x="1115568" y="5212080"/>
-            <a:ext cx="2697480" cy="292608"/>
-          </a:xfrm>
-          <a:prstGeom prst="rect">
-            <a:avLst/>
-          </a:prstGeom>
-          <a:noFill/>
-          <a:ln/>
-        </p:spPr>
-        <p:txBody>
-          <a:bodyPr wrap="square" lIns="0" tIns="0" rIns="0" bIns="0" rtlCol="0" anchor="ctr"/>
-          <a:lstStyle/>
-          <a:p>
-            <a:pPr indent="0" marL="0">
-              <a:buNone/>
-            </a:pPr>
-            <a:r>
-              <a:rPr lang="en-US" sz="900" dirty="0">
-                <a:solidFill>
-                  <a:srgbClr val="9FB0C6"/>
-                </a:solidFill>
-              </a:rPr>
-              <a:t>Hora de inicio:  </a:t>
-            </a:r>
-            <a:pPr indent="0" marL="0">
-              <a:buNone/>
-            </a:pPr>
-            <a:r>
-              <a:rPr lang="en-US" sz="950" dirty="0">
-                <a:solidFill>
-                  <a:srgbClr val="5B6B84"/>
-                </a:solidFill>
-              </a:rPr>
-              <a:t>________________</a:t>
-            </a:r>
-            <a:endParaRPr lang="en-US" sz="900" dirty="0"/>
-          </a:p>
-        </p:txBody>
-      </p:sp>
-      <p:sp>
-        <p:nvSpPr>
-          <p:cNvPr id="17" name="Shape 11"/>
-          <p:cNvSpPr/>
-          <p:nvPr/>
-        </p:nvSpPr>
-        <p:spPr>
-          <a:xfrm>
-            <a:off x="731520" y="5586984"/>
-            <a:ext cx="292608" cy="292608"/>
-          </a:xfrm>
-          <a:prstGeom prst="ellipse">
-            <a:avLst/>
-          </a:prstGeom>
-          <a:solidFill>
-            <a:srgbClr val="16233A"/>
-          </a:solidFill>
-          <a:ln w="12700">
-            <a:solidFill>
-              <a:srgbClr val="16233A"/>
-            </a:solidFill>
-            <a:prstDash val="solid"/>
-          </a:ln>
-        </p:spPr>
-      </p:sp>
-      <p:pic>
-        <p:nvPicPr>
-          <p:cNvPr id="18" name="Image 4" descr="preencoded.png">    </p:cNvPr>
-          <p:cNvPicPr>
-            <a:picLocks noChangeAspect="1"/>
-          </p:cNvPicPr>
-          <p:nvPr/>
-        </p:nvPicPr>
-        <p:blipFill>
-          <a:blip r:embed="rId5"/>
-          <a:stretch>
-            <a:fillRect/>
-          </a:stretch>
-        </p:blipFill>
-        <p:spPr>
-          <a:xfrm>
-            <a:off x="807598" y="5663062"/>
-            <a:ext cx="140452" cy="140452"/>
-          </a:xfrm>
-          <a:prstGeom prst="rect">
-            <a:avLst/>
-          </a:prstGeom>
-        </p:spPr>
-      </p:pic>
-      <p:sp>
-        <p:nvSpPr>
-          <p:cNvPr id="19" name="Text 12"/>
-          <p:cNvSpPr txBox="1"/>
-          <p:nvPr/>
-        </p:nvSpPr>
-        <p:spPr>
-          <a:xfrm>
-            <a:off x="1115568" y="5586984"/>
-            <a:ext cx="2697480" cy="292608"/>
-          </a:xfrm>
-          <a:prstGeom prst="rect">
-            <a:avLst/>
-          </a:prstGeom>
-          <a:noFill/>
-          <a:ln/>
-        </p:spPr>
-        <p:txBody>
-          <a:bodyPr wrap="square" lIns="0" tIns="0" rIns="0" bIns="0" rtlCol="0" anchor="ctr"/>
-          <a:lstStyle/>
-          <a:p>
-            <a:pPr indent="0" marL="0">
-              <a:buNone/>
-            </a:pPr>
-            <a:r>
-              <a:rPr lang="en-US" sz="900" dirty="0">
-                <a:solidFill>
-                  <a:srgbClr val="9FB0C6"/>
-                </a:solidFill>
-              </a:rPr>
-              <a:t>Lugar de Ejecución:  </a:t>
-            </a:r>
-            <a:pPr indent="0" marL="0">
-              <a:buNone/>
-            </a:pPr>
-            <a:r>
-              <a:rPr lang="en-US" sz="950" dirty="0">
-                <a:solidFill>
-                  <a:srgbClr val="5B6B84"/>
-                </a:solidFill>
-              </a:rPr>
-              <a:t>________________</a:t>
-            </a:r>
-            <a:endParaRPr lang="en-US" sz="900" dirty="0"/>
-          </a:p>
-        </p:txBody>
-      </p:sp>
-      <p:sp>
-        <p:nvSpPr>
-          <p:cNvPr id="20" name="Shape 13"/>
-          <p:cNvSpPr/>
-          <p:nvPr/>
-        </p:nvSpPr>
-        <p:spPr>
-          <a:xfrm>
-            <a:off x="731520" y="5961888"/>
-            <a:ext cx="292608" cy="292608"/>
-          </a:xfrm>
-          <a:prstGeom prst="ellipse">
-            <a:avLst/>
-          </a:prstGeom>
-          <a:solidFill>
-            <a:srgbClr val="16233A"/>
-          </a:solidFill>
-          <a:ln w="12700">
-            <a:solidFill>
-              <a:srgbClr val="16233A"/>
-            </a:solidFill>
-            <a:prstDash val="solid"/>
-          </a:ln>
-        </p:spPr>
-      </p:sp>
-      <p:pic>
-        <p:nvPicPr>
-          <p:cNvPr id="21" name="Image 5" descr="preencoded.png">    </p:cNvPr>
-          <p:cNvPicPr>
-            <a:picLocks noChangeAspect="1"/>
-          </p:cNvPicPr>
-          <p:nvPr/>
-        </p:nvPicPr>
-        <p:blipFill>
-          <a:blip r:embed="rId6"/>
-          <a:stretch>
-            <a:fillRect/>
-          </a:stretch>
-        </p:blipFill>
-        <p:spPr>
-          <a:xfrm>
-            <a:off x="807598" y="6037966"/>
-            <a:ext cx="140452" cy="140452"/>
-          </a:xfrm>
-          <a:prstGeom prst="rect">
-            <a:avLst/>
-          </a:prstGeom>
-        </p:spPr>
-      </p:pic>
-      <p:sp>
-        <p:nvSpPr>
-          <p:cNvPr id="22" name="Text 14"/>
-          <p:cNvSpPr txBox="1"/>
-          <p:nvPr/>
-        </p:nvSpPr>
-        <p:spPr>
-          <a:xfrm>
-            <a:off x="1115568" y="5961888"/>
-            <a:ext cx="2697480" cy="292608"/>
-          </a:xfrm>
-          <a:prstGeom prst="rect">
-            <a:avLst/>
-          </a:prstGeom>
-          <a:noFill/>
-          <a:ln/>
-        </p:spPr>
-        <p:txBody>
-          <a:bodyPr wrap="square" lIns="0" tIns="0" rIns="0" bIns="0" rtlCol="0" anchor="ctr"/>
-          <a:lstStyle/>
-          <a:p>
-            <a:pPr indent="0" marL="0">
-              <a:buNone/>
-            </a:pPr>
-            <a:r>
-              <a:rPr lang="en-US" sz="900" dirty="0">
-                <a:solidFill>
-                  <a:srgbClr val="9FB0C6"/>
-                </a:solidFill>
-              </a:rPr>
-              <a:t>Hora de fin:  </a:t>
-            </a:r>
-            <a:pPr indent="0" marL="0">
-              <a:buNone/>
-            </a:pPr>
-            <a:r>
-              <a:rPr lang="en-US" sz="950" dirty="0">
-                <a:solidFill>
-                  <a:srgbClr val="5B6B84"/>
-                </a:solidFill>
-              </a:rPr>
-              <a:t>________________</a:t>
-            </a:r>
-            <a:endParaRPr lang="en-US" sz="900" dirty="0"/>
-          </a:p>
-        </p:txBody>
-      </p:sp>
-      <p:sp>
-        <p:nvSpPr>
-          <p:cNvPr id="23" name="Shape 15"/>
-          <p:cNvSpPr/>
-          <p:nvPr/>
-        </p:nvSpPr>
-        <p:spPr>
-          <a:xfrm>
-            <a:off x="4206240" y="457200"/>
-            <a:ext cx="3672688" cy="1371600"/>
+            <a:off x="457200" y="1097280"/>
+            <a:ext cx="5623560" cy="1280160"/>
           </a:xfrm>
           <a:prstGeom prst="roundRect">
             <a:avLst>
@@ -1667,13 +2381,22 @@
             <a:prstDash val="solid"/>
           </a:ln>
           <a:effectLst>
-            <a:outerShdw sx="100000" sy="100000" kx="0" ky="0" algn="bl" rotWithShape="0" blurRad="76200" dist="19050" dir="5400000">
+            <a:outerShdw blurRad="76200" dist="19050" dir="5400000" algn="bl" rotWithShape="0">
               <a:srgbClr val="000000">
                 <a:alpha val="35000"/>
               </a:srgbClr>
             </a:outerShdw>
           </a:effectLst>
         </p:spPr>
+        <p:txBody>
+          <a:bodyPr/>
+          <a:lstStyle/>
+          <a:p>
+            <a:endParaRPr lang="es-SV" sz="2000" noProof="0" dirty="0">
+              <a:latin typeface="+mj-lt"/>
+            </a:endParaRPr>
+          </a:p>
+        </p:txBody>
       </p:sp>
       <p:sp>
         <p:nvSpPr>
@@ -1683,8 +2406,8 @@
         </p:nvSpPr>
         <p:spPr>
           <a:xfrm>
-            <a:off x="4370832" y="621792"/>
-            <a:ext cx="365760" cy="365760"/>
+            <a:off x="621792" y="1261872"/>
+            <a:ext cx="384048" cy="384048"/>
           </a:xfrm>
           <a:prstGeom prst="ellipse">
             <a:avLst/>
@@ -1699,25 +2422,34 @@
             <a:prstDash val="solid"/>
           </a:ln>
         </p:spPr>
+        <p:txBody>
+          <a:bodyPr/>
+          <a:lstStyle/>
+          <a:p>
+            <a:endParaRPr lang="es-SV" sz="2000" noProof="0" dirty="0">
+              <a:latin typeface="+mj-lt"/>
+            </a:endParaRPr>
+          </a:p>
+        </p:txBody>
       </p:sp>
       <p:pic>
         <p:nvPicPr>
-          <p:cNvPr id="25" name="Image 6" descr="preencoded.png">    </p:cNvPr>
+          <p:cNvPr id="25" name="Image 6" descr="preencoded.png"/>
           <p:cNvPicPr>
             <a:picLocks noChangeAspect="1"/>
           </p:cNvPicPr>
           <p:nvPr/>
         </p:nvPicPr>
         <p:blipFill>
-          <a:blip r:embed="rId7"/>
+          <a:blip r:embed="rId3"/>
           <a:stretch>
             <a:fillRect/>
           </a:stretch>
         </p:blipFill>
         <p:spPr>
           <a:xfrm>
-            <a:off x="4465930" y="716890"/>
-            <a:ext cx="175565" cy="175565"/>
+            <a:off x="722376" y="1362456"/>
+            <a:ext cx="182880" cy="182880"/>
           </a:xfrm>
           <a:prstGeom prst="rect">
             <a:avLst/>
@@ -1732,8 +2464,8 @@
         </p:nvSpPr>
         <p:spPr>
           <a:xfrm>
-            <a:off x="4828032" y="585216"/>
-            <a:ext cx="2895448" cy="438912"/>
+            <a:off x="1115568" y="1225295"/>
+            <a:ext cx="4782312" cy="457200"/>
           </a:xfrm>
           <a:prstGeom prst="rect">
             <a:avLst/>
@@ -1745,35 +2477,34 @@
           <a:bodyPr wrap="square" lIns="0" tIns="0" rIns="0" bIns="0" rtlCol="0" anchor="ctr"/>
           <a:lstStyle/>
           <a:p>
-            <a:pPr indent="0" marL="0">
+            <a:pPr marL="0" indent="0">
               <a:buNone/>
             </a:pPr>
             <a:r>
-              <a:rPr lang="en-US" sz="950" b="1" dirty="0">
+              <a:rPr lang="es-SV" sz="1000" b="1" noProof="0" dirty="0">
                 <a:solidFill>
                   <a:srgbClr val="F5B841"/>
                 </a:solidFill>
-                <a:latin typeface="Arial" pitchFamily="34" charset="0"/>
+                <a:latin typeface="+mj-lt"/>
                 <a:ea typeface="Arial" pitchFamily="34" charset="-122"/>
                 <a:cs typeface="Arial" pitchFamily="34" charset="-120"/>
               </a:rPr>
               <a:t>01  </a:t>
             </a:r>
-            <a:pPr indent="0" marL="0">
-              <a:buNone/>
-            </a:pPr>
             <a:r>
-              <a:rPr lang="en-US" sz="950" b="1" dirty="0">
+              <a:rPr lang="es-SV" sz="1000" b="1" noProof="0" dirty="0">
                 <a:solidFill>
                   <a:srgbClr val="FFFFFF"/>
                 </a:solidFill>
-                <a:latin typeface="Arial" pitchFamily="34" charset="0"/>
+                <a:latin typeface="+mj-lt"/>
                 <a:ea typeface="Arial" pitchFamily="34" charset="-122"/>
                 <a:cs typeface="Arial" pitchFamily="34" charset="-120"/>
               </a:rPr>
               <a:t>OBJETIVOS DE LA PRUEBA</a:t>
             </a:r>
-            <a:endParaRPr lang="en-US" sz="950" dirty="0"/>
+            <a:endParaRPr lang="es-SV" sz="1000" noProof="0" dirty="0">
+              <a:latin typeface="+mj-lt"/>
+            </a:endParaRPr>
           </a:p>
         </p:txBody>
       </p:sp>
@@ -1785,8 +2516,8 @@
         </p:nvSpPr>
         <p:spPr>
           <a:xfrm>
-            <a:off x="4389120" y="1115568"/>
-            <a:ext cx="3306928" cy="621792"/>
+            <a:off x="640080" y="1755648"/>
+            <a:ext cx="5257800" cy="530352"/>
           </a:xfrm>
           <a:prstGeom prst="rect">
             <a:avLst/>
@@ -1798,18 +2529,21 @@
           <a:bodyPr wrap="square" lIns="0" tIns="0" rIns="0" bIns="0" rtlCol="0" anchor="t"/>
           <a:lstStyle/>
           <a:p>
-            <a:pPr indent="0" marL="0">
+            <a:pPr marL="0" indent="0">
               <a:buNone/>
             </a:pPr>
             <a:r>
-              <a:rPr lang="en-US" sz="950" dirty="0">
+              <a:rPr lang="es-SV" sz="1000" noProof="0" dirty="0">
                 <a:solidFill>
                   <a:srgbClr val="E8EEF6"/>
                 </a:solidFill>
+                <a:latin typeface="+mj-lt"/>
               </a:rPr>
               <a:t>Validar la capacidad de respuesta y recuperación del proveedor crítico de comunicaciones, así como la efectividad de los mecanismos alternos implementados por COMEDICA.</a:t>
             </a:r>
-            <a:endParaRPr lang="en-US" sz="950" dirty="0"/>
+            <a:endParaRPr lang="es-SV" sz="1000" noProof="0" dirty="0">
+              <a:latin typeface="+mj-lt"/>
+            </a:endParaRPr>
           </a:p>
         </p:txBody>
       </p:sp>
@@ -1821,8 +2555,8 @@
         </p:nvSpPr>
         <p:spPr>
           <a:xfrm>
-            <a:off x="8061808" y="457200"/>
-            <a:ext cx="3672688" cy="1371600"/>
+            <a:off x="6272784" y="1097280"/>
+            <a:ext cx="5623560" cy="1280160"/>
           </a:xfrm>
           <a:prstGeom prst="roundRect">
             <a:avLst>
@@ -1839,13 +2573,22 @@
             <a:prstDash val="solid"/>
           </a:ln>
           <a:effectLst>
-            <a:outerShdw sx="100000" sy="100000" kx="0" ky="0" algn="bl" rotWithShape="0" blurRad="76200" dist="19050" dir="5400000">
+            <a:outerShdw blurRad="76200" dist="19050" dir="5400000" algn="bl" rotWithShape="0">
               <a:srgbClr val="000000">
                 <a:alpha val="35000"/>
               </a:srgbClr>
             </a:outerShdw>
           </a:effectLst>
         </p:spPr>
+        <p:txBody>
+          <a:bodyPr/>
+          <a:lstStyle/>
+          <a:p>
+            <a:endParaRPr lang="es-SV" sz="2000" noProof="0" dirty="0">
+              <a:latin typeface="+mj-lt"/>
+            </a:endParaRPr>
+          </a:p>
+        </p:txBody>
       </p:sp>
       <p:sp>
         <p:nvSpPr>
@@ -1855,8 +2598,8 @@
         </p:nvSpPr>
         <p:spPr>
           <a:xfrm>
-            <a:off x="8226400" y="621792"/>
-            <a:ext cx="365760" cy="365760"/>
+            <a:off x="6437376" y="1261872"/>
+            <a:ext cx="384048" cy="384048"/>
           </a:xfrm>
           <a:prstGeom prst="ellipse">
             <a:avLst/>
@@ -1871,25 +2614,34 @@
             <a:prstDash val="solid"/>
           </a:ln>
         </p:spPr>
+        <p:txBody>
+          <a:bodyPr/>
+          <a:lstStyle/>
+          <a:p>
+            <a:endParaRPr lang="es-SV" sz="2000" noProof="0" dirty="0">
+              <a:latin typeface="+mj-lt"/>
+            </a:endParaRPr>
+          </a:p>
+        </p:txBody>
       </p:sp>
       <p:pic>
         <p:nvPicPr>
-          <p:cNvPr id="30" name="Image 7" descr="preencoded.png">    </p:cNvPr>
+          <p:cNvPr id="30" name="Image 7" descr="preencoded.png"/>
           <p:cNvPicPr>
             <a:picLocks noChangeAspect="1"/>
           </p:cNvPicPr>
           <p:nvPr/>
         </p:nvPicPr>
         <p:blipFill>
-          <a:blip r:embed="rId8"/>
+          <a:blip r:embed="rId4"/>
           <a:stretch>
             <a:fillRect/>
           </a:stretch>
         </p:blipFill>
         <p:spPr>
           <a:xfrm>
-            <a:off x="8321497" y="716890"/>
-            <a:ext cx="175565" cy="175565"/>
+            <a:off x="6537960" y="1362456"/>
+            <a:ext cx="182880" cy="182880"/>
           </a:xfrm>
           <a:prstGeom prst="rect">
             <a:avLst/>
@@ -1904,8 +2656,8 @@
         </p:nvSpPr>
         <p:spPr>
           <a:xfrm>
-            <a:off x="8683600" y="585216"/>
-            <a:ext cx="2895448" cy="438912"/>
+            <a:off x="6931152" y="1225295"/>
+            <a:ext cx="4782312" cy="457200"/>
           </a:xfrm>
           <a:prstGeom prst="rect">
             <a:avLst/>
@@ -1917,35 +2669,34 @@
           <a:bodyPr wrap="square" lIns="0" tIns="0" rIns="0" bIns="0" rtlCol="0" anchor="ctr"/>
           <a:lstStyle/>
           <a:p>
-            <a:pPr indent="0" marL="0">
+            <a:pPr marL="0" indent="0">
               <a:buNone/>
             </a:pPr>
             <a:r>
-              <a:rPr lang="en-US" sz="950" b="1" dirty="0">
+              <a:rPr lang="es-SV" sz="1000" b="1" noProof="0" dirty="0">
                 <a:solidFill>
                   <a:srgbClr val="F5B841"/>
                 </a:solidFill>
-                <a:latin typeface="Arial" pitchFamily="34" charset="0"/>
+                <a:latin typeface="+mj-lt"/>
                 <a:ea typeface="Arial" pitchFamily="34" charset="-122"/>
                 <a:cs typeface="Arial" pitchFamily="34" charset="-120"/>
               </a:rPr>
               <a:t>04  </a:t>
             </a:r>
-            <a:pPr indent="0" marL="0">
-              <a:buNone/>
-            </a:pPr>
             <a:r>
-              <a:rPr lang="en-US" sz="950" b="1" dirty="0">
+              <a:rPr lang="es-SV" sz="1000" b="1" noProof="0" dirty="0">
                 <a:solidFill>
                   <a:srgbClr val="FFFFFF"/>
                 </a:solidFill>
-                <a:latin typeface="Arial" pitchFamily="34" charset="0"/>
+                <a:latin typeface="+mj-lt"/>
                 <a:ea typeface="Arial" pitchFamily="34" charset="-122"/>
                 <a:cs typeface="Arial" pitchFamily="34" charset="-120"/>
               </a:rPr>
               <a:t>ESCENARIO DE INTERRUPCIÓN</a:t>
             </a:r>
-            <a:endParaRPr lang="en-US" sz="950" dirty="0"/>
+            <a:endParaRPr lang="es-SV" sz="1000" noProof="0" dirty="0">
+              <a:latin typeface="+mj-lt"/>
+            </a:endParaRPr>
           </a:p>
         </p:txBody>
       </p:sp>
@@ -1957,8 +2708,8 @@
         </p:nvSpPr>
         <p:spPr>
           <a:xfrm>
-            <a:off x="8244688" y="1115568"/>
-            <a:ext cx="3306928" cy="621792"/>
+            <a:off x="6455664" y="1755648"/>
+            <a:ext cx="5257800" cy="530352"/>
           </a:xfrm>
           <a:prstGeom prst="rect">
             <a:avLst/>
@@ -1970,18 +2721,21 @@
           <a:bodyPr wrap="square" lIns="0" tIns="0" rIns="0" bIns="0" rtlCol="0" anchor="t"/>
           <a:lstStyle/>
           <a:p>
-            <a:pPr indent="0" marL="0">
+            <a:pPr marL="0" indent="0">
               <a:buNone/>
             </a:pPr>
             <a:r>
-              <a:rPr lang="en-US" sz="950" dirty="0">
+              <a:rPr lang="es-SV" sz="1000" noProof="0" dirty="0">
                 <a:solidFill>
                   <a:srgbClr val="E8EEF6"/>
                 </a:solidFill>
+                <a:latin typeface="+mj-lt"/>
               </a:rPr>
               <a:t>Se simulará una interrupción de los servicios de comunicación proporcionados por el proveedor crítico, afectando la conectividad y disponibilidad de los servicios dependientes de dicha infraestructura.</a:t>
             </a:r>
-            <a:endParaRPr lang="en-US" sz="950" dirty="0"/>
+            <a:endParaRPr lang="es-SV" sz="1000" noProof="0" dirty="0">
+              <a:latin typeface="+mj-lt"/>
+            </a:endParaRPr>
           </a:p>
         </p:txBody>
       </p:sp>
@@ -1993,8 +2747,8 @@
         </p:nvSpPr>
         <p:spPr>
           <a:xfrm>
-            <a:off x="4206240" y="1965960"/>
-            <a:ext cx="3672688" cy="2560320"/>
+            <a:off x="457200" y="2514600"/>
+            <a:ext cx="5623560" cy="2468880"/>
           </a:xfrm>
           <a:prstGeom prst="roundRect">
             <a:avLst>
@@ -2011,13 +2765,22 @@
             <a:prstDash val="solid"/>
           </a:ln>
           <a:effectLst>
-            <a:outerShdw sx="100000" sy="100000" kx="0" ky="0" algn="bl" rotWithShape="0" blurRad="76200" dist="19050" dir="5400000">
+            <a:outerShdw blurRad="76200" dist="19050" dir="5400000" algn="bl" rotWithShape="0">
               <a:srgbClr val="000000">
                 <a:alpha val="35000"/>
               </a:srgbClr>
             </a:outerShdw>
           </a:effectLst>
         </p:spPr>
+        <p:txBody>
+          <a:bodyPr/>
+          <a:lstStyle/>
+          <a:p>
+            <a:endParaRPr lang="es-SV" sz="2000" noProof="0" dirty="0">
+              <a:latin typeface="+mj-lt"/>
+            </a:endParaRPr>
+          </a:p>
+        </p:txBody>
       </p:sp>
       <p:sp>
         <p:nvSpPr>
@@ -2027,8 +2790,8 @@
         </p:nvSpPr>
         <p:spPr>
           <a:xfrm>
-            <a:off x="4370832" y="2130552"/>
-            <a:ext cx="365760" cy="365760"/>
+            <a:off x="621792" y="2679192"/>
+            <a:ext cx="384048" cy="384048"/>
           </a:xfrm>
           <a:prstGeom prst="ellipse">
             <a:avLst/>
@@ -2043,25 +2806,34 @@
             <a:prstDash val="solid"/>
           </a:ln>
         </p:spPr>
+        <p:txBody>
+          <a:bodyPr/>
+          <a:lstStyle/>
+          <a:p>
+            <a:endParaRPr lang="es-SV" sz="2000" noProof="0" dirty="0">
+              <a:latin typeface="+mj-lt"/>
+            </a:endParaRPr>
+          </a:p>
+        </p:txBody>
       </p:sp>
       <p:pic>
         <p:nvPicPr>
-          <p:cNvPr id="35" name="Image 8" descr="preencoded.png">    </p:cNvPr>
+          <p:cNvPr id="35" name="Image 8" descr="preencoded.png"/>
           <p:cNvPicPr>
             <a:picLocks noChangeAspect="1"/>
           </p:cNvPicPr>
           <p:nvPr/>
         </p:nvPicPr>
         <p:blipFill>
-          <a:blip r:embed="rId9"/>
+          <a:blip r:embed="rId5"/>
           <a:stretch>
             <a:fillRect/>
           </a:stretch>
         </p:blipFill>
         <p:spPr>
           <a:xfrm>
-            <a:off x="4465930" y="2225650"/>
-            <a:ext cx="175565" cy="175565"/>
+            <a:off x="722376" y="2779776"/>
+            <a:ext cx="182880" cy="182880"/>
           </a:xfrm>
           <a:prstGeom prst="rect">
             <a:avLst/>
@@ -2076,8 +2848,8 @@
         </p:nvSpPr>
         <p:spPr>
           <a:xfrm>
-            <a:off x="4828032" y="2093976"/>
-            <a:ext cx="2895448" cy="438912"/>
+            <a:off x="1115568" y="2642616"/>
+            <a:ext cx="4782312" cy="457200"/>
           </a:xfrm>
           <a:prstGeom prst="rect">
             <a:avLst/>
@@ -2089,35 +2861,34 @@
           <a:bodyPr wrap="square" lIns="0" tIns="0" rIns="0" bIns="0" rtlCol="0" anchor="ctr"/>
           <a:lstStyle/>
           <a:p>
-            <a:pPr indent="0" marL="0">
+            <a:pPr marL="0" indent="0" algn="l">
               <a:buNone/>
             </a:pPr>
             <a:r>
-              <a:rPr lang="en-US" sz="950" b="1" dirty="0">
+              <a:rPr lang="es-SV" sz="1000" b="1" noProof="0" dirty="0">
                 <a:solidFill>
                   <a:srgbClr val="F5B841"/>
                 </a:solidFill>
-                <a:latin typeface="Arial" pitchFamily="34" charset="0"/>
+                <a:latin typeface="+mj-lt"/>
                 <a:ea typeface="Arial" pitchFamily="34" charset="-122"/>
                 <a:cs typeface="Arial" pitchFamily="34" charset="-120"/>
               </a:rPr>
               <a:t>02  </a:t>
             </a:r>
-            <a:pPr indent="0" marL="0">
-              <a:buNone/>
-            </a:pPr>
             <a:r>
-              <a:rPr lang="en-US" sz="950" b="1" dirty="0">
+              <a:rPr lang="es-SV" sz="1000" b="1" noProof="0" dirty="0">
                 <a:solidFill>
                   <a:srgbClr val="FFFFFF"/>
                 </a:solidFill>
-                <a:latin typeface="Arial" pitchFamily="34" charset="0"/>
+                <a:latin typeface="+mj-lt"/>
                 <a:ea typeface="Arial" pitchFamily="34" charset="-122"/>
                 <a:cs typeface="Arial" pitchFamily="34" charset="-120"/>
               </a:rPr>
               <a:t>ALCANCE</a:t>
             </a:r>
-            <a:endParaRPr lang="en-US" sz="950" dirty="0"/>
+            <a:endParaRPr lang="es-SV" sz="1000" noProof="0" dirty="0">
+              <a:latin typeface="+mj-lt"/>
+            </a:endParaRPr>
           </a:p>
         </p:txBody>
       </p:sp>
@@ -2129,8 +2900,8 @@
         </p:nvSpPr>
         <p:spPr>
           <a:xfrm>
-            <a:off x="4389120" y="2624328"/>
-            <a:ext cx="3306928" cy="1810512"/>
+            <a:off x="640080" y="3172968"/>
+            <a:ext cx="5257800" cy="1719072"/>
           </a:xfrm>
           <a:prstGeom prst="rect">
             <a:avLst/>
@@ -2142,7 +2913,7 @@
           <a:bodyPr wrap="square" lIns="0" tIns="0" rIns="0" bIns="0" rtlCol="0" anchor="t"/>
           <a:lstStyle/>
           <a:p>
-            <a:pPr marL="127000" indent="-127000">
+            <a:pPr marL="127000" indent="-127000" algn="just">
               <a:spcAft>
                 <a:spcPts val="300"/>
               </a:spcAft>
@@ -2150,17 +2921,20 @@
               <a:buChar char="•"/>
             </a:pPr>
             <a:r>
-              <a:rPr lang="en-US" sz="900" dirty="0">
+              <a:rPr lang="es-SV" sz="1000" noProof="0" dirty="0">
                 <a:solidFill>
                   <a:srgbClr val="E8EEF6"/>
                 </a:solidFill>
+                <a:latin typeface="+mj-lt"/>
               </a:rPr>
               <a:t>Verificar que Agencia Plaza Mundo puedan continuar realizando transacciones durante la interrupción simulada.</a:t>
             </a:r>
-            <a:endParaRPr lang="en-US" sz="900" dirty="0"/>
-          </a:p>
-          <a:p>
-            <a:pPr marL="127000" indent="-127000">
+            <a:endParaRPr lang="es-SV" sz="1000" noProof="0" dirty="0">
+              <a:latin typeface="+mj-lt"/>
+            </a:endParaRPr>
+          </a:p>
+          <a:p>
+            <a:pPr marL="127000" indent="-127000" algn="just">
               <a:spcAft>
                 <a:spcPts val="300"/>
               </a:spcAft>
@@ -2168,17 +2942,20 @@
               <a:buChar char="•"/>
             </a:pPr>
             <a:r>
-              <a:rPr lang="en-US" sz="900" dirty="0">
+              <a:rPr lang="es-SV" sz="1000" noProof="0" dirty="0">
                 <a:solidFill>
                   <a:srgbClr val="E8EEF6"/>
                 </a:solidFill>
+                <a:latin typeface="+mj-lt"/>
               </a:rPr>
               <a:t>Validar la disponibilidad de los servicios tecnológicos mediante los mecanismos alternos de comunicación.</a:t>
             </a:r>
-            <a:endParaRPr lang="en-US" sz="900" dirty="0"/>
-          </a:p>
-          <a:p>
-            <a:pPr marL="127000" indent="-127000">
+            <a:endParaRPr lang="es-SV" sz="1000" noProof="0" dirty="0">
+              <a:latin typeface="+mj-lt"/>
+            </a:endParaRPr>
+          </a:p>
+          <a:p>
+            <a:pPr marL="127000" indent="-127000" algn="just">
               <a:spcAft>
                 <a:spcPts val="300"/>
               </a:spcAft>
@@ -2186,17 +2963,20 @@
               <a:buChar char="•"/>
             </a:pPr>
             <a:r>
-              <a:rPr lang="en-US" sz="900" dirty="0">
+              <a:rPr lang="es-SV" sz="1000" noProof="0" dirty="0">
                 <a:solidFill>
                   <a:srgbClr val="E8EEF6"/>
                 </a:solidFill>
+                <a:latin typeface="+mj-lt"/>
               </a:rPr>
               <a:t>Confirmar que no existan interrupciones que afecten la continuidad de la transaccionalidad.</a:t>
             </a:r>
-            <a:endParaRPr lang="en-US" sz="900" dirty="0"/>
-          </a:p>
-          <a:p>
-            <a:pPr marL="127000" indent="-127000">
+            <a:endParaRPr lang="es-SV" sz="1000" noProof="0" dirty="0">
+              <a:latin typeface="+mj-lt"/>
+            </a:endParaRPr>
+          </a:p>
+          <a:p>
+            <a:pPr marL="127000" indent="-127000" algn="just">
               <a:spcAft>
                 <a:spcPts val="300"/>
               </a:spcAft>
@@ -2204,17 +2984,20 @@
               <a:buChar char="•"/>
             </a:pPr>
             <a:r>
-              <a:rPr lang="en-US" sz="900" dirty="0">
+              <a:rPr lang="es-SV" sz="1000" noProof="0" dirty="0">
                 <a:solidFill>
                   <a:srgbClr val="E8EEF6"/>
                 </a:solidFill>
+                <a:latin typeface="+mj-lt"/>
               </a:rPr>
               <a:t>Verificar que todas las transacciones sean enviadas correctamente hacia la infraestructura tecnológica institucional.</a:t>
             </a:r>
-            <a:endParaRPr lang="en-US" sz="900" dirty="0"/>
-          </a:p>
-          <a:p>
-            <a:pPr marL="127000" indent="-127000">
+            <a:endParaRPr lang="es-SV" sz="1000" noProof="0" dirty="0">
+              <a:latin typeface="+mj-lt"/>
+            </a:endParaRPr>
+          </a:p>
+          <a:p>
+            <a:pPr marL="127000" indent="-127000" algn="just">
               <a:spcAft>
                 <a:spcPts val="300"/>
               </a:spcAft>
@@ -2222,17 +3005,20 @@
               <a:buChar char="•"/>
             </a:pPr>
             <a:r>
-              <a:rPr lang="en-US" sz="900" dirty="0">
+              <a:rPr lang="es-SV" sz="1000" noProof="0" dirty="0">
                 <a:solidFill>
                   <a:srgbClr val="E8EEF6"/>
                 </a:solidFill>
+                <a:latin typeface="+mj-lt"/>
               </a:rPr>
               <a:t>Validar la impresión de comprobantes y reportes durante la contingencia.</a:t>
             </a:r>
-            <a:endParaRPr lang="en-US" sz="900" dirty="0"/>
-          </a:p>
-          <a:p>
-            <a:pPr marL="127000" indent="-127000">
+            <a:endParaRPr lang="es-SV" sz="1000" noProof="0" dirty="0">
+              <a:latin typeface="+mj-lt"/>
+            </a:endParaRPr>
+          </a:p>
+          <a:p>
+            <a:pPr marL="127000" indent="-127000" algn="just">
               <a:spcAft>
                 <a:spcPts val="300"/>
               </a:spcAft>
@@ -2240,14 +3026,17 @@
               <a:buChar char="•"/>
             </a:pPr>
             <a:r>
-              <a:rPr lang="en-US" sz="900" dirty="0">
+              <a:rPr lang="es-SV" sz="1000" noProof="0" dirty="0">
                 <a:solidFill>
                   <a:srgbClr val="E8EEF6"/>
                 </a:solidFill>
+                <a:latin typeface="+mj-lt"/>
               </a:rPr>
               <a:t>Evaluar el tiempo de respuesta y recuperación del proveedor crítico de comunicaciones.</a:t>
             </a:r>
-            <a:endParaRPr lang="en-US" sz="900" dirty="0"/>
+            <a:endParaRPr lang="es-SV" sz="1000" noProof="0" dirty="0">
+              <a:latin typeface="+mj-lt"/>
+            </a:endParaRPr>
           </a:p>
         </p:txBody>
       </p:sp>
@@ -2259,8 +3048,8 @@
         </p:nvSpPr>
         <p:spPr>
           <a:xfrm>
-            <a:off x="8061808" y="1965960"/>
-            <a:ext cx="3672688" cy="2560320"/>
+            <a:off x="6272784" y="2514600"/>
+            <a:ext cx="5623560" cy="2468880"/>
           </a:xfrm>
           <a:prstGeom prst="roundRect">
             <a:avLst>
@@ -2277,13 +3066,22 @@
             <a:prstDash val="solid"/>
           </a:ln>
           <a:effectLst>
-            <a:outerShdw sx="100000" sy="100000" kx="0" ky="0" algn="bl" rotWithShape="0" blurRad="76200" dist="19050" dir="5400000">
+            <a:outerShdw blurRad="76200" dist="19050" dir="5400000" algn="bl" rotWithShape="0">
               <a:srgbClr val="000000">
                 <a:alpha val="35000"/>
               </a:srgbClr>
             </a:outerShdw>
           </a:effectLst>
         </p:spPr>
+        <p:txBody>
+          <a:bodyPr/>
+          <a:lstStyle/>
+          <a:p>
+            <a:endParaRPr lang="es-SV" sz="2000" noProof="0" dirty="0">
+              <a:latin typeface="+mj-lt"/>
+            </a:endParaRPr>
+          </a:p>
+        </p:txBody>
       </p:sp>
       <p:sp>
         <p:nvSpPr>
@@ -2293,8 +3091,8 @@
         </p:nvSpPr>
         <p:spPr>
           <a:xfrm>
-            <a:off x="8226400" y="2130552"/>
-            <a:ext cx="365760" cy="365760"/>
+            <a:off x="6437376" y="2679192"/>
+            <a:ext cx="384048" cy="384048"/>
           </a:xfrm>
           <a:prstGeom prst="ellipse">
             <a:avLst/>
@@ -2309,25 +3107,34 @@
             <a:prstDash val="solid"/>
           </a:ln>
         </p:spPr>
+        <p:txBody>
+          <a:bodyPr/>
+          <a:lstStyle/>
+          <a:p>
+            <a:endParaRPr lang="es-SV" sz="2000" noProof="0" dirty="0">
+              <a:latin typeface="+mj-lt"/>
+            </a:endParaRPr>
+          </a:p>
+        </p:txBody>
       </p:sp>
       <p:pic>
         <p:nvPicPr>
-          <p:cNvPr id="40" name="Image 9" descr="preencoded.png">    </p:cNvPr>
+          <p:cNvPr id="40" name="Image 9" descr="preencoded.png"/>
           <p:cNvPicPr>
             <a:picLocks noChangeAspect="1"/>
           </p:cNvPicPr>
           <p:nvPr/>
         </p:nvPicPr>
         <p:blipFill>
-          <a:blip r:embed="rId10"/>
+          <a:blip r:embed="rId6"/>
           <a:stretch>
             <a:fillRect/>
           </a:stretch>
         </p:blipFill>
         <p:spPr>
           <a:xfrm>
-            <a:off x="8321497" y="2225650"/>
-            <a:ext cx="175565" cy="175565"/>
+            <a:off x="6537960" y="2779776"/>
+            <a:ext cx="182880" cy="182880"/>
           </a:xfrm>
           <a:prstGeom prst="rect">
             <a:avLst/>
@@ -2342,8 +3149,8 @@
         </p:nvSpPr>
         <p:spPr>
           <a:xfrm>
-            <a:off x="8683600" y="2093976"/>
-            <a:ext cx="2895448" cy="438912"/>
+            <a:off x="6931152" y="2642616"/>
+            <a:ext cx="4782312" cy="457200"/>
           </a:xfrm>
           <a:prstGeom prst="rect">
             <a:avLst/>
@@ -2355,35 +3162,34 @@
           <a:bodyPr wrap="square" lIns="0" tIns="0" rIns="0" bIns="0" rtlCol="0" anchor="ctr"/>
           <a:lstStyle/>
           <a:p>
-            <a:pPr indent="0" marL="0">
+            <a:pPr marL="0" indent="0">
               <a:buNone/>
             </a:pPr>
             <a:r>
-              <a:rPr lang="en-US" sz="950" b="1" dirty="0">
+              <a:rPr lang="es-SV" sz="1000" b="1" noProof="0" dirty="0">
                 <a:solidFill>
                   <a:srgbClr val="F5B841"/>
                 </a:solidFill>
-                <a:latin typeface="Arial" pitchFamily="34" charset="0"/>
+                <a:latin typeface="+mj-lt"/>
                 <a:ea typeface="Arial" pitchFamily="34" charset="-122"/>
                 <a:cs typeface="Arial" pitchFamily="34" charset="-120"/>
               </a:rPr>
               <a:t>05  </a:t>
             </a:r>
-            <a:pPr indent="0" marL="0">
-              <a:buNone/>
-            </a:pPr>
             <a:r>
-              <a:rPr lang="en-US" sz="950" b="1" dirty="0">
+              <a:rPr lang="es-SV" sz="1000" b="1" noProof="0" dirty="0">
                 <a:solidFill>
                   <a:srgbClr val="FFFFFF"/>
                 </a:solidFill>
-                <a:latin typeface="Arial" pitchFamily="34" charset="0"/>
+                <a:latin typeface="+mj-lt"/>
                 <a:ea typeface="Arial" pitchFamily="34" charset="-122"/>
                 <a:cs typeface="Arial" pitchFamily="34" charset="-120"/>
               </a:rPr>
               <a:t>METODOLOGÍA A USAR EN LA EJECUCIÓN DE LA PRUEBA</a:t>
             </a:r>
-            <a:endParaRPr lang="en-US" sz="950" dirty="0"/>
+            <a:endParaRPr lang="es-SV" sz="1000" noProof="0" dirty="0">
+              <a:latin typeface="+mj-lt"/>
+            </a:endParaRPr>
           </a:p>
         </p:txBody>
       </p:sp>
@@ -2395,8 +3201,8 @@
         </p:nvSpPr>
         <p:spPr>
           <a:xfrm>
-            <a:off x="8244688" y="2624328"/>
-            <a:ext cx="3306928" cy="256032"/>
+            <a:off x="6455664" y="3191256"/>
+            <a:ext cx="5257800" cy="246888"/>
           </a:xfrm>
           <a:prstGeom prst="roundRect">
             <a:avLst>
@@ -2413,6 +3219,15 @@
             <a:prstDash val="solid"/>
           </a:ln>
         </p:spPr>
+        <p:txBody>
+          <a:bodyPr/>
+          <a:lstStyle/>
+          <a:p>
+            <a:endParaRPr lang="es-SV" sz="2000" noProof="0" dirty="0">
+              <a:latin typeface="+mj-lt"/>
+            </a:endParaRPr>
+          </a:p>
+        </p:txBody>
       </p:sp>
       <p:sp>
         <p:nvSpPr>
@@ -2422,8 +3237,8 @@
         </p:nvSpPr>
         <p:spPr>
           <a:xfrm>
-            <a:off x="8317840" y="2624328"/>
-            <a:ext cx="228600" cy="256032"/>
+            <a:off x="6528816" y="3191256"/>
+            <a:ext cx="228600" cy="246888"/>
           </a:xfrm>
           <a:prstGeom prst="rect">
             <a:avLst/>
@@ -2435,18 +3250,21 @@
           <a:bodyPr wrap="square" lIns="0" tIns="0" rIns="0" bIns="0" rtlCol="0" anchor="ctr"/>
           <a:lstStyle/>
           <a:p>
-            <a:pPr indent="0" marL="0">
+            <a:pPr marL="0" indent="0">
               <a:buNone/>
             </a:pPr>
             <a:r>
-              <a:rPr lang="en-US" sz="1000" b="1" dirty="0">
+              <a:rPr lang="es-SV" sz="1050" b="1" noProof="0" dirty="0">
                 <a:solidFill>
                   <a:srgbClr val="F5B841"/>
                 </a:solidFill>
+                <a:latin typeface="+mj-lt"/>
               </a:rPr>
               <a:t>1</a:t>
             </a:r>
-            <a:endParaRPr lang="en-US" sz="1000" dirty="0"/>
+            <a:endParaRPr lang="es-SV" sz="1050" noProof="0" dirty="0">
+              <a:latin typeface="+mj-lt"/>
+            </a:endParaRPr>
           </a:p>
         </p:txBody>
       </p:sp>
@@ -2458,8 +3276,8 @@
         </p:nvSpPr>
         <p:spPr>
           <a:xfrm>
-            <a:off x="8564728" y="2624328"/>
-            <a:ext cx="2941168" cy="256032"/>
+            <a:off x="6803136" y="3191256"/>
+            <a:ext cx="4846320" cy="246888"/>
           </a:xfrm>
           <a:prstGeom prst="rect">
             <a:avLst/>
@@ -2471,18 +3289,21 @@
           <a:bodyPr wrap="square" lIns="0" tIns="0" rIns="0" bIns="0" rtlCol="0" anchor="ctr"/>
           <a:lstStyle/>
           <a:p>
-            <a:pPr indent="0" marL="0">
+            <a:pPr marL="0" indent="0">
               <a:buNone/>
             </a:pPr>
             <a:r>
-              <a:rPr lang="en-US" sz="950" dirty="0">
+              <a:rPr lang="es-SV" sz="1000" noProof="0" dirty="0">
                 <a:solidFill>
                   <a:srgbClr val="E8EEF6"/>
                 </a:solidFill>
+                <a:latin typeface="+mj-lt"/>
               </a:rPr>
               <a:t>Notificación del incidente.</a:t>
             </a:r>
-            <a:endParaRPr lang="en-US" sz="950" dirty="0"/>
+            <a:endParaRPr lang="es-SV" sz="1000" noProof="0" dirty="0">
+              <a:latin typeface="+mj-lt"/>
+            </a:endParaRPr>
           </a:p>
         </p:txBody>
       </p:sp>
@@ -2494,8 +3315,8 @@
         </p:nvSpPr>
         <p:spPr>
           <a:xfrm>
-            <a:off x="8244688" y="2935224"/>
-            <a:ext cx="3306928" cy="256032"/>
+            <a:off x="6455664" y="3483864"/>
+            <a:ext cx="5257800" cy="246888"/>
           </a:xfrm>
           <a:prstGeom prst="roundRect">
             <a:avLst>
@@ -2512,6 +3333,15 @@
             <a:prstDash val="solid"/>
           </a:ln>
         </p:spPr>
+        <p:txBody>
+          <a:bodyPr/>
+          <a:lstStyle/>
+          <a:p>
+            <a:endParaRPr lang="es-SV" sz="2000" noProof="0" dirty="0">
+              <a:latin typeface="+mj-lt"/>
+            </a:endParaRPr>
+          </a:p>
+        </p:txBody>
       </p:sp>
       <p:sp>
         <p:nvSpPr>
@@ -2521,8 +3351,8 @@
         </p:nvSpPr>
         <p:spPr>
           <a:xfrm>
-            <a:off x="8317840" y="2935224"/>
-            <a:ext cx="228600" cy="256032"/>
+            <a:off x="6528816" y="3483864"/>
+            <a:ext cx="228600" cy="246888"/>
           </a:xfrm>
           <a:prstGeom prst="rect">
             <a:avLst/>
@@ -2534,18 +3364,21 @@
           <a:bodyPr wrap="square" lIns="0" tIns="0" rIns="0" bIns="0" rtlCol="0" anchor="ctr"/>
           <a:lstStyle/>
           <a:p>
-            <a:pPr indent="0" marL="0">
+            <a:pPr marL="0" indent="0">
               <a:buNone/>
             </a:pPr>
             <a:r>
-              <a:rPr lang="en-US" sz="1000" b="1" dirty="0">
+              <a:rPr lang="es-SV" sz="1050" b="1" noProof="0" dirty="0">
                 <a:solidFill>
                   <a:srgbClr val="F5B841"/>
                 </a:solidFill>
+                <a:latin typeface="+mj-lt"/>
               </a:rPr>
               <a:t>2</a:t>
             </a:r>
-            <a:endParaRPr lang="en-US" sz="1000" dirty="0"/>
+            <a:endParaRPr lang="es-SV" sz="1050" noProof="0" dirty="0">
+              <a:latin typeface="+mj-lt"/>
+            </a:endParaRPr>
           </a:p>
         </p:txBody>
       </p:sp>
@@ -2557,8 +3390,8 @@
         </p:nvSpPr>
         <p:spPr>
           <a:xfrm>
-            <a:off x="8564728" y="2935224"/>
-            <a:ext cx="2941168" cy="256032"/>
+            <a:off x="6803136" y="3483864"/>
+            <a:ext cx="4846320" cy="246888"/>
           </a:xfrm>
           <a:prstGeom prst="rect">
             <a:avLst/>
@@ -2570,18 +3403,21 @@
           <a:bodyPr wrap="square" lIns="0" tIns="0" rIns="0" bIns="0" rtlCol="0" anchor="ctr"/>
           <a:lstStyle/>
           <a:p>
-            <a:pPr indent="0" marL="0">
+            <a:pPr marL="0" indent="0">
               <a:buNone/>
             </a:pPr>
             <a:r>
-              <a:rPr lang="en-US" sz="950" dirty="0">
+              <a:rPr lang="es-SV" sz="1000" noProof="0" dirty="0">
                 <a:solidFill>
                   <a:srgbClr val="E8EEF6"/>
                 </a:solidFill>
+                <a:latin typeface="+mj-lt"/>
               </a:rPr>
               <a:t>Escalamiento al proveedor.</a:t>
             </a:r>
-            <a:endParaRPr lang="en-US" sz="950" dirty="0"/>
+            <a:endParaRPr lang="es-SV" sz="1000" noProof="0" dirty="0">
+              <a:latin typeface="+mj-lt"/>
+            </a:endParaRPr>
           </a:p>
         </p:txBody>
       </p:sp>
@@ -2593,8 +3429,8 @@
         </p:nvSpPr>
         <p:spPr>
           <a:xfrm>
-            <a:off x="8244688" y="3246120"/>
-            <a:ext cx="3306928" cy="256032"/>
+            <a:off x="6455664" y="3776472"/>
+            <a:ext cx="5257800" cy="246888"/>
           </a:xfrm>
           <a:prstGeom prst="roundRect">
             <a:avLst>
@@ -2611,6 +3447,15 @@
             <a:prstDash val="solid"/>
           </a:ln>
         </p:spPr>
+        <p:txBody>
+          <a:bodyPr/>
+          <a:lstStyle/>
+          <a:p>
+            <a:endParaRPr lang="es-SV" sz="2000" noProof="0" dirty="0">
+              <a:latin typeface="+mj-lt"/>
+            </a:endParaRPr>
+          </a:p>
+        </p:txBody>
       </p:sp>
       <p:sp>
         <p:nvSpPr>
@@ -2620,8 +3465,8 @@
         </p:nvSpPr>
         <p:spPr>
           <a:xfrm>
-            <a:off x="8317840" y="3246120"/>
-            <a:ext cx="228600" cy="256032"/>
+            <a:off x="6528816" y="3776472"/>
+            <a:ext cx="228600" cy="246888"/>
           </a:xfrm>
           <a:prstGeom prst="rect">
             <a:avLst/>
@@ -2633,18 +3478,21 @@
           <a:bodyPr wrap="square" lIns="0" tIns="0" rIns="0" bIns="0" rtlCol="0" anchor="ctr"/>
           <a:lstStyle/>
           <a:p>
-            <a:pPr indent="0" marL="0">
+            <a:pPr marL="0" indent="0">
               <a:buNone/>
             </a:pPr>
             <a:r>
-              <a:rPr lang="en-US" sz="1000" b="1" dirty="0">
+              <a:rPr lang="es-SV" sz="1050" b="1" noProof="0" dirty="0">
                 <a:solidFill>
                   <a:srgbClr val="F5B841"/>
                 </a:solidFill>
+                <a:latin typeface="+mj-lt"/>
               </a:rPr>
               <a:t>3</a:t>
             </a:r>
-            <a:endParaRPr lang="en-US" sz="1000" dirty="0"/>
+            <a:endParaRPr lang="es-SV" sz="1050" noProof="0" dirty="0">
+              <a:latin typeface="+mj-lt"/>
+            </a:endParaRPr>
           </a:p>
         </p:txBody>
       </p:sp>
@@ -2656,8 +3504,8 @@
         </p:nvSpPr>
         <p:spPr>
           <a:xfrm>
-            <a:off x="8564728" y="3246120"/>
-            <a:ext cx="2941168" cy="256032"/>
+            <a:off x="6803136" y="3776472"/>
+            <a:ext cx="4846320" cy="246888"/>
           </a:xfrm>
           <a:prstGeom prst="rect">
             <a:avLst/>
@@ -2669,18 +3517,21 @@
           <a:bodyPr wrap="square" lIns="0" tIns="0" rIns="0" bIns="0" rtlCol="0" anchor="ctr"/>
           <a:lstStyle/>
           <a:p>
-            <a:pPr indent="0" marL="0">
+            <a:pPr marL="0" indent="0">
               <a:buNone/>
             </a:pPr>
             <a:r>
-              <a:rPr lang="en-US" sz="950" dirty="0">
+              <a:rPr lang="es-SV" sz="1000" noProof="0" dirty="0">
                 <a:solidFill>
                   <a:srgbClr val="E8EEF6"/>
                 </a:solidFill>
+                <a:latin typeface="+mj-lt"/>
               </a:rPr>
               <a:t>Activación de mecanismos alternos de comunicación.</a:t>
             </a:r>
-            <a:endParaRPr lang="en-US" sz="950" dirty="0"/>
+            <a:endParaRPr lang="es-SV" sz="1000" noProof="0" dirty="0">
+              <a:latin typeface="+mj-lt"/>
+            </a:endParaRPr>
           </a:p>
         </p:txBody>
       </p:sp>
@@ -2692,8 +3543,8 @@
         </p:nvSpPr>
         <p:spPr>
           <a:xfrm>
-            <a:off x="8244688" y="3557016"/>
-            <a:ext cx="3306928" cy="256032"/>
+            <a:off x="6455664" y="4069080"/>
+            <a:ext cx="5257800" cy="246888"/>
           </a:xfrm>
           <a:prstGeom prst="roundRect">
             <a:avLst>
@@ -2710,6 +3561,15 @@
             <a:prstDash val="solid"/>
           </a:ln>
         </p:spPr>
+        <p:txBody>
+          <a:bodyPr/>
+          <a:lstStyle/>
+          <a:p>
+            <a:endParaRPr lang="es-SV" sz="2000" noProof="0" dirty="0">
+              <a:latin typeface="+mj-lt"/>
+            </a:endParaRPr>
+          </a:p>
+        </p:txBody>
       </p:sp>
       <p:sp>
         <p:nvSpPr>
@@ -2719,8 +3579,8 @@
         </p:nvSpPr>
         <p:spPr>
           <a:xfrm>
-            <a:off x="8317840" y="3557016"/>
-            <a:ext cx="228600" cy="256032"/>
+            <a:off x="6528816" y="4069080"/>
+            <a:ext cx="228600" cy="246888"/>
           </a:xfrm>
           <a:prstGeom prst="rect">
             <a:avLst/>
@@ -2732,18 +3592,21 @@
           <a:bodyPr wrap="square" lIns="0" tIns="0" rIns="0" bIns="0" rtlCol="0" anchor="ctr"/>
           <a:lstStyle/>
           <a:p>
-            <a:pPr indent="0" marL="0">
+            <a:pPr marL="0" indent="0">
               <a:buNone/>
             </a:pPr>
             <a:r>
-              <a:rPr lang="en-US" sz="1000" b="1" dirty="0">
+              <a:rPr lang="es-SV" sz="1050" b="1" noProof="0" dirty="0">
                 <a:solidFill>
                   <a:srgbClr val="F5B841"/>
                 </a:solidFill>
+                <a:latin typeface="+mj-lt"/>
               </a:rPr>
               <a:t>4</a:t>
             </a:r>
-            <a:endParaRPr lang="en-US" sz="1000" dirty="0"/>
+            <a:endParaRPr lang="es-SV" sz="1050" noProof="0" dirty="0">
+              <a:latin typeface="+mj-lt"/>
+            </a:endParaRPr>
           </a:p>
         </p:txBody>
       </p:sp>
@@ -2755,8 +3618,8 @@
         </p:nvSpPr>
         <p:spPr>
           <a:xfrm>
-            <a:off x="8564728" y="3557016"/>
-            <a:ext cx="2941168" cy="256032"/>
+            <a:off x="6803136" y="4069080"/>
+            <a:ext cx="4846320" cy="246888"/>
           </a:xfrm>
           <a:prstGeom prst="rect">
             <a:avLst/>
@@ -2768,18 +3631,21 @@
           <a:bodyPr wrap="square" lIns="0" tIns="0" rIns="0" bIns="0" rtlCol="0" anchor="ctr"/>
           <a:lstStyle/>
           <a:p>
-            <a:pPr indent="0" marL="0">
+            <a:pPr marL="0" indent="0">
               <a:buNone/>
             </a:pPr>
             <a:r>
-              <a:rPr lang="en-US" sz="950" dirty="0">
+              <a:rPr lang="es-SV" sz="1000" noProof="0" dirty="0">
                 <a:solidFill>
                   <a:srgbClr val="E8EEF6"/>
                 </a:solidFill>
+                <a:latin typeface="+mj-lt"/>
               </a:rPr>
               <a:t>Monitoreo de la recuperación.</a:t>
             </a:r>
-            <a:endParaRPr lang="en-US" sz="950" dirty="0"/>
+            <a:endParaRPr lang="es-SV" sz="1000" noProof="0" dirty="0">
+              <a:latin typeface="+mj-lt"/>
+            </a:endParaRPr>
           </a:p>
         </p:txBody>
       </p:sp>
@@ -2791,8 +3657,8 @@
         </p:nvSpPr>
         <p:spPr>
           <a:xfrm>
-            <a:off x="8244688" y="3867912"/>
-            <a:ext cx="3306928" cy="256032"/>
+            <a:off x="6455664" y="4361688"/>
+            <a:ext cx="5257800" cy="246888"/>
           </a:xfrm>
           <a:prstGeom prst="roundRect">
             <a:avLst>
@@ -2809,6 +3675,15 @@
             <a:prstDash val="solid"/>
           </a:ln>
         </p:spPr>
+        <p:txBody>
+          <a:bodyPr/>
+          <a:lstStyle/>
+          <a:p>
+            <a:endParaRPr lang="es-SV" sz="2000" noProof="0" dirty="0">
+              <a:latin typeface="+mj-lt"/>
+            </a:endParaRPr>
+          </a:p>
+        </p:txBody>
       </p:sp>
       <p:sp>
         <p:nvSpPr>
@@ -2818,8 +3693,8 @@
         </p:nvSpPr>
         <p:spPr>
           <a:xfrm>
-            <a:off x="8317840" y="3867912"/>
-            <a:ext cx="228600" cy="256032"/>
+            <a:off x="6528816" y="4361688"/>
+            <a:ext cx="228600" cy="246888"/>
           </a:xfrm>
           <a:prstGeom prst="rect">
             <a:avLst/>
@@ -2831,18 +3706,21 @@
           <a:bodyPr wrap="square" lIns="0" tIns="0" rIns="0" bIns="0" rtlCol="0" anchor="ctr"/>
           <a:lstStyle/>
           <a:p>
-            <a:pPr indent="0" marL="0">
+            <a:pPr marL="0" indent="0">
               <a:buNone/>
             </a:pPr>
             <a:r>
-              <a:rPr lang="en-US" sz="1000" b="1" dirty="0">
+              <a:rPr lang="es-SV" sz="1050" b="1" noProof="0" dirty="0">
                 <a:solidFill>
                   <a:srgbClr val="F5B841"/>
                 </a:solidFill>
+                <a:latin typeface="+mj-lt"/>
               </a:rPr>
               <a:t>5</a:t>
             </a:r>
-            <a:endParaRPr lang="en-US" sz="1000" dirty="0"/>
+            <a:endParaRPr lang="es-SV" sz="1050" noProof="0" dirty="0">
+              <a:latin typeface="+mj-lt"/>
+            </a:endParaRPr>
           </a:p>
         </p:txBody>
       </p:sp>
@@ -2854,8 +3732,8 @@
         </p:nvSpPr>
         <p:spPr>
           <a:xfrm>
-            <a:off x="8564728" y="3867912"/>
-            <a:ext cx="2941168" cy="256032"/>
+            <a:off x="6803136" y="4361688"/>
+            <a:ext cx="4846320" cy="246888"/>
           </a:xfrm>
           <a:prstGeom prst="rect">
             <a:avLst/>
@@ -2867,18 +3745,21 @@
           <a:bodyPr wrap="square" lIns="0" tIns="0" rIns="0" bIns="0" rtlCol="0" anchor="ctr"/>
           <a:lstStyle/>
           <a:p>
-            <a:pPr indent="0" marL="0">
+            <a:pPr marL="0" indent="0">
               <a:buNone/>
             </a:pPr>
             <a:r>
-              <a:rPr lang="en-US" sz="950" dirty="0">
+              <a:rPr lang="es-SV" sz="1000" noProof="0" dirty="0">
                 <a:solidFill>
                   <a:srgbClr val="E8EEF6"/>
                 </a:solidFill>
+                <a:latin typeface="+mj-lt"/>
               </a:rPr>
               <a:t>Validación de disponibilidad de servicios.</a:t>
             </a:r>
-            <a:endParaRPr lang="en-US" sz="950" dirty="0"/>
+            <a:endParaRPr lang="es-SV" sz="1000" noProof="0" dirty="0">
+              <a:latin typeface="+mj-lt"/>
+            </a:endParaRPr>
           </a:p>
         </p:txBody>
       </p:sp>
@@ -2890,8 +3771,8 @@
         </p:nvSpPr>
         <p:spPr>
           <a:xfrm>
-            <a:off x="8244688" y="4178808"/>
-            <a:ext cx="3306928" cy="256032"/>
+            <a:off x="6455664" y="4654296"/>
+            <a:ext cx="5257800" cy="246888"/>
           </a:xfrm>
           <a:prstGeom prst="roundRect">
             <a:avLst>
@@ -2908,6 +3789,15 @@
             <a:prstDash val="solid"/>
           </a:ln>
         </p:spPr>
+        <p:txBody>
+          <a:bodyPr/>
+          <a:lstStyle/>
+          <a:p>
+            <a:endParaRPr lang="es-SV" sz="2000" noProof="0" dirty="0">
+              <a:latin typeface="+mj-lt"/>
+            </a:endParaRPr>
+          </a:p>
+        </p:txBody>
       </p:sp>
       <p:sp>
         <p:nvSpPr>
@@ -2917,8 +3807,8 @@
         </p:nvSpPr>
         <p:spPr>
           <a:xfrm>
-            <a:off x="8317840" y="4178808"/>
-            <a:ext cx="228600" cy="256032"/>
+            <a:off x="6528816" y="4654296"/>
+            <a:ext cx="228600" cy="246888"/>
           </a:xfrm>
           <a:prstGeom prst="rect">
             <a:avLst/>
@@ -2930,18 +3820,21 @@
           <a:bodyPr wrap="square" lIns="0" tIns="0" rIns="0" bIns="0" rtlCol="0" anchor="ctr"/>
           <a:lstStyle/>
           <a:p>
-            <a:pPr indent="0" marL="0">
+            <a:pPr marL="0" indent="0">
               <a:buNone/>
             </a:pPr>
             <a:r>
-              <a:rPr lang="en-US" sz="1000" b="1" dirty="0">
+              <a:rPr lang="es-SV" sz="1050" b="1" noProof="0" dirty="0">
                 <a:solidFill>
                   <a:srgbClr val="F5B841"/>
                 </a:solidFill>
+                <a:latin typeface="+mj-lt"/>
               </a:rPr>
               <a:t>6</a:t>
             </a:r>
-            <a:endParaRPr lang="en-US" sz="1000" dirty="0"/>
+            <a:endParaRPr lang="es-SV" sz="1050" noProof="0" dirty="0">
+              <a:latin typeface="+mj-lt"/>
+            </a:endParaRPr>
           </a:p>
         </p:txBody>
       </p:sp>
@@ -2953,8 +3846,8 @@
         </p:nvSpPr>
         <p:spPr>
           <a:xfrm>
-            <a:off x="8564728" y="4178808"/>
-            <a:ext cx="2941168" cy="256032"/>
+            <a:off x="6803136" y="4654296"/>
+            <a:ext cx="4846320" cy="246888"/>
           </a:xfrm>
           <a:prstGeom prst="rect">
             <a:avLst/>
@@ -2966,18 +3859,21 @@
           <a:bodyPr wrap="square" lIns="0" tIns="0" rIns="0" bIns="0" rtlCol="0" anchor="ctr"/>
           <a:lstStyle/>
           <a:p>
-            <a:pPr indent="0" marL="0">
+            <a:pPr marL="0" indent="0">
               <a:buNone/>
             </a:pPr>
             <a:r>
-              <a:rPr lang="en-US" sz="950" dirty="0">
+              <a:rPr lang="es-SV" sz="1000" noProof="0" dirty="0">
                 <a:solidFill>
                   <a:srgbClr val="E8EEF6"/>
                 </a:solidFill>
+                <a:latin typeface="+mj-lt"/>
               </a:rPr>
               <a:t>Documentación de resultados.</a:t>
             </a:r>
-            <a:endParaRPr lang="en-US" sz="950" dirty="0"/>
+            <a:endParaRPr lang="es-SV" sz="1000" noProof="0" dirty="0">
+              <a:latin typeface="+mj-lt"/>
+            </a:endParaRPr>
           </a:p>
         </p:txBody>
       </p:sp>
@@ -2989,8 +3885,8 @@
         </p:nvSpPr>
         <p:spPr>
           <a:xfrm>
-            <a:off x="4206240" y="4681728"/>
-            <a:ext cx="2387498" cy="1719072"/>
+            <a:off x="457200" y="5120640"/>
+            <a:ext cx="3685032" cy="1554480"/>
           </a:xfrm>
           <a:prstGeom prst="roundRect">
             <a:avLst>
@@ -3007,13 +3903,22 @@
             <a:prstDash val="solid"/>
           </a:ln>
           <a:effectLst>
-            <a:outerShdw sx="100000" sy="100000" kx="0" ky="0" algn="bl" rotWithShape="0" blurRad="76200" dist="19050" dir="5400000">
+            <a:outerShdw blurRad="76200" dist="19050" dir="5400000" algn="bl" rotWithShape="0">
               <a:srgbClr val="000000">
                 <a:alpha val="35000"/>
               </a:srgbClr>
             </a:outerShdw>
           </a:effectLst>
         </p:spPr>
+        <p:txBody>
+          <a:bodyPr/>
+          <a:lstStyle/>
+          <a:p>
+            <a:endParaRPr lang="es-SV" sz="2000" noProof="0" dirty="0">
+              <a:latin typeface="+mj-lt"/>
+            </a:endParaRPr>
+          </a:p>
+        </p:txBody>
       </p:sp>
       <p:sp>
         <p:nvSpPr>
@@ -3023,8 +3928,8 @@
         </p:nvSpPr>
         <p:spPr>
           <a:xfrm>
-            <a:off x="4370832" y="4846320"/>
-            <a:ext cx="365760" cy="365760"/>
+            <a:off x="621792" y="5285231"/>
+            <a:ext cx="384048" cy="384048"/>
           </a:xfrm>
           <a:prstGeom prst="ellipse">
             <a:avLst/>
@@ -3039,25 +3944,34 @@
             <a:prstDash val="solid"/>
           </a:ln>
         </p:spPr>
+        <p:txBody>
+          <a:bodyPr/>
+          <a:lstStyle/>
+          <a:p>
+            <a:endParaRPr lang="es-SV" sz="2000" noProof="0" dirty="0">
+              <a:latin typeface="+mj-lt"/>
+            </a:endParaRPr>
+          </a:p>
+        </p:txBody>
       </p:sp>
       <p:pic>
         <p:nvPicPr>
-          <p:cNvPr id="62" name="Image 10" descr="preencoded.png">    </p:cNvPr>
+          <p:cNvPr id="62" name="Image 10" descr="preencoded.png"/>
           <p:cNvPicPr>
             <a:picLocks noChangeAspect="1"/>
           </p:cNvPicPr>
           <p:nvPr/>
         </p:nvPicPr>
         <p:blipFill>
-          <a:blip r:embed="rId11"/>
+          <a:blip r:embed="rId7"/>
           <a:stretch>
             <a:fillRect/>
           </a:stretch>
         </p:blipFill>
         <p:spPr>
           <a:xfrm>
-            <a:off x="4465930" y="4941418"/>
-            <a:ext cx="175565" cy="175565"/>
+            <a:off x="722376" y="5385816"/>
+            <a:ext cx="182880" cy="182880"/>
           </a:xfrm>
           <a:prstGeom prst="rect">
             <a:avLst/>
@@ -3072,8 +3986,8 @@
         </p:nvSpPr>
         <p:spPr>
           <a:xfrm>
-            <a:off x="4828032" y="4809744"/>
-            <a:ext cx="1610258" cy="438912"/>
+            <a:off x="1115568" y="5248655"/>
+            <a:ext cx="2843784" cy="457200"/>
           </a:xfrm>
           <a:prstGeom prst="rect">
             <a:avLst/>
@@ -3085,35 +3999,34 @@
           <a:bodyPr wrap="square" lIns="0" tIns="0" rIns="0" bIns="0" rtlCol="0" anchor="ctr"/>
           <a:lstStyle/>
           <a:p>
-            <a:pPr indent="0" marL="0">
+            <a:pPr marL="0" indent="0">
               <a:buNone/>
             </a:pPr>
             <a:r>
-              <a:rPr lang="en-US" sz="950" b="1" dirty="0">
+              <a:rPr lang="es-SV" sz="1000" b="1" noProof="0" dirty="0">
                 <a:solidFill>
                   <a:srgbClr val="F5B841"/>
                 </a:solidFill>
-                <a:latin typeface="Arial" pitchFamily="34" charset="0"/>
+                <a:latin typeface="+mj-lt"/>
                 <a:ea typeface="Arial" pitchFamily="34" charset="-122"/>
                 <a:cs typeface="Arial" pitchFamily="34" charset="-120"/>
               </a:rPr>
               <a:t>03  </a:t>
             </a:r>
-            <a:pPr indent="0" marL="0">
-              <a:buNone/>
-            </a:pPr>
             <a:r>
-              <a:rPr lang="en-US" sz="950" b="1" dirty="0">
+              <a:rPr lang="es-SV" sz="1000" b="1" noProof="0" dirty="0">
                 <a:solidFill>
                   <a:srgbClr val="FFFFFF"/>
                 </a:solidFill>
-                <a:latin typeface="Arial" pitchFamily="34" charset="0"/>
+                <a:latin typeface="+mj-lt"/>
                 <a:ea typeface="Arial" pitchFamily="34" charset="-122"/>
                 <a:cs typeface="Arial" pitchFamily="34" charset="-120"/>
               </a:rPr>
               <a:t>PROCESO, PRODUCTOS Y SERVICIOS A INCLUIR EN LA PRUEBA</a:t>
             </a:r>
-            <a:endParaRPr lang="en-US" sz="950" dirty="0"/>
+            <a:endParaRPr lang="es-SV" sz="1000" noProof="0" dirty="0">
+              <a:latin typeface="+mj-lt"/>
+            </a:endParaRPr>
           </a:p>
         </p:txBody>
       </p:sp>
@@ -3125,8 +4038,8 @@
         </p:nvSpPr>
         <p:spPr>
           <a:xfrm>
-            <a:off x="4389120" y="5340096"/>
-            <a:ext cx="2021738" cy="969264"/>
+            <a:off x="640080" y="5779007"/>
+            <a:ext cx="3319272" cy="804672"/>
           </a:xfrm>
           <a:prstGeom prst="rect">
             <a:avLst/>
@@ -3138,18 +4051,21 @@
           <a:bodyPr wrap="square" lIns="0" tIns="0" rIns="0" bIns="0" rtlCol="0" anchor="t"/>
           <a:lstStyle/>
           <a:p>
-            <a:pPr indent="0" marL="0">
+            <a:pPr marL="0" indent="0">
               <a:buNone/>
             </a:pPr>
             <a:r>
-              <a:rPr lang="en-US" sz="950" dirty="0">
+              <a:rPr lang="es-SV" sz="1000" noProof="0" dirty="0">
                 <a:solidFill>
                   <a:srgbClr val="E8EEF6"/>
                 </a:solidFill>
+                <a:latin typeface="+mj-lt"/>
               </a:rPr>
               <a:t>Conectividad de la Agencia, acceso a sistemas y servicios de comunicación internos y externos.</a:t>
             </a:r>
-            <a:endParaRPr lang="en-US" sz="950" dirty="0"/>
+            <a:endParaRPr lang="es-SV" sz="1000" noProof="0" dirty="0">
+              <a:latin typeface="+mj-lt"/>
+            </a:endParaRPr>
           </a:p>
         </p:txBody>
       </p:sp>
@@ -3161,8 +4077,8 @@
         </p:nvSpPr>
         <p:spPr>
           <a:xfrm>
-            <a:off x="6776618" y="4681728"/>
-            <a:ext cx="2387498" cy="1719072"/>
+            <a:off x="4334256" y="5120640"/>
+            <a:ext cx="3685032" cy="1554480"/>
           </a:xfrm>
           <a:prstGeom prst="roundRect">
             <a:avLst>
@@ -3179,13 +4095,22 @@
             <a:prstDash val="solid"/>
           </a:ln>
           <a:effectLst>
-            <a:outerShdw sx="100000" sy="100000" kx="0" ky="0" algn="bl" rotWithShape="0" blurRad="76200" dist="19050" dir="5400000">
+            <a:outerShdw blurRad="76200" dist="19050" dir="5400000" algn="bl" rotWithShape="0">
               <a:srgbClr val="000000">
                 <a:alpha val="35000"/>
               </a:srgbClr>
             </a:outerShdw>
           </a:effectLst>
         </p:spPr>
+        <p:txBody>
+          <a:bodyPr/>
+          <a:lstStyle/>
+          <a:p>
+            <a:endParaRPr lang="es-SV" sz="2000" noProof="0" dirty="0">
+              <a:latin typeface="+mj-lt"/>
+            </a:endParaRPr>
+          </a:p>
+        </p:txBody>
       </p:sp>
       <p:sp>
         <p:nvSpPr>
@@ -3195,8 +4120,8 @@
         </p:nvSpPr>
         <p:spPr>
           <a:xfrm>
-            <a:off x="6941210" y="4846320"/>
-            <a:ext cx="365760" cy="365760"/>
+            <a:off x="4498848" y="5285231"/>
+            <a:ext cx="384048" cy="384048"/>
           </a:xfrm>
           <a:prstGeom prst="ellipse">
             <a:avLst/>
@@ -3211,25 +4136,34 @@
             <a:prstDash val="solid"/>
           </a:ln>
         </p:spPr>
+        <p:txBody>
+          <a:bodyPr/>
+          <a:lstStyle/>
+          <a:p>
+            <a:endParaRPr lang="es-SV" sz="2000" noProof="0" dirty="0">
+              <a:latin typeface="+mj-lt"/>
+            </a:endParaRPr>
+          </a:p>
+        </p:txBody>
       </p:sp>
       <p:pic>
         <p:nvPicPr>
-          <p:cNvPr id="67" name="Image 11" descr="preencoded.png">    </p:cNvPr>
+          <p:cNvPr id="67" name="Image 11" descr="preencoded.png"/>
           <p:cNvPicPr>
             <a:picLocks noChangeAspect="1"/>
           </p:cNvPicPr>
           <p:nvPr/>
         </p:nvPicPr>
         <p:blipFill>
-          <a:blip r:embed="rId12"/>
+          <a:blip r:embed="rId8"/>
           <a:stretch>
             <a:fillRect/>
           </a:stretch>
         </p:blipFill>
         <p:spPr>
           <a:xfrm>
-            <a:off x="7036308" y="4941418"/>
-            <a:ext cx="175565" cy="175565"/>
+            <a:off x="4599432" y="5385816"/>
+            <a:ext cx="182880" cy="182880"/>
           </a:xfrm>
           <a:prstGeom prst="rect">
             <a:avLst/>
@@ -3244,8 +4178,8 @@
         </p:nvSpPr>
         <p:spPr>
           <a:xfrm>
-            <a:off x="7398410" y="4809744"/>
-            <a:ext cx="1610258" cy="438912"/>
+            <a:off x="4992624" y="5248655"/>
+            <a:ext cx="2843784" cy="457200"/>
           </a:xfrm>
           <a:prstGeom prst="rect">
             <a:avLst/>
@@ -3257,35 +4191,34 @@
           <a:bodyPr wrap="square" lIns="0" tIns="0" rIns="0" bIns="0" rtlCol="0" anchor="ctr"/>
           <a:lstStyle/>
           <a:p>
-            <a:pPr indent="0" marL="0">
+            <a:pPr marL="0" indent="0">
               <a:buNone/>
             </a:pPr>
             <a:r>
-              <a:rPr lang="en-US" sz="950" b="1" dirty="0">
+              <a:rPr lang="es-SV" sz="1000" b="1" noProof="0" dirty="0">
                 <a:solidFill>
                   <a:srgbClr val="F5B841"/>
                 </a:solidFill>
-                <a:latin typeface="Arial" pitchFamily="34" charset="0"/>
+                <a:latin typeface="+mj-lt"/>
                 <a:ea typeface="Arial" pitchFamily="34" charset="-122"/>
                 <a:cs typeface="Arial" pitchFamily="34" charset="-120"/>
               </a:rPr>
               <a:t>06  </a:t>
             </a:r>
-            <a:pPr indent="0" marL="0">
-              <a:buNone/>
-            </a:pPr>
             <a:r>
-              <a:rPr lang="en-US" sz="950" b="1" dirty="0">
+              <a:rPr lang="es-SV" sz="1000" b="1" noProof="0" dirty="0">
                 <a:solidFill>
                   <a:srgbClr val="FFFFFF"/>
                 </a:solidFill>
-                <a:latin typeface="Arial" pitchFamily="34" charset="0"/>
+                <a:latin typeface="+mj-lt"/>
                 <a:ea typeface="Arial" pitchFamily="34" charset="-122"/>
                 <a:cs typeface="Arial" pitchFamily="34" charset="-120"/>
               </a:rPr>
               <a:t>CONDICIONES PARA CANCELAR LA PRUEBA</a:t>
             </a:r>
-            <a:endParaRPr lang="en-US" sz="950" dirty="0"/>
+            <a:endParaRPr lang="es-SV" sz="1000" noProof="0" dirty="0">
+              <a:latin typeface="+mj-lt"/>
+            </a:endParaRPr>
           </a:p>
         </p:txBody>
       </p:sp>
@@ -3297,8 +4230,8 @@
         </p:nvSpPr>
         <p:spPr>
           <a:xfrm>
-            <a:off x="6959498" y="5340096"/>
-            <a:ext cx="2021738" cy="969264"/>
+            <a:off x="4517136" y="5779007"/>
+            <a:ext cx="3319272" cy="804672"/>
           </a:xfrm>
           <a:prstGeom prst="rect">
             <a:avLst/>
@@ -3310,18 +4243,21 @@
           <a:bodyPr wrap="square" lIns="0" tIns="0" rIns="0" bIns="0" rtlCol="0" anchor="t"/>
           <a:lstStyle/>
           <a:p>
-            <a:pPr indent="0" marL="0">
+            <a:pPr marL="0" indent="0">
               <a:buNone/>
             </a:pPr>
             <a:r>
-              <a:rPr lang="en-US" sz="950" dirty="0">
+              <a:rPr lang="es-SV" sz="1000" noProof="0" dirty="0">
                 <a:solidFill>
                   <a:srgbClr val="E8EEF6"/>
                 </a:solidFill>
+                <a:latin typeface="+mj-lt"/>
               </a:rPr>
               <a:t>Que las afectaciones a la operación normal sean significativas.</a:t>
             </a:r>
-            <a:endParaRPr lang="en-US" sz="950" dirty="0"/>
+            <a:endParaRPr lang="es-SV" sz="1000" noProof="0" dirty="0">
+              <a:latin typeface="+mj-lt"/>
+            </a:endParaRPr>
           </a:p>
         </p:txBody>
       </p:sp>
@@ -3333,8 +4269,8 @@
         </p:nvSpPr>
         <p:spPr>
           <a:xfrm>
-            <a:off x="9346997" y="4681728"/>
-            <a:ext cx="2387498" cy="1719072"/>
+            <a:off x="8211312" y="5120640"/>
+            <a:ext cx="3685032" cy="1554480"/>
           </a:xfrm>
           <a:prstGeom prst="roundRect">
             <a:avLst>
@@ -3351,13 +4287,22 @@
             <a:prstDash val="solid"/>
           </a:ln>
           <a:effectLst>
-            <a:outerShdw sx="100000" sy="100000" kx="0" ky="0" algn="bl" rotWithShape="0" blurRad="76200" dist="19050" dir="5400000">
+            <a:outerShdw blurRad="76200" dist="19050" dir="5400000" algn="bl" rotWithShape="0">
               <a:srgbClr val="000000">
                 <a:alpha val="35000"/>
               </a:srgbClr>
             </a:outerShdw>
           </a:effectLst>
         </p:spPr>
+        <p:txBody>
+          <a:bodyPr/>
+          <a:lstStyle/>
+          <a:p>
+            <a:endParaRPr lang="es-SV" sz="2000" noProof="0" dirty="0">
+              <a:latin typeface="+mj-lt"/>
+            </a:endParaRPr>
+          </a:p>
+        </p:txBody>
       </p:sp>
       <p:sp>
         <p:nvSpPr>
@@ -3367,8 +4312,8 @@
         </p:nvSpPr>
         <p:spPr>
           <a:xfrm>
-            <a:off x="9511589" y="4846320"/>
-            <a:ext cx="365760" cy="365760"/>
+            <a:off x="8375904" y="5285231"/>
+            <a:ext cx="384048" cy="384048"/>
           </a:xfrm>
           <a:prstGeom prst="ellipse">
             <a:avLst/>
@@ -3383,25 +4328,34 @@
             <a:prstDash val="solid"/>
           </a:ln>
         </p:spPr>
+        <p:txBody>
+          <a:bodyPr/>
+          <a:lstStyle/>
+          <a:p>
+            <a:endParaRPr lang="es-SV" sz="2000" noProof="0" dirty="0">
+              <a:latin typeface="+mj-lt"/>
+            </a:endParaRPr>
+          </a:p>
+        </p:txBody>
       </p:sp>
       <p:pic>
         <p:nvPicPr>
-          <p:cNvPr id="72" name="Image 12" descr="preencoded.png">    </p:cNvPr>
+          <p:cNvPr id="72" name="Image 12" descr="preencoded.png"/>
           <p:cNvPicPr>
             <a:picLocks noChangeAspect="1"/>
           </p:cNvPicPr>
           <p:nvPr/>
         </p:nvPicPr>
         <p:blipFill>
-          <a:blip r:embed="rId13"/>
+          <a:blip r:embed="rId9"/>
           <a:stretch>
             <a:fillRect/>
           </a:stretch>
         </p:blipFill>
         <p:spPr>
           <a:xfrm>
-            <a:off x="9606686" y="4941418"/>
-            <a:ext cx="175565" cy="175565"/>
+            <a:off x="8476488" y="5385816"/>
+            <a:ext cx="182880" cy="182880"/>
           </a:xfrm>
           <a:prstGeom prst="rect">
             <a:avLst/>
@@ -3416,8 +4370,8 @@
         </p:nvSpPr>
         <p:spPr>
           <a:xfrm>
-            <a:off x="9968789" y="4809744"/>
-            <a:ext cx="1610258" cy="438912"/>
+            <a:off x="8869680" y="5248655"/>
+            <a:ext cx="2843784" cy="457200"/>
           </a:xfrm>
           <a:prstGeom prst="rect">
             <a:avLst/>
@@ -3429,35 +4383,34 @@
           <a:bodyPr wrap="square" lIns="0" tIns="0" rIns="0" bIns="0" rtlCol="0" anchor="ctr"/>
           <a:lstStyle/>
           <a:p>
-            <a:pPr indent="0" marL="0">
+            <a:pPr marL="0" indent="0">
               <a:buNone/>
             </a:pPr>
             <a:r>
-              <a:rPr lang="en-US" sz="950" b="1" dirty="0">
+              <a:rPr lang="es-SV" sz="1000" b="1" noProof="0" dirty="0">
                 <a:solidFill>
                   <a:srgbClr val="F5B841"/>
                 </a:solidFill>
-                <a:latin typeface="Arial" pitchFamily="34" charset="0"/>
+                <a:latin typeface="+mj-lt"/>
                 <a:ea typeface="Arial" pitchFamily="34" charset="-122"/>
                 <a:cs typeface="Arial" pitchFamily="34" charset="-120"/>
               </a:rPr>
               <a:t>07  </a:t>
             </a:r>
-            <a:pPr indent="0" marL="0">
-              <a:buNone/>
-            </a:pPr>
             <a:r>
-              <a:rPr lang="en-US" sz="950" b="1" dirty="0">
+              <a:rPr lang="es-SV" sz="1000" b="1" noProof="0" dirty="0">
                 <a:solidFill>
                   <a:srgbClr val="FFFFFF"/>
                 </a:solidFill>
-                <a:latin typeface="Arial" pitchFamily="34" charset="0"/>
+                <a:latin typeface="+mj-lt"/>
                 <a:ea typeface="Arial" pitchFamily="34" charset="-122"/>
                 <a:cs typeface="Arial" pitchFamily="34" charset="-120"/>
               </a:rPr>
               <a:t>RESULTADOS ESPERADOS</a:t>
             </a:r>
-            <a:endParaRPr lang="en-US" sz="950" dirty="0"/>
+            <a:endParaRPr lang="es-SV" sz="1000" noProof="0" dirty="0">
+              <a:latin typeface="+mj-lt"/>
+            </a:endParaRPr>
           </a:p>
         </p:txBody>
       </p:sp>
@@ -3469,8 +4422,8 @@
         </p:nvSpPr>
         <p:spPr>
           <a:xfrm>
-            <a:off x="9529877" y="5340096"/>
-            <a:ext cx="2021738" cy="969264"/>
+            <a:off x="8394192" y="5779007"/>
+            <a:ext cx="3319272" cy="804672"/>
           </a:xfrm>
           <a:prstGeom prst="rect">
             <a:avLst/>
@@ -3482,18 +4435,126 @@
           <a:bodyPr wrap="square" lIns="0" tIns="0" rIns="0" bIns="0" rtlCol="0" anchor="t"/>
           <a:lstStyle/>
           <a:p>
-            <a:pPr indent="0" marL="0">
+            <a:pPr marL="0" indent="0">
               <a:buNone/>
             </a:pPr>
             <a:r>
-              <a:rPr lang="en-US" sz="950" dirty="0">
+              <a:rPr lang="es-SV" sz="1000" noProof="0" dirty="0">
                 <a:solidFill>
                   <a:srgbClr val="E8EEF6"/>
                 </a:solidFill>
+                <a:latin typeface="+mj-lt"/>
               </a:rPr>
               <a:t>Validar la capacidad del proveedor para responder y recuperar los servicios de comunicación dentro de los tiempos establecidos, garantizando la continuidad de los procesos críticos y la efectividad de los mecanismos alternos definidos por COMEDICA.</a:t>
             </a:r>
-            <a:endParaRPr lang="en-US" sz="950" dirty="0"/>
+            <a:endParaRPr lang="es-SV" sz="1000" noProof="0" dirty="0">
+              <a:latin typeface="+mj-lt"/>
+            </a:endParaRPr>
+          </a:p>
+        </p:txBody>
+      </p:sp>
+      <p:sp>
+        <p:nvSpPr>
+          <p:cNvPr id="2" name="Text 0"/>
+          <p:cNvSpPr txBox="1"/>
+          <p:nvPr/>
+        </p:nvSpPr>
+        <p:spPr>
+          <a:xfrm>
+            <a:off x="514952" y="273211"/>
+            <a:ext cx="7074568" cy="167494"/>
+          </a:xfrm>
+          <a:prstGeom prst="rect">
+            <a:avLst/>
+          </a:prstGeom>
+          <a:noFill/>
+          <a:ln/>
+        </p:spPr>
+        <p:txBody>
+          <a:bodyPr wrap="square" lIns="0" tIns="0" rIns="0" bIns="0" rtlCol="0" anchor="t"/>
+          <a:lstStyle/>
+          <a:p>
+            <a:pPr marL="0" indent="0">
+              <a:buNone/>
+            </a:pPr>
+            <a:r>
+              <a:rPr lang="es-SV" sz="1050" noProof="0" dirty="0">
+                <a:solidFill>
+                  <a:srgbClr val="002060"/>
+                </a:solidFill>
+              </a:rPr>
+              <a:t>Evaluación de Continuidad y Desempeño del Proveedor Crítico de Comunicaciones ante Interrupción Simulada de Conectividad</a:t>
+            </a:r>
+            <a:endParaRPr lang="es-SV" sz="1500" noProof="0" dirty="0">
+              <a:solidFill>
+                <a:srgbClr val="002060"/>
+              </a:solidFill>
+            </a:endParaRPr>
+          </a:p>
+        </p:txBody>
+      </p:sp>
+      <p:sp>
+        <p:nvSpPr>
+          <p:cNvPr id="53" name="Freeform 11">
+            <a:extLst>
+              <a:ext uri="{FF2B5EF4-FFF2-40B4-BE49-F238E27FC236}">
+                <a16:creationId xmlns:a16="http://schemas.microsoft.com/office/drawing/2014/main" id="{75E927EE-8E7A-544A-FC27-B58EC66527C6}"/>
+              </a:ext>
+            </a:extLst>
+          </p:cNvPr>
+          <p:cNvSpPr/>
+          <p:nvPr/>
+        </p:nvSpPr>
+        <p:spPr>
+          <a:xfrm>
+            <a:off x="10138847" y="-99476"/>
+            <a:ext cx="1759347" cy="1219616"/>
+          </a:xfrm>
+          <a:custGeom>
+            <a:avLst/>
+            <a:gdLst/>
+            <a:ahLst/>
+            <a:cxnLst/>
+            <a:rect l="l" t="t" r="r" b="b"/>
+            <a:pathLst>
+              <a:path w="5067635" h="3714752">
+                <a:moveTo>
+                  <a:pt x="0" y="0"/>
+                </a:moveTo>
+                <a:lnTo>
+                  <a:pt x="5067636" y="0"/>
+                </a:lnTo>
+                <a:lnTo>
+                  <a:pt x="5067636" y="3714751"/>
+                </a:lnTo>
+                <a:lnTo>
+                  <a:pt x="0" y="3714751"/>
+                </a:lnTo>
+                <a:lnTo>
+                  <a:pt x="0" y="0"/>
+                </a:lnTo>
+                <a:close/>
+              </a:path>
+            </a:pathLst>
+          </a:custGeom>
+          <a:blipFill>
+            <a:blip r:embed="rId10"/>
+            <a:stretch>
+              <a:fillRect/>
+            </a:stretch>
+          </a:blipFill>
+        </p:spPr>
+        <p:txBody>
+          <a:bodyPr/>
+          <a:lstStyle/>
+          <a:p>
+            <a:endParaRPr lang="es-SV" sz="1200" noProof="0" dirty="0">
+              <a:solidFill>
+                <a:srgbClr val="002060"/>
+              </a:solidFill>
+              <a:latin typeface="Arial" panose="020B0604020202020204" pitchFamily="34" charset="0"/>
+              <a:cs typeface="Arial" panose="020B0604020202020204" pitchFamily="34" charset="0"/>
+            </a:endParaRPr>
           </a:p>
         </p:txBody>
       </p:sp>
@@ -3505,14 +4566,15 @@
 </p:sld>
 </file>
 
-<file path=ppt/slides/slide2.xml><?xml version="1.0" encoding="utf-8"?>
+<file path=ppt/slides/slide3.xml><?xml version="1.0" encoding="utf-8"?>
 <p:sld xmlns:a="http://schemas.openxmlformats.org/drawingml/2006/main" xmlns:r="http://schemas.openxmlformats.org/officeDocument/2006/relationships" xmlns:p="http://schemas.openxmlformats.org/presentationml/2006/main">
   <p:cSld name="Slide 2">
     <p:bg>
       <p:bgPr>
         <a:solidFill>
-          <a:srgbClr val="0B1220"/>
+          <a:schemeClr val="bg1"/>
         </a:solidFill>
+        <a:effectLst/>
       </p:bgPr>
     </p:bg>
     <p:spTree>
@@ -3537,8 +4599,8 @@
         </p:nvSpPr>
         <p:spPr>
           <a:xfrm>
-            <a:off x="457200" y="274320"/>
-            <a:ext cx="10515600" cy="548640"/>
+            <a:off x="514952" y="273211"/>
+            <a:ext cx="7074568" cy="167494"/>
           </a:xfrm>
           <a:prstGeom prst="rect">
             <a:avLst/>
@@ -3550,97 +4612,35 @@
           <a:bodyPr wrap="square" lIns="0" tIns="0" rIns="0" bIns="0" rtlCol="0" anchor="t"/>
           <a:lstStyle/>
           <a:p>
-            <a:pPr indent="0" marL="0">
+            <a:pPr marL="0" indent="0">
               <a:buNone/>
             </a:pPr>
             <a:r>
-              <a:rPr lang="en-US" sz="1500" b="1" dirty="0">
+              <a:rPr lang="es-SV" sz="1050" noProof="0" dirty="0">
                 <a:solidFill>
-                  <a:srgbClr val="FFFFFF"/>
-                </a:solidFill>
-                <a:latin typeface="Arial" pitchFamily="34" charset="0"/>
-                <a:ea typeface="Arial" pitchFamily="34" charset="-122"/>
-                <a:cs typeface="Arial" pitchFamily="34" charset="-120"/>
-              </a:rPr>
-              <a:t>FORMULARIO GUIÓN DE PRUEBAS DE CONTINUIDAD DEL NEGOCIO</a:t>
-            </a:r>
-            <a:endParaRPr lang="en-US" sz="1500" dirty="0"/>
-          </a:p>
-          <a:p>
-            <a:pPr indent="0" marL="0">
-              <a:buNone/>
-            </a:pPr>
-            <a:r>
-              <a:rPr lang="en-US" sz="1050" dirty="0">
-                <a:solidFill>
-                  <a:srgbClr val="5CC8F0"/>
+                  <a:srgbClr val="002060"/>
                 </a:solidFill>
               </a:rPr>
               <a:t>Evaluación de Continuidad y Desempeño del Proveedor Crítico de Comunicaciones ante Interrupción Simulada de Conectividad</a:t>
             </a:r>
-            <a:endParaRPr lang="en-US" sz="1500" dirty="0"/>
+            <a:endParaRPr lang="es-SV" sz="1500" noProof="0" dirty="0">
+              <a:solidFill>
+                <a:srgbClr val="002060"/>
+              </a:solidFill>
+            </a:endParaRPr>
           </a:p>
         </p:txBody>
       </p:sp>
       <p:sp>
         <p:nvSpPr>
-          <p:cNvPr id="3" name="Shape 1"/>
+          <p:cNvPr id="5" name="Shape 2"/>
           <p:cNvSpPr/>
           <p:nvPr/>
         </p:nvSpPr>
         <p:spPr>
           <a:xfrm>
-            <a:off x="11201400" y="274320"/>
-            <a:ext cx="530352" cy="530352"/>
-          </a:xfrm>
-          <a:prstGeom prst="ellipse">
-            <a:avLst/>
-          </a:prstGeom>
-          <a:solidFill>
-            <a:srgbClr val="F5B841"/>
-          </a:solidFill>
-          <a:ln w="12700">
-            <a:solidFill>
-              <a:srgbClr val="F5B841"/>
-            </a:solidFill>
-            <a:prstDash val="solid"/>
-          </a:ln>
-        </p:spPr>
-      </p:sp>
-      <p:pic>
-        <p:nvPicPr>
-          <p:cNvPr id="4" name="Image 0" descr="preencoded.png">    </p:cNvPr>
-          <p:cNvPicPr>
-            <a:picLocks noChangeAspect="1"/>
-          </p:cNvPicPr>
-          <p:nvPr/>
-        </p:nvPicPr>
-        <p:blipFill>
-          <a:blip r:embed="rId1"/>
-          <a:stretch>
-            <a:fillRect/>
-          </a:stretch>
-        </p:blipFill>
-        <p:spPr>
-          <a:xfrm>
-            <a:off x="11339292" y="412212"/>
-            <a:ext cx="254569" cy="254569"/>
-          </a:xfrm>
-          <a:prstGeom prst="rect">
-            <a:avLst/>
-          </a:prstGeom>
-        </p:spPr>
-      </p:pic>
-      <p:sp>
-        <p:nvSpPr>
-          <p:cNvPr id="5" name="Shape 2"/>
-          <p:cNvSpPr/>
-          <p:nvPr/>
-        </p:nvSpPr>
-        <p:spPr>
-          <a:xfrm>
             <a:off x="457200" y="960120"/>
-            <a:ext cx="7269480" cy="2971800"/>
+            <a:ext cx="11440994" cy="3089576"/>
           </a:xfrm>
           <a:prstGeom prst="roundRect">
             <a:avLst>
@@ -3657,13 +4657,20 @@
             <a:prstDash val="solid"/>
           </a:ln>
           <a:effectLst>
-            <a:outerShdw sx="100000" sy="100000" kx="0" ky="0" algn="bl" rotWithShape="0" blurRad="76200" dist="19050" dir="5400000">
+            <a:outerShdw blurRad="76200" dist="19050" dir="5400000" algn="bl" rotWithShape="0">
               <a:srgbClr val="000000">
                 <a:alpha val="35000"/>
               </a:srgbClr>
             </a:outerShdw>
           </a:effectLst>
         </p:spPr>
+        <p:txBody>
+          <a:bodyPr/>
+          <a:lstStyle/>
+          <a:p>
+            <a:endParaRPr lang="es-SV" noProof="0" dirty="0"/>
+          </a:p>
+        </p:txBody>
       </p:sp>
       <p:sp>
         <p:nvSpPr>
@@ -3673,7 +4680,7 @@
         </p:nvSpPr>
         <p:spPr>
           <a:xfrm>
-            <a:off x="621792" y="1097280"/>
+            <a:off x="3332908" y="562356"/>
             <a:ext cx="347472" cy="347472"/>
           </a:xfrm>
           <a:prstGeom prst="ellipse">
@@ -3689,24 +4696,31 @@
             <a:prstDash val="solid"/>
           </a:ln>
         </p:spPr>
+        <p:txBody>
+          <a:bodyPr/>
+          <a:lstStyle/>
+          <a:p>
+            <a:endParaRPr lang="es-SV" noProof="0" dirty="0"/>
+          </a:p>
+        </p:txBody>
       </p:sp>
       <p:pic>
         <p:nvPicPr>
-          <p:cNvPr id="7" name="Image 1" descr="preencoded.png">    </p:cNvPr>
+          <p:cNvPr id="7" name="Image 1" descr="preencoded.png"/>
           <p:cNvPicPr>
             <a:picLocks noChangeAspect="1"/>
           </p:cNvPicPr>
           <p:nvPr/>
         </p:nvPicPr>
         <p:blipFill>
-          <a:blip r:embed="rId2"/>
+          <a:blip r:embed="rId3"/>
           <a:stretch>
             <a:fillRect/>
           </a:stretch>
         </p:blipFill>
         <p:spPr>
           <a:xfrm>
-            <a:off x="712135" y="1187623"/>
+            <a:off x="3423250" y="649225"/>
             <a:ext cx="166787" cy="166787"/>
           </a:xfrm>
           <a:prstGeom prst="rect">
@@ -3722,8 +4736,8 @@
         </p:nvSpPr>
         <p:spPr>
           <a:xfrm>
-            <a:off x="1060704" y="1097280"/>
-            <a:ext cx="6492240" cy="347472"/>
+            <a:off x="547543" y="627032"/>
+            <a:ext cx="2649748" cy="232503"/>
           </a:xfrm>
           <a:prstGeom prst="rect">
             <a:avLst/>
@@ -3735,76 +4749,84 @@
           <a:bodyPr wrap="square" lIns="0" tIns="0" rIns="0" bIns="0" rtlCol="0" anchor="ctr"/>
           <a:lstStyle/>
           <a:p>
-            <a:pPr indent="0" marL="0">
+            <a:pPr marL="0" indent="0">
               <a:buNone/>
             </a:pPr>
             <a:r>
-              <a:rPr lang="en-US" sz="1100" b="1" dirty="0">
+              <a:rPr lang="es-SV" sz="1100" b="1" noProof="0" dirty="0">
                 <a:solidFill>
-                  <a:srgbClr val="F5B841"/>
+                  <a:srgbClr val="002060"/>
                 </a:solidFill>
                 <a:latin typeface="Arial" pitchFamily="34" charset="0"/>
                 <a:ea typeface="Arial" pitchFamily="34" charset="-122"/>
                 <a:cs typeface="Arial" pitchFamily="34" charset="-120"/>
               </a:rPr>
-              <a:t>08  </a:t>
+              <a:t>08  PARTICIPANTES DE LAS PRUEBAS</a:t>
             </a:r>
-            <a:pPr indent="0" marL="0">
-              <a:buNone/>
-            </a:pPr>
-            <a:r>
-              <a:rPr lang="en-US" sz="1100" b="1" dirty="0">
-                <a:solidFill>
-                  <a:srgbClr val="FFFFFF"/>
-                </a:solidFill>
-                <a:latin typeface="Arial" pitchFamily="34" charset="0"/>
-                <a:ea typeface="Arial" pitchFamily="34" charset="-122"/>
-                <a:cs typeface="Arial" pitchFamily="34" charset="-120"/>
-              </a:rPr>
-              <a:t>PARTICIPANTES DE LAS PRUEBAS</a:t>
-            </a:r>
-            <a:endParaRPr lang="en-US" sz="1100" dirty="0"/>
+            <a:endParaRPr lang="es-SV" sz="1100" noProof="0" dirty="0">
+              <a:solidFill>
+                <a:srgbClr val="002060"/>
+              </a:solidFill>
+            </a:endParaRPr>
           </a:p>
         </p:txBody>
       </p:sp>
       <p:graphicFrame>
         <p:nvGraphicFramePr>
-          <p:cNvPr id="3" name="Table 0"/>
+          <p:cNvPr id="9" name="Table 0"/>
           <p:cNvGraphicFramePr>
             <a:graphicFrameLocks noGrp="1"/>
           </p:cNvGraphicFramePr>
           <p:nvPr>
             <p:extLst>
               <p:ext uri="{D42A27DB-BD31-4B8C-83A1-F6EECF244321}">
-                <p14:modId xmlns:p14="http://schemas.microsoft.com/office/powerpoint/2010/main" val="1579011935"/>
+                <p14:modId xmlns:p14="http://schemas.microsoft.com/office/powerpoint/2010/main" val="1339731497"/>
               </p:ext>
             </p:extLst>
           </p:nvPr>
         </p:nvGraphicFramePr>
         <p:xfrm>
-          <a:off x="621792" y="1444752"/>
-          <a:ext cx="6949440" cy="914400"/>
+          <a:off x="621791" y="1090332"/>
+          <a:ext cx="11112703" cy="2869018"/>
         </p:xfrm>
         <a:graphic>
           <a:graphicData uri="http://schemas.openxmlformats.org/drawingml/2006/table">
             <a:tbl>
               <a:tblPr/>
               <a:tblGrid>
-                <a:gridCol w="1737360"/>
-                <a:gridCol w="1097280"/>
-                <a:gridCol w="4114800"/>
+                <a:gridCol w="2778176">
+                  <a:extLst>
+                    <a:ext uri="{9D8B030D-6E8A-4147-A177-3AD203B41FA5}">
+                      <a16:colId xmlns:a16="http://schemas.microsoft.com/office/drawing/2014/main" val="20000"/>
+                    </a:ext>
+                  </a:extLst>
+                </a:gridCol>
+                <a:gridCol w="1754637">
+                  <a:extLst>
+                    <a:ext uri="{9D8B030D-6E8A-4147-A177-3AD203B41FA5}">
+                      <a16:colId xmlns:a16="http://schemas.microsoft.com/office/drawing/2014/main" val="20001"/>
+                    </a:ext>
+                  </a:extLst>
+                </a:gridCol>
+                <a:gridCol w="6579890">
+                  <a:extLst>
+                    <a:ext uri="{9D8B030D-6E8A-4147-A177-3AD203B41FA5}">
+                      <a16:colId xmlns:a16="http://schemas.microsoft.com/office/drawing/2014/main" val="20002"/>
+                    </a:ext>
+                  </a:extLst>
+                </a:gridCol>
               </a:tblGrid>
-              <a:tr h="0">
+              <a:tr h="250832">
                 <a:tc>
                   <a:txBody>
                     <a:bodyPr/>
                     <a:lstStyle/>
                     <a:p>
-                      <a:pPr indent="0" marL="0">
+                      <a:pPr marL="0" indent="0">
                         <a:buNone/>
                       </a:pPr>
                       <a:r>
-                        <a:rPr lang="en-US" sz="850" b="1" dirty="0">
+                        <a:rPr lang="es-SV" sz="850" b="1" noProof="0" dirty="0">
                           <a:solidFill>
                             <a:srgbClr val="F5B841"/>
                           </a:solidFill>
@@ -3814,7 +4836,7 @@
                         </a:rPr>
                         <a:t>CARGO</a:t>
                       </a:r>
-                      <a:endParaRPr lang="en-US" sz="850" dirty="0">
+                      <a:endParaRPr lang="es-SV" sz="850" noProof="0" dirty="0">
                         <a:latin typeface="Calibri" charset="0"/>
                         <a:ea typeface="Calibri" charset="0"/>
                         <a:cs typeface="Calibri" charset="0"/>
@@ -3868,11 +4890,11 @@
                     <a:bodyPr/>
                     <a:lstStyle/>
                     <a:p>
-                      <a:pPr indent="0" marL="0">
+                      <a:pPr marL="0" indent="0">
                         <a:buNone/>
                       </a:pPr>
                       <a:r>
-                        <a:rPr lang="en-US" sz="850" b="1" dirty="0">
+                        <a:rPr lang="es-SV" sz="850" b="1" noProof="0" dirty="0">
                           <a:solidFill>
                             <a:srgbClr val="F5B841"/>
                           </a:solidFill>
@@ -3882,7 +4904,7 @@
                         </a:rPr>
                         <a:t>UBICACIÓN</a:t>
                       </a:r>
-                      <a:endParaRPr lang="en-US" sz="850" dirty="0">
+                      <a:endParaRPr lang="es-SV" sz="850" noProof="0" dirty="0">
                         <a:latin typeface="Calibri" charset="0"/>
                         <a:ea typeface="Calibri" charset="0"/>
                         <a:cs typeface="Calibri" charset="0"/>
@@ -3936,11 +4958,11 @@
                     <a:bodyPr/>
                     <a:lstStyle/>
                     <a:p>
-                      <a:pPr indent="0" marL="0">
+                      <a:pPr marL="0" indent="0">
                         <a:buNone/>
                       </a:pPr>
                       <a:r>
-                        <a:rPr lang="en-US" sz="850" b="1" dirty="0">
+                        <a:rPr lang="es-SV" sz="850" b="1" noProof="0" dirty="0">
                           <a:solidFill>
                             <a:srgbClr val="F5B841"/>
                           </a:solidFill>
@@ -3950,7 +4972,7 @@
                         </a:rPr>
                         <a:t>ROL</a:t>
                       </a:r>
-                      <a:endParaRPr lang="en-US" sz="850" dirty="0">
+                      <a:endParaRPr lang="es-SV" sz="850" noProof="0" dirty="0">
                         <a:latin typeface="Calibri" charset="0"/>
                         <a:ea typeface="Calibri" charset="0"/>
                         <a:cs typeface="Calibri" charset="0"/>
@@ -3999,29 +5021,34 @@
                     </a:solidFill>
                   </a:tcPr>
                 </a:tc>
+                <a:extLst>
+                  <a:ext uri="{0D108BD9-81ED-4DB2-BD59-A6C34878D82A}">
+                    <a16:rowId xmlns:a16="http://schemas.microsoft.com/office/drawing/2014/main" val="10000"/>
+                  </a:ext>
+                </a:extLst>
               </a:tr>
-              <a:tr h="0">
+              <a:tr h="385576">
                 <a:tc>
                   <a:txBody>
                     <a:bodyPr/>
                     <a:lstStyle/>
                     <a:p>
-                      <a:pPr indent="0" marL="0">
+                      <a:pPr marL="0" indent="0">
                         <a:buNone/>
                       </a:pPr>
                       <a:r>
-                        <a:rPr lang="en-US" sz="750" b="1" dirty="0">
+                        <a:rPr lang="es-SV" sz="900" b="1" noProof="0" dirty="0">
                           <a:solidFill>
                             <a:srgbClr val="FFFFFF"/>
                           </a:solidFill>
-                          <a:latin typeface="Calibri" pitchFamily="34" charset="0"/>
+                          <a:latin typeface="+mj-lt"/>
                           <a:ea typeface="Calibri" pitchFamily="34" charset="-122"/>
                           <a:cs typeface="Calibri" pitchFamily="34" charset="-120"/>
                         </a:rPr>
                         <a:t>Jefe de Agencia</a:t>
                       </a:r>
-                      <a:endParaRPr lang="en-US" sz="750" dirty="0">
-                        <a:latin typeface="Calibri" charset="0"/>
+                      <a:endParaRPr lang="es-SV" sz="900" noProof="0" dirty="0">
+                        <a:latin typeface="+mj-lt"/>
                         <a:ea typeface="Calibri" charset="0"/>
                         <a:cs typeface="Calibri" charset="0"/>
                       </a:endParaRPr>
@@ -4074,22 +5101,22 @@
                     <a:bodyPr/>
                     <a:lstStyle/>
                     <a:p>
-                      <a:pPr indent="0" marL="0">
+                      <a:pPr marL="0" indent="0">
                         <a:buNone/>
                       </a:pPr>
                       <a:r>
-                        <a:rPr lang="en-US" sz="750" dirty="0">
+                        <a:rPr lang="es-SV" sz="900" noProof="0" dirty="0">
                           <a:solidFill>
                             <a:srgbClr val="5CC8F0"/>
                           </a:solidFill>
-                          <a:latin typeface="Calibri" pitchFamily="34" charset="0"/>
+                          <a:latin typeface="+mj-lt"/>
                           <a:ea typeface="Calibri" pitchFamily="34" charset="-122"/>
                           <a:cs typeface="Calibri" pitchFamily="34" charset="-120"/>
                         </a:rPr>
                         <a:t>Agencia Plaza Mundo</a:t>
                       </a:r>
-                      <a:endParaRPr lang="en-US" sz="750" dirty="0">
-                        <a:latin typeface="Calibri" charset="0"/>
+                      <a:endParaRPr lang="es-SV" sz="900" noProof="0" dirty="0">
+                        <a:latin typeface="+mj-lt"/>
                         <a:ea typeface="Calibri" charset="0"/>
                         <a:cs typeface="Calibri" charset="0"/>
                       </a:endParaRPr>
@@ -4142,22 +5169,22 @@
                     <a:bodyPr/>
                     <a:lstStyle/>
                     <a:p>
-                      <a:pPr indent="0" marL="0">
+                      <a:pPr marL="0" indent="0">
                         <a:buNone/>
                       </a:pPr>
                       <a:r>
-                        <a:rPr lang="en-US" sz="750" dirty="0">
+                        <a:rPr lang="es-SV" sz="900" noProof="0" dirty="0">
                           <a:solidFill>
                             <a:srgbClr val="E8EEF6"/>
                           </a:solidFill>
-                          <a:latin typeface="Calibri" pitchFamily="34" charset="0"/>
+                          <a:latin typeface="+mj-lt"/>
                           <a:ea typeface="Calibri" pitchFamily="34" charset="-122"/>
                           <a:cs typeface="Calibri" pitchFamily="34" charset="-120"/>
                         </a:rPr>
                         <a:t>Coordinar la ejecución de la prueba en la agencia, comunicar el inicio y finalización del ejercicio y verificar la continuidad de las operaciones.</a:t>
                       </a:r>
-                      <a:endParaRPr lang="en-US" sz="750" dirty="0">
-                        <a:latin typeface="Calibri" charset="0"/>
+                      <a:endParaRPr lang="es-SV" sz="900" noProof="0" dirty="0">
+                        <a:latin typeface="+mj-lt"/>
                         <a:ea typeface="Calibri" charset="0"/>
                         <a:cs typeface="Calibri" charset="0"/>
                       </a:endParaRPr>
@@ -4205,29 +5232,34 @@
                     </a:solidFill>
                   </a:tcPr>
                 </a:tc>
+                <a:extLst>
+                  <a:ext uri="{0D108BD9-81ED-4DB2-BD59-A6C34878D82A}">
+                    <a16:rowId xmlns:a16="http://schemas.microsoft.com/office/drawing/2014/main" val="10001"/>
+                  </a:ext>
+                </a:extLst>
               </a:tr>
-              <a:tr h="0">
+              <a:tr h="230102">
                 <a:tc>
                   <a:txBody>
                     <a:bodyPr/>
                     <a:lstStyle/>
                     <a:p>
-                      <a:pPr indent="0" marL="0">
+                      <a:pPr marL="0" indent="0">
                         <a:buNone/>
                       </a:pPr>
                       <a:r>
-                        <a:rPr lang="en-US" sz="750" b="1" dirty="0">
+                        <a:rPr lang="es-SV" sz="900" b="1" noProof="0" dirty="0">
                           <a:solidFill>
                             <a:srgbClr val="FFFFFF"/>
                           </a:solidFill>
-                          <a:latin typeface="Calibri" pitchFamily="34" charset="0"/>
+                          <a:latin typeface="+mj-lt"/>
                           <a:ea typeface="Calibri" pitchFamily="34" charset="-122"/>
                           <a:cs typeface="Calibri" pitchFamily="34" charset="-120"/>
                         </a:rPr>
                         <a:t>Cajero</a:t>
                       </a:r>
-                      <a:endParaRPr lang="en-US" sz="750" dirty="0">
-                        <a:latin typeface="Calibri" charset="0"/>
+                      <a:endParaRPr lang="es-SV" sz="900" noProof="0" dirty="0">
+                        <a:latin typeface="+mj-lt"/>
                         <a:ea typeface="Calibri" charset="0"/>
                         <a:cs typeface="Calibri" charset="0"/>
                       </a:endParaRPr>
@@ -4280,22 +5312,22 @@
                     <a:bodyPr/>
                     <a:lstStyle/>
                     <a:p>
-                      <a:pPr indent="0" marL="0">
+                      <a:pPr marL="0" indent="0">
                         <a:buNone/>
                       </a:pPr>
                       <a:r>
-                        <a:rPr lang="en-US" sz="750" dirty="0">
+                        <a:rPr lang="es-SV" sz="900" noProof="0" dirty="0">
                           <a:solidFill>
                             <a:srgbClr val="5CC8F0"/>
                           </a:solidFill>
-                          <a:latin typeface="Calibri" pitchFamily="34" charset="0"/>
+                          <a:latin typeface="+mj-lt"/>
                           <a:ea typeface="Calibri" pitchFamily="34" charset="-122"/>
                           <a:cs typeface="Calibri" pitchFamily="34" charset="-120"/>
                         </a:rPr>
                         <a:t>Agencia Plaza Mundo</a:t>
                       </a:r>
-                      <a:endParaRPr lang="en-US" sz="750" dirty="0">
-                        <a:latin typeface="Calibri" charset="0"/>
+                      <a:endParaRPr lang="es-SV" sz="900" noProof="0" dirty="0">
+                        <a:latin typeface="+mj-lt"/>
                         <a:ea typeface="Calibri" charset="0"/>
                         <a:cs typeface="Calibri" charset="0"/>
                       </a:endParaRPr>
@@ -4348,22 +5380,22 @@
                     <a:bodyPr/>
                     <a:lstStyle/>
                     <a:p>
-                      <a:pPr indent="0" marL="0">
+                      <a:pPr marL="0" indent="0">
                         <a:buNone/>
                       </a:pPr>
                       <a:r>
-                        <a:rPr lang="en-US" sz="750" dirty="0">
+                        <a:rPr lang="es-SV" sz="900" noProof="0" dirty="0">
                           <a:solidFill>
                             <a:srgbClr val="E8EEF6"/>
                           </a:solidFill>
-                          <a:latin typeface="Calibri" pitchFamily="34" charset="0"/>
+                          <a:latin typeface="+mj-lt"/>
                           <a:ea typeface="Calibri" pitchFamily="34" charset="-122"/>
                           <a:cs typeface="Calibri" pitchFamily="34" charset="-120"/>
                         </a:rPr>
                         <a:t>Ejecutar transacciones de prueba utilizando los procedimientos establecidos y reportar incidencias.</a:t>
                       </a:r>
-                      <a:endParaRPr lang="en-US" sz="750" dirty="0">
-                        <a:latin typeface="Calibri" charset="0"/>
+                      <a:endParaRPr lang="es-SV" sz="900" noProof="0" dirty="0">
+                        <a:latin typeface="+mj-lt"/>
                         <a:ea typeface="Calibri" charset="0"/>
                         <a:cs typeface="Calibri" charset="0"/>
                       </a:endParaRPr>
@@ -4411,29 +5443,34 @@
                     </a:solidFill>
                   </a:tcPr>
                 </a:tc>
+                <a:extLst>
+                  <a:ext uri="{0D108BD9-81ED-4DB2-BD59-A6C34878D82A}">
+                    <a16:rowId xmlns:a16="http://schemas.microsoft.com/office/drawing/2014/main" val="10002"/>
+                  </a:ext>
+                </a:extLst>
               </a:tr>
-              <a:tr h="0">
+              <a:tr h="230102">
                 <a:tc>
                   <a:txBody>
                     <a:bodyPr/>
                     <a:lstStyle/>
                     <a:p>
-                      <a:pPr indent="0" marL="0">
+                      <a:pPr marL="0" indent="0">
                         <a:buNone/>
                       </a:pPr>
                       <a:r>
-                        <a:rPr lang="en-US" sz="750" b="1" dirty="0">
+                        <a:rPr lang="es-SV" sz="900" b="1" noProof="0" dirty="0">
                           <a:solidFill>
                             <a:srgbClr val="FFFFFF"/>
                           </a:solidFill>
-                          <a:latin typeface="Calibri" pitchFamily="34" charset="0"/>
+                          <a:latin typeface="+mj-lt"/>
                           <a:ea typeface="Calibri" pitchFamily="34" charset="-122"/>
                           <a:cs typeface="Calibri" pitchFamily="34" charset="-120"/>
                         </a:rPr>
                         <a:t>Sub Gerente de Canales</a:t>
                       </a:r>
-                      <a:endParaRPr lang="en-US" sz="750" dirty="0">
-                        <a:latin typeface="Calibri" charset="0"/>
+                      <a:endParaRPr lang="es-SV" sz="900" noProof="0" dirty="0">
+                        <a:latin typeface="+mj-lt"/>
                         <a:ea typeface="Calibri" charset="0"/>
                         <a:cs typeface="Calibri" charset="0"/>
                       </a:endParaRPr>
@@ -4486,22 +5523,22 @@
                     <a:bodyPr/>
                     <a:lstStyle/>
                     <a:p>
-                      <a:pPr indent="0" marL="0">
+                      <a:pPr marL="0" indent="0">
                         <a:buNone/>
                       </a:pPr>
                       <a:r>
-                        <a:rPr lang="en-US" sz="750" dirty="0">
+                        <a:rPr lang="es-SV" sz="900" noProof="0" dirty="0">
                           <a:solidFill>
                             <a:srgbClr val="5CC8F0"/>
                           </a:solidFill>
-                          <a:latin typeface="Calibri" pitchFamily="34" charset="0"/>
+                          <a:latin typeface="+mj-lt"/>
                           <a:ea typeface="Calibri" pitchFamily="34" charset="-122"/>
                           <a:cs typeface="Calibri" pitchFamily="34" charset="-120"/>
                         </a:rPr>
                         <a:t>Centro Financiero</a:t>
                       </a:r>
-                      <a:endParaRPr lang="en-US" sz="750" dirty="0">
-                        <a:latin typeface="Calibri" charset="0"/>
+                      <a:endParaRPr lang="es-SV" sz="900" noProof="0" dirty="0">
+                        <a:latin typeface="+mj-lt"/>
                         <a:ea typeface="Calibri" charset="0"/>
                         <a:cs typeface="Calibri" charset="0"/>
                       </a:endParaRPr>
@@ -4554,22 +5591,22 @@
                     <a:bodyPr/>
                     <a:lstStyle/>
                     <a:p>
-                      <a:pPr indent="0" marL="0">
+                      <a:pPr marL="0" indent="0">
                         <a:buNone/>
                       </a:pPr>
                       <a:r>
-                        <a:rPr lang="en-US" sz="750" dirty="0">
+                        <a:rPr lang="es-SV" sz="900" noProof="0" dirty="0">
                           <a:solidFill>
                             <a:srgbClr val="E8EEF6"/>
                           </a:solidFill>
-                          <a:latin typeface="Calibri" pitchFamily="34" charset="0"/>
+                          <a:latin typeface="+mj-lt"/>
                           <a:ea typeface="Calibri" pitchFamily="34" charset="-122"/>
                           <a:cs typeface="Calibri" pitchFamily="34" charset="-120"/>
                         </a:rPr>
                         <a:t>Coordinar la ejecución técnica de la prueba y verificar la continuidad de los servicios de comunicación</a:t>
                       </a:r>
-                      <a:endParaRPr lang="en-US" sz="750" dirty="0">
-                        <a:latin typeface="Calibri" charset="0"/>
+                      <a:endParaRPr lang="es-SV" sz="900" noProof="0" dirty="0">
+                        <a:latin typeface="+mj-lt"/>
                         <a:ea typeface="Calibri" charset="0"/>
                         <a:cs typeface="Calibri" charset="0"/>
                       </a:endParaRPr>
@@ -4617,29 +5654,34 @@
                     </a:solidFill>
                   </a:tcPr>
                 </a:tc>
+                <a:extLst>
+                  <a:ext uri="{0D108BD9-81ED-4DB2-BD59-A6C34878D82A}">
+                    <a16:rowId xmlns:a16="http://schemas.microsoft.com/office/drawing/2014/main" val="10003"/>
+                  </a:ext>
+                </a:extLst>
               </a:tr>
-              <a:tr h="0">
+              <a:tr h="385576">
                 <a:tc>
                   <a:txBody>
                     <a:bodyPr/>
                     <a:lstStyle/>
                     <a:p>
-                      <a:pPr indent="0" marL="0">
+                      <a:pPr marL="0" indent="0">
                         <a:buNone/>
                       </a:pPr>
                       <a:r>
-                        <a:rPr lang="en-US" sz="750" b="1" dirty="0">
+                        <a:rPr lang="es-SV" sz="900" b="1" noProof="0" dirty="0">
                           <a:solidFill>
                             <a:srgbClr val="FFFFFF"/>
                           </a:solidFill>
-                          <a:latin typeface="Calibri" pitchFamily="34" charset="0"/>
+                          <a:latin typeface="+mj-lt"/>
                           <a:ea typeface="Calibri" pitchFamily="34" charset="-122"/>
                           <a:cs typeface="Calibri" pitchFamily="34" charset="-120"/>
                         </a:rPr>
                         <a:t>Jefe de Operaciones y Soporte Técnico</a:t>
                       </a:r>
-                      <a:endParaRPr lang="en-US" sz="750" dirty="0">
-                        <a:latin typeface="Calibri" charset="0"/>
+                      <a:endParaRPr lang="es-SV" sz="900" noProof="0" dirty="0">
+                        <a:latin typeface="+mj-lt"/>
                         <a:ea typeface="Calibri" charset="0"/>
                         <a:cs typeface="Calibri" charset="0"/>
                       </a:endParaRPr>
@@ -4692,22 +5734,22 @@
                     <a:bodyPr/>
                     <a:lstStyle/>
                     <a:p>
-                      <a:pPr indent="0" marL="0">
+                      <a:pPr marL="0" indent="0">
                         <a:buNone/>
                       </a:pPr>
                       <a:r>
-                        <a:rPr lang="en-US" sz="750" dirty="0">
+                        <a:rPr lang="es-SV" sz="900" noProof="0" dirty="0">
                           <a:solidFill>
                             <a:srgbClr val="5CC8F0"/>
                           </a:solidFill>
-                          <a:latin typeface="Calibri" pitchFamily="34" charset="0"/>
+                          <a:latin typeface="+mj-lt"/>
                           <a:ea typeface="Calibri" pitchFamily="34" charset="-122"/>
                           <a:cs typeface="Calibri" pitchFamily="34" charset="-120"/>
                         </a:rPr>
                         <a:t>Centro Financiero</a:t>
                       </a:r>
-                      <a:endParaRPr lang="en-US" sz="750" dirty="0">
-                        <a:latin typeface="Calibri" charset="0"/>
+                      <a:endParaRPr lang="es-SV" sz="900" noProof="0" dirty="0">
+                        <a:latin typeface="+mj-lt"/>
                         <a:ea typeface="Calibri" charset="0"/>
                         <a:cs typeface="Calibri" charset="0"/>
                       </a:endParaRPr>
@@ -4760,22 +5802,22 @@
                     <a:bodyPr/>
                     <a:lstStyle/>
                     <a:p>
-                      <a:pPr indent="0" marL="0">
+                      <a:pPr marL="0" indent="0">
                         <a:buNone/>
                       </a:pPr>
                       <a:r>
-                        <a:rPr lang="en-US" sz="750" dirty="0">
+                        <a:rPr lang="es-SV" sz="900" noProof="0" dirty="0">
                           <a:solidFill>
                             <a:srgbClr val="E8EEF6"/>
                           </a:solidFill>
-                          <a:latin typeface="Calibri" pitchFamily="34" charset="0"/>
+                          <a:latin typeface="+mj-lt"/>
                           <a:ea typeface="Calibri" pitchFamily="34" charset="-122"/>
                           <a:cs typeface="Calibri" pitchFamily="34" charset="-120"/>
                         </a:rPr>
                         <a:t>Coordinar la activación de los mecanismos alternos de conectividad y supervisar la recuperación del servicio.</a:t>
                       </a:r>
-                      <a:endParaRPr lang="en-US" sz="750" dirty="0">
-                        <a:latin typeface="Calibri" charset="0"/>
+                      <a:endParaRPr lang="es-SV" sz="900" noProof="0" dirty="0">
+                        <a:latin typeface="+mj-lt"/>
                         <a:ea typeface="Calibri" charset="0"/>
                         <a:cs typeface="Calibri" charset="0"/>
                       </a:endParaRPr>
@@ -4823,29 +5865,56 @@
                     </a:solidFill>
                   </a:tcPr>
                 </a:tc>
+                <a:extLst>
+                  <a:ext uri="{0D108BD9-81ED-4DB2-BD59-A6C34878D82A}">
+                    <a16:rowId xmlns:a16="http://schemas.microsoft.com/office/drawing/2014/main" val="10004"/>
+                  </a:ext>
+                </a:extLst>
               </a:tr>
-              <a:tr h="0">
+              <a:tr h="385576">
                 <a:tc>
                   <a:txBody>
                     <a:bodyPr/>
                     <a:lstStyle/>
                     <a:p>
-                      <a:pPr indent="0" marL="0">
+                      <a:pPr marL="0" indent="0">
                         <a:buNone/>
                       </a:pPr>
                       <a:r>
-                        <a:rPr lang="en-US" sz="750" b="1" dirty="0">
+                        <a:rPr lang="es-SV" sz="900" b="1" noProof="0" dirty="0">
                           <a:solidFill>
                             <a:srgbClr val="FFFFFF"/>
                           </a:solidFill>
-                          <a:latin typeface="Calibri" pitchFamily="34" charset="0"/>
+                          <a:latin typeface="+mj-lt"/>
                           <a:ea typeface="Calibri" pitchFamily="34" charset="-122"/>
                           <a:cs typeface="Calibri" pitchFamily="34" charset="-120"/>
                         </a:rPr>
-                        <a:t>Jefe de Seguridad de la Informacion y Ciberseguridad</a:t>
+                        <a:t>Jefe de Seguridad de la </a:t>
                       </a:r>
-                      <a:endParaRPr lang="en-US" sz="750" dirty="0">
-                        <a:latin typeface="Calibri" charset="0"/>
+                      <a:r>
+                        <a:rPr lang="es-SV" sz="900" b="1" noProof="0" dirty="0" err="1">
+                          <a:solidFill>
+                            <a:srgbClr val="FFFFFF"/>
+                          </a:solidFill>
+                          <a:latin typeface="+mj-lt"/>
+                          <a:ea typeface="Calibri" pitchFamily="34" charset="-122"/>
+                          <a:cs typeface="Calibri" pitchFamily="34" charset="-120"/>
+                        </a:rPr>
+                        <a:t>Informacion</a:t>
+                      </a:r>
+                      <a:r>
+                        <a:rPr lang="es-SV" sz="900" b="1" noProof="0" dirty="0">
+                          <a:solidFill>
+                            <a:srgbClr val="FFFFFF"/>
+                          </a:solidFill>
+                          <a:latin typeface="+mj-lt"/>
+                          <a:ea typeface="Calibri" pitchFamily="34" charset="-122"/>
+                          <a:cs typeface="Calibri" pitchFamily="34" charset="-120"/>
+                        </a:rPr>
+                        <a:t> y Ciberseguridad</a:t>
+                      </a:r>
+                      <a:endParaRPr lang="es-SV" sz="900" noProof="0" dirty="0">
+                        <a:latin typeface="+mj-lt"/>
                         <a:ea typeface="Calibri" charset="0"/>
                         <a:cs typeface="Calibri" charset="0"/>
                       </a:endParaRPr>
@@ -4898,22 +5967,22 @@
                     <a:bodyPr/>
                     <a:lstStyle/>
                     <a:p>
-                      <a:pPr indent="0" marL="0">
+                      <a:pPr marL="0" indent="0">
                         <a:buNone/>
                       </a:pPr>
                       <a:r>
-                        <a:rPr lang="en-US" sz="750" dirty="0">
+                        <a:rPr lang="es-SV" sz="900" noProof="0" dirty="0">
                           <a:solidFill>
                             <a:srgbClr val="5CC8F0"/>
                           </a:solidFill>
-                          <a:latin typeface="Calibri" pitchFamily="34" charset="0"/>
+                          <a:latin typeface="+mj-lt"/>
                           <a:ea typeface="Calibri" pitchFamily="34" charset="-122"/>
                           <a:cs typeface="Calibri" pitchFamily="34" charset="-120"/>
                         </a:rPr>
                         <a:t>Centro Financiero</a:t>
                       </a:r>
-                      <a:endParaRPr lang="en-US" sz="750" dirty="0">
-                        <a:latin typeface="Calibri" charset="0"/>
+                      <a:endParaRPr lang="es-SV" sz="900" noProof="0" dirty="0">
+                        <a:latin typeface="+mj-lt"/>
                         <a:ea typeface="Calibri" charset="0"/>
                         <a:cs typeface="Calibri" charset="0"/>
                       </a:endParaRPr>
@@ -4966,22 +6035,22 @@
                     <a:bodyPr/>
                     <a:lstStyle/>
                     <a:p>
-                      <a:pPr indent="0" marL="0">
+                      <a:pPr marL="0" indent="0">
                         <a:buNone/>
                       </a:pPr>
                       <a:r>
-                        <a:rPr lang="en-US" sz="750" dirty="0">
+                        <a:rPr lang="es-SV" sz="900" noProof="0" dirty="0">
                           <a:solidFill>
                             <a:srgbClr val="E8EEF6"/>
                           </a:solidFill>
-                          <a:latin typeface="Calibri" pitchFamily="34" charset="0"/>
+                          <a:latin typeface="+mj-lt"/>
                           <a:ea typeface="Calibri" pitchFamily="34" charset="-122"/>
                           <a:cs typeface="Calibri" pitchFamily="34" charset="-120"/>
                         </a:rPr>
                         <a:t>Supervisar la correcta aplicación de los procedimientos establecidos durante la prueba y documentar los hallazgos relacionados con la seguridad de la información</a:t>
                       </a:r>
-                      <a:endParaRPr lang="en-US" sz="750" dirty="0">
-                        <a:latin typeface="Calibri" charset="0"/>
+                      <a:endParaRPr lang="es-SV" sz="900" noProof="0" dirty="0">
+                        <a:latin typeface="+mj-lt"/>
                         <a:ea typeface="Calibri" charset="0"/>
                         <a:cs typeface="Calibri" charset="0"/>
                       </a:endParaRPr>
@@ -5029,29 +6098,34 @@
                     </a:solidFill>
                   </a:tcPr>
                 </a:tc>
+                <a:extLst>
+                  <a:ext uri="{0D108BD9-81ED-4DB2-BD59-A6C34878D82A}">
+                    <a16:rowId xmlns:a16="http://schemas.microsoft.com/office/drawing/2014/main" val="10005"/>
+                  </a:ext>
+                </a:extLst>
               </a:tr>
-              <a:tr h="0">
+              <a:tr h="385576">
                 <a:tc>
                   <a:txBody>
                     <a:bodyPr/>
                     <a:lstStyle/>
                     <a:p>
-                      <a:pPr indent="0" marL="0">
+                      <a:pPr marL="0" indent="0">
                         <a:buNone/>
                       </a:pPr>
                       <a:r>
-                        <a:rPr lang="en-US" sz="750" b="1" dirty="0">
+                        <a:rPr lang="es-SV" sz="900" b="1" noProof="0" dirty="0">
                           <a:solidFill>
                             <a:srgbClr val="FFFFFF"/>
                           </a:solidFill>
-                          <a:latin typeface="Calibri" pitchFamily="34" charset="0"/>
+                          <a:latin typeface="+mj-lt"/>
                           <a:ea typeface="Calibri" pitchFamily="34" charset="-122"/>
                           <a:cs typeface="Calibri" pitchFamily="34" charset="-120"/>
                         </a:rPr>
                         <a:t>Proveedor</a:t>
                       </a:r>
-                      <a:endParaRPr lang="en-US" sz="750" dirty="0">
-                        <a:latin typeface="Calibri" charset="0"/>
+                      <a:endParaRPr lang="es-SV" sz="900" noProof="0" dirty="0">
+                        <a:latin typeface="+mj-lt"/>
                         <a:ea typeface="Calibri" charset="0"/>
                         <a:cs typeface="Calibri" charset="0"/>
                       </a:endParaRPr>
@@ -5104,22 +6178,22 @@
                     <a:bodyPr/>
                     <a:lstStyle/>
                     <a:p>
-                      <a:pPr indent="0" marL="0">
+                      <a:pPr marL="0" indent="0">
                         <a:buNone/>
                       </a:pPr>
                       <a:r>
-                        <a:rPr lang="en-US" sz="750" dirty="0">
+                        <a:rPr lang="es-SV" sz="900" noProof="0" dirty="0">
                           <a:solidFill>
                             <a:srgbClr val="5CC8F0"/>
                           </a:solidFill>
-                          <a:latin typeface="Calibri" pitchFamily="34" charset="0"/>
+                          <a:latin typeface="+mj-lt"/>
                           <a:ea typeface="Calibri" pitchFamily="34" charset="-122"/>
                           <a:cs typeface="Calibri" pitchFamily="34" charset="-120"/>
                         </a:rPr>
                         <a:t>Externo</a:t>
                       </a:r>
-                      <a:endParaRPr lang="en-US" sz="750" dirty="0">
-                        <a:latin typeface="Calibri" charset="0"/>
+                      <a:endParaRPr lang="es-SV" sz="900" noProof="0" dirty="0">
+                        <a:latin typeface="+mj-lt"/>
                         <a:ea typeface="Calibri" charset="0"/>
                         <a:cs typeface="Calibri" charset="0"/>
                       </a:endParaRPr>
@@ -5172,22 +6246,22 @@
                     <a:bodyPr/>
                     <a:lstStyle/>
                     <a:p>
-                      <a:pPr indent="0" marL="0">
+                      <a:pPr marL="0" indent="0">
                         <a:buNone/>
                       </a:pPr>
                       <a:r>
-                        <a:rPr lang="en-US" sz="750" dirty="0">
+                        <a:rPr lang="es-SV" sz="900" noProof="0" dirty="0">
                           <a:solidFill>
                             <a:srgbClr val="E8EEF6"/>
                           </a:solidFill>
-                          <a:latin typeface="Calibri" pitchFamily="34" charset="0"/>
+                          <a:latin typeface="+mj-lt"/>
                           <a:ea typeface="Calibri" pitchFamily="34" charset="-122"/>
                           <a:cs typeface="Calibri" pitchFamily="34" charset="-120"/>
                         </a:rPr>
                         <a:t>Atender el incidente simulado, ejecutar los procedimientos de recuperación y proporcionar información sobre los tiempos de respuesta y restablecimiento del servicio.</a:t>
                       </a:r>
-                      <a:endParaRPr lang="en-US" sz="750" dirty="0">
-                        <a:latin typeface="Calibri" charset="0"/>
+                      <a:endParaRPr lang="es-SV" sz="900" noProof="0" dirty="0">
+                        <a:latin typeface="+mj-lt"/>
                         <a:ea typeface="Calibri" charset="0"/>
                         <a:cs typeface="Calibri" charset="0"/>
                       </a:endParaRPr>
@@ -5235,29 +6309,56 @@
                     </a:solidFill>
                   </a:tcPr>
                 </a:tc>
+                <a:extLst>
+                  <a:ext uri="{0D108BD9-81ED-4DB2-BD59-A6C34878D82A}">
+                    <a16:rowId xmlns:a16="http://schemas.microsoft.com/office/drawing/2014/main" val="10006"/>
+                  </a:ext>
+                </a:extLst>
               </a:tr>
-              <a:tr h="0">
+              <a:tr h="385576">
                 <a:tc>
                   <a:txBody>
                     <a:bodyPr/>
                     <a:lstStyle/>
                     <a:p>
-                      <a:pPr indent="0" marL="0">
+                      <a:pPr marL="0" indent="0">
                         <a:buNone/>
                       </a:pPr>
                       <a:r>
-                        <a:rPr lang="en-US" sz="750" b="1" dirty="0">
+                        <a:rPr lang="es-SV" sz="900" b="1" noProof="0" dirty="0">
                           <a:solidFill>
                             <a:srgbClr val="FFFFFF"/>
                           </a:solidFill>
-                          <a:latin typeface="Calibri" pitchFamily="34" charset="0"/>
+                          <a:latin typeface="+mj-lt"/>
                           <a:ea typeface="Calibri" pitchFamily="34" charset="-122"/>
                           <a:cs typeface="Calibri" pitchFamily="34" charset="-120"/>
                         </a:rPr>
-                        <a:t>Jefe Administracion de Riesgos</a:t>
+                        <a:t>Jefe </a:t>
                       </a:r>
-                      <a:endParaRPr lang="en-US" sz="750" dirty="0">
-                        <a:latin typeface="Calibri" charset="0"/>
+                      <a:r>
+                        <a:rPr lang="es-SV" sz="900" b="1" noProof="0" dirty="0" err="1">
+                          <a:solidFill>
+                            <a:srgbClr val="FFFFFF"/>
+                          </a:solidFill>
+                          <a:latin typeface="+mj-lt"/>
+                          <a:ea typeface="Calibri" pitchFamily="34" charset="-122"/>
+                          <a:cs typeface="Calibri" pitchFamily="34" charset="-120"/>
+                        </a:rPr>
+                        <a:t>Administracion</a:t>
+                      </a:r>
+                      <a:r>
+                        <a:rPr lang="es-SV" sz="900" b="1" noProof="0" dirty="0">
+                          <a:solidFill>
+                            <a:srgbClr val="FFFFFF"/>
+                          </a:solidFill>
+                          <a:latin typeface="+mj-lt"/>
+                          <a:ea typeface="Calibri" pitchFamily="34" charset="-122"/>
+                          <a:cs typeface="Calibri" pitchFamily="34" charset="-120"/>
+                        </a:rPr>
+                        <a:t> de Riesgos</a:t>
+                      </a:r>
+                      <a:endParaRPr lang="es-SV" sz="900" noProof="0" dirty="0">
+                        <a:latin typeface="+mj-lt"/>
                         <a:ea typeface="Calibri" charset="0"/>
                         <a:cs typeface="Calibri" charset="0"/>
                       </a:endParaRPr>
@@ -5310,22 +6411,22 @@
                     <a:bodyPr/>
                     <a:lstStyle/>
                     <a:p>
-                      <a:pPr indent="0" marL="0">
+                      <a:pPr marL="0" indent="0">
                         <a:buNone/>
                       </a:pPr>
                       <a:r>
-                        <a:rPr lang="en-US" sz="750" dirty="0">
+                        <a:rPr lang="es-SV" sz="900" noProof="0" dirty="0">
                           <a:solidFill>
                             <a:srgbClr val="5CC8F0"/>
                           </a:solidFill>
-                          <a:latin typeface="Calibri" pitchFamily="34" charset="0"/>
+                          <a:latin typeface="+mj-lt"/>
                           <a:ea typeface="Calibri" pitchFamily="34" charset="-122"/>
                           <a:cs typeface="Calibri" pitchFamily="34" charset="-120"/>
                         </a:rPr>
                         <a:t>Centro Financiero</a:t>
                       </a:r>
-                      <a:endParaRPr lang="en-US" sz="750" dirty="0">
-                        <a:latin typeface="Calibri" charset="0"/>
+                      <a:endParaRPr lang="es-SV" sz="900" noProof="0" dirty="0">
+                        <a:latin typeface="+mj-lt"/>
                         <a:ea typeface="Calibri" charset="0"/>
                         <a:cs typeface="Calibri" charset="0"/>
                       </a:endParaRPr>
@@ -5378,22 +6479,22 @@
                     <a:bodyPr/>
                     <a:lstStyle/>
                     <a:p>
-                      <a:pPr indent="0" marL="0">
+                      <a:pPr marL="0" indent="0">
                         <a:buNone/>
                       </a:pPr>
                       <a:r>
-                        <a:rPr lang="en-US" sz="750" dirty="0">
+                        <a:rPr lang="es-SV" sz="900" noProof="0" dirty="0">
                           <a:solidFill>
                             <a:srgbClr val="E8EEF6"/>
                           </a:solidFill>
-                          <a:latin typeface="Calibri" pitchFamily="34" charset="0"/>
+                          <a:latin typeface="+mj-lt"/>
                           <a:ea typeface="Calibri" pitchFamily="34" charset="-122"/>
                           <a:cs typeface="Calibri" pitchFamily="34" charset="-120"/>
                         </a:rPr>
                         <a:t>Supervisar la ejecución de la prueba, verificar el cumplimiento del guion y consolidar el informe de resultados.</a:t>
                       </a:r>
-                      <a:endParaRPr lang="en-US" sz="750" dirty="0">
-                        <a:latin typeface="Calibri" charset="0"/>
+                      <a:endParaRPr lang="es-SV" sz="900" noProof="0" dirty="0">
+                        <a:latin typeface="+mj-lt"/>
                         <a:ea typeface="Calibri" charset="0"/>
                         <a:cs typeface="Calibri" charset="0"/>
                       </a:endParaRPr>
@@ -5441,29 +6542,34 @@
                     </a:solidFill>
                   </a:tcPr>
                 </a:tc>
+                <a:extLst>
+                  <a:ext uri="{0D108BD9-81ED-4DB2-BD59-A6C34878D82A}">
+                    <a16:rowId xmlns:a16="http://schemas.microsoft.com/office/drawing/2014/main" val="10007"/>
+                  </a:ext>
+                </a:extLst>
               </a:tr>
-              <a:tr h="0">
+              <a:tr h="230102">
                 <a:tc>
                   <a:txBody>
                     <a:bodyPr/>
                     <a:lstStyle/>
                     <a:p>
-                      <a:pPr indent="0" marL="0">
+                      <a:pPr marL="0" indent="0">
                         <a:buNone/>
                       </a:pPr>
                       <a:r>
-                        <a:rPr lang="en-US" sz="750" b="1" dirty="0">
+                        <a:rPr lang="es-SV" sz="900" b="1" noProof="0" dirty="0">
                           <a:solidFill>
                             <a:srgbClr val="FFFFFF"/>
                           </a:solidFill>
-                          <a:latin typeface="Calibri" pitchFamily="34" charset="0"/>
+                          <a:latin typeface="+mj-lt"/>
                           <a:ea typeface="Calibri" pitchFamily="34" charset="-122"/>
                           <a:cs typeface="Calibri" pitchFamily="34" charset="-120"/>
                         </a:rPr>
                         <a:t>Auditor Interno</a:t>
                       </a:r>
-                      <a:endParaRPr lang="en-US" sz="750" dirty="0">
-                        <a:latin typeface="Calibri" charset="0"/>
+                      <a:endParaRPr lang="es-SV" sz="900" noProof="0" dirty="0">
+                        <a:latin typeface="+mj-lt"/>
                         <a:ea typeface="Calibri" charset="0"/>
                         <a:cs typeface="Calibri" charset="0"/>
                       </a:endParaRPr>
@@ -5516,22 +6622,22 @@
                     <a:bodyPr/>
                     <a:lstStyle/>
                     <a:p>
-                      <a:pPr indent="0" marL="0">
+                      <a:pPr marL="0" indent="0">
                         <a:buNone/>
                       </a:pPr>
                       <a:r>
-                        <a:rPr lang="en-US" sz="750" dirty="0">
+                        <a:rPr lang="es-SV" sz="900" noProof="0" dirty="0">
                           <a:solidFill>
                             <a:srgbClr val="5CC8F0"/>
                           </a:solidFill>
-                          <a:latin typeface="Calibri" pitchFamily="34" charset="0"/>
+                          <a:latin typeface="+mj-lt"/>
                           <a:ea typeface="Calibri" pitchFamily="34" charset="-122"/>
                           <a:cs typeface="Calibri" pitchFamily="34" charset="-120"/>
                         </a:rPr>
                         <a:t>Centro Financiero</a:t>
                       </a:r>
-                      <a:endParaRPr lang="en-US" sz="750" dirty="0">
-                        <a:latin typeface="Calibri" charset="0"/>
+                      <a:endParaRPr lang="es-SV" sz="900" noProof="0" dirty="0">
+                        <a:latin typeface="+mj-lt"/>
                         <a:ea typeface="Calibri" charset="0"/>
                         <a:cs typeface="Calibri" charset="0"/>
                       </a:endParaRPr>
@@ -5584,22 +6690,22 @@
                     <a:bodyPr/>
                     <a:lstStyle/>
                     <a:p>
-                      <a:pPr indent="0" marL="0">
+                      <a:pPr marL="0" indent="0">
                         <a:buNone/>
                       </a:pPr>
                       <a:r>
-                        <a:rPr lang="en-US" sz="750" dirty="0">
+                        <a:rPr lang="es-SV" sz="900" noProof="0" dirty="0">
                           <a:solidFill>
                             <a:srgbClr val="E8EEF6"/>
                           </a:solidFill>
-                          <a:latin typeface="Calibri" pitchFamily="34" charset="0"/>
+                          <a:latin typeface="+mj-lt"/>
                           <a:ea typeface="Calibri" pitchFamily="34" charset="-122"/>
                           <a:cs typeface="Calibri" pitchFamily="34" charset="-120"/>
                         </a:rPr>
                         <a:t>Actuar como observador independiente durante la ejecución de la prueba</a:t>
                       </a:r>
-                      <a:endParaRPr lang="en-US" sz="750" dirty="0">
-                        <a:latin typeface="Calibri" charset="0"/>
+                      <a:endParaRPr lang="es-SV" sz="900" noProof="0" dirty="0">
+                        <a:latin typeface="+mj-lt"/>
                         <a:ea typeface="Calibri" charset="0"/>
                         <a:cs typeface="Calibri" charset="0"/>
                       </a:endParaRPr>
@@ -5647,6 +6753,11 @@
                     </a:solidFill>
                   </a:tcPr>
                 </a:tc>
+                <a:extLst>
+                  <a:ext uri="{0D108BD9-81ED-4DB2-BD59-A6C34878D82A}">
+                    <a16:rowId xmlns:a16="http://schemas.microsoft.com/office/drawing/2014/main" val="10008"/>
+                  </a:ext>
+                </a:extLst>
               </a:tr>
             </a:tbl>
           </a:graphicData>
@@ -5654,47 +6765,13 @@
       </p:graphicFrame>
       <p:sp>
         <p:nvSpPr>
-          <p:cNvPr id="10" name="Shape 5"/>
+          <p:cNvPr id="27" name="Shape 17"/>
           <p:cNvSpPr/>
           <p:nvPr/>
         </p:nvSpPr>
         <p:spPr>
           <a:xfrm>
-            <a:off x="7863840" y="960120"/>
-            <a:ext cx="3870655" cy="2971800"/>
-          </a:xfrm>
-          <a:prstGeom prst="roundRect">
-            <a:avLst>
-              <a:gd name="adj" fmla="val 2462"/>
-            </a:avLst>
-          </a:prstGeom>
-          <a:solidFill>
-            <a:srgbClr val="16233A"/>
-          </a:solidFill>
-          <a:ln w="9525">
-            <a:solidFill>
-              <a:srgbClr val="16233A"/>
-            </a:solidFill>
-            <a:prstDash val="solid"/>
-          </a:ln>
-          <a:effectLst>
-            <a:outerShdw sx="100000" sy="100000" kx="0" ky="0" algn="bl" rotWithShape="0" blurRad="76200" dist="19050" dir="5400000">
-              <a:srgbClr val="000000">
-                <a:alpha val="35000"/>
-              </a:srgbClr>
-            </a:outerShdw>
-          </a:effectLst>
-        </p:spPr>
-      </p:sp>
-      <p:sp>
-        <p:nvSpPr>
-          <p:cNvPr id="11" name="Shape 6"/>
-          <p:cNvSpPr/>
-          <p:nvPr/>
-        </p:nvSpPr>
-        <p:spPr>
-          <a:xfrm>
-            <a:off x="8028432" y="1097280"/>
+            <a:off x="457200" y="4142232"/>
             <a:ext cx="347472" cy="347472"/>
           </a:xfrm>
           <a:prstGeom prst="ellipse">
@@ -5710,24 +6787,31 @@
             <a:prstDash val="solid"/>
           </a:ln>
         </p:spPr>
+        <p:txBody>
+          <a:bodyPr/>
+          <a:lstStyle/>
+          <a:p>
+            <a:endParaRPr lang="es-SV" noProof="0" dirty="0"/>
+          </a:p>
+        </p:txBody>
       </p:sp>
       <p:pic>
         <p:nvPicPr>
-          <p:cNvPr id="12" name="Image 2" descr="preencoded.png">    </p:cNvPr>
+          <p:cNvPr id="28" name="Image 7" descr="preencoded.png"/>
           <p:cNvPicPr>
             <a:picLocks noChangeAspect="1"/>
           </p:cNvPicPr>
           <p:nvPr/>
         </p:nvPicPr>
         <p:blipFill>
-          <a:blip r:embed="rId3"/>
+          <a:blip r:embed="rId4"/>
           <a:stretch>
             <a:fillRect/>
           </a:stretch>
         </p:blipFill>
         <p:spPr>
           <a:xfrm>
-            <a:off x="8118775" y="1187623"/>
+            <a:off x="547543" y="4232575"/>
             <a:ext cx="166787" cy="166787"/>
           </a:xfrm>
           <a:prstGeom prst="rect">
@@ -5737,14 +6821,14 @@
       </p:pic>
       <p:sp>
         <p:nvSpPr>
-          <p:cNvPr id="13" name="Text 7"/>
+          <p:cNvPr id="29" name="Text 18"/>
           <p:cNvSpPr txBox="1"/>
           <p:nvPr/>
         </p:nvSpPr>
         <p:spPr>
           <a:xfrm>
-            <a:off x="8467344" y="1097280"/>
-            <a:ext cx="3093415" cy="347472"/>
+            <a:off x="896112" y="4142232"/>
+            <a:ext cx="6537960" cy="347472"/>
           </a:xfrm>
           <a:prstGeom prst="rect">
             <a:avLst/>
@@ -5756,585 +6840,38 @@
           <a:bodyPr wrap="square" lIns="0" tIns="0" rIns="0" bIns="0" rtlCol="0" anchor="ctr"/>
           <a:lstStyle/>
           <a:p>
-            <a:pPr indent="0" marL="0">
+            <a:pPr marL="0" indent="0">
               <a:buNone/>
             </a:pPr>
             <a:r>
-              <a:rPr lang="en-US" sz="1100" b="1" dirty="0">
+              <a:rPr lang="es-SV" sz="1100" b="1" noProof="0" dirty="0">
                 <a:solidFill>
-                  <a:srgbClr val="F5B841"/>
+                  <a:srgbClr val="002060"/>
                 </a:solidFill>
                 <a:latin typeface="Arial" pitchFamily="34" charset="0"/>
                 <a:ea typeface="Arial" pitchFamily="34" charset="-122"/>
                 <a:cs typeface="Arial" pitchFamily="34" charset="-120"/>
               </a:rPr>
-              <a:t>10  </a:t>
+              <a:t>09  DESCRIPCION DE ACTIVIDADES A REALIZAR</a:t>
             </a:r>
-            <a:pPr indent="0" marL="0">
-              <a:buNone/>
-            </a:pPr>
-            <a:r>
-              <a:rPr lang="en-US" sz="1100" b="1" dirty="0">
-                <a:solidFill>
-                  <a:srgbClr val="FFFFFF"/>
-                </a:solidFill>
-                <a:latin typeface="Arial" pitchFamily="34" charset="0"/>
-                <a:ea typeface="Arial" pitchFamily="34" charset="-122"/>
-                <a:cs typeface="Arial" pitchFamily="34" charset="-120"/>
-              </a:rPr>
-              <a:t>OBSERVADORES Y EVALUADORES</a:t>
-            </a:r>
-            <a:endParaRPr lang="en-US" sz="1100" dirty="0"/>
+            <a:endParaRPr lang="es-SV" sz="1100" noProof="0" dirty="0">
+              <a:solidFill>
+                <a:srgbClr val="002060"/>
+              </a:solidFill>
+            </a:endParaRPr>
           </a:p>
         </p:txBody>
       </p:sp>
       <p:sp>
         <p:nvSpPr>
-          <p:cNvPr id="14" name="Text 8"/>
+          <p:cNvPr id="30" name="Text 19"/>
           <p:cNvSpPr txBox="1"/>
           <p:nvPr/>
         </p:nvSpPr>
         <p:spPr>
           <a:xfrm>
-            <a:off x="8467344" y="1371600"/>
-            <a:ext cx="3108960" cy="182880"/>
-          </a:xfrm>
-          <a:prstGeom prst="rect">
-            <a:avLst/>
-          </a:prstGeom>
-          <a:noFill/>
-          <a:ln/>
-        </p:spPr>
-        <p:txBody>
-          <a:bodyPr wrap="square" lIns="0" tIns="0" rIns="0" bIns="0" rtlCol="0" anchor="t"/>
-          <a:lstStyle/>
-          <a:p>
-            <a:pPr indent="0" marL="0">
-              <a:buNone/>
-            </a:pPr>
-            <a:r>
-              <a:rPr lang="en-US" sz="750" b="1" dirty="0">
-                <a:solidFill>
-                  <a:srgbClr val="9FB0C6"/>
-                </a:solidFill>
-              </a:rPr>
-              <a:t>NOMBRE  ·  CARGO  ·  UBICACIÓN  ·  ROL</a:t>
-            </a:r>
-            <a:endParaRPr lang="en-US" sz="750" dirty="0"/>
-          </a:p>
-        </p:txBody>
-      </p:sp>
-      <p:sp>
-        <p:nvSpPr>
-          <p:cNvPr id="15" name="Shape 9"/>
-          <p:cNvSpPr/>
-          <p:nvPr/>
-        </p:nvSpPr>
-        <p:spPr>
-          <a:xfrm>
-            <a:off x="8028432" y="1746504"/>
-            <a:ext cx="329184" cy="329184"/>
-          </a:xfrm>
-          <a:prstGeom prst="ellipse">
-            <a:avLst/>
-          </a:prstGeom>
-          <a:solidFill>
-            <a:srgbClr val="1E2F4D"/>
-          </a:solidFill>
-          <a:ln w="12700">
-            <a:solidFill>
-              <a:srgbClr val="1E2F4D"/>
-            </a:solidFill>
-            <a:prstDash val="solid"/>
-          </a:ln>
-        </p:spPr>
-      </p:sp>
-      <p:pic>
-        <p:nvPicPr>
-          <p:cNvPr id="16" name="Image 3" descr="preencoded.png">    </p:cNvPr>
-          <p:cNvPicPr>
-            <a:picLocks noChangeAspect="1"/>
-          </p:cNvPicPr>
-          <p:nvPr/>
-        </p:nvPicPr>
-        <p:blipFill>
-          <a:blip r:embed="rId4"/>
-          <a:stretch>
-            <a:fillRect/>
-          </a:stretch>
-        </p:blipFill>
-        <p:spPr>
-          <a:xfrm>
-            <a:off x="8114020" y="1832092"/>
-            <a:ext cx="158008" cy="158008"/>
-          </a:xfrm>
-          <a:prstGeom prst="rect">
-            <a:avLst/>
-          </a:prstGeom>
-        </p:spPr>
-      </p:pic>
-      <p:sp>
-        <p:nvSpPr>
-          <p:cNvPr id="17" name="Text 10"/>
-          <p:cNvSpPr txBox="1"/>
-          <p:nvPr/>
-        </p:nvSpPr>
-        <p:spPr>
-          <a:xfrm>
-            <a:off x="8467344" y="1691640"/>
-            <a:ext cx="3154680" cy="457200"/>
-          </a:xfrm>
-          <a:prstGeom prst="rect">
-            <a:avLst/>
-          </a:prstGeom>
-          <a:noFill/>
-          <a:ln/>
-        </p:spPr>
-        <p:txBody>
-          <a:bodyPr wrap="square" lIns="0" tIns="0" rIns="0" bIns="0" rtlCol="0" anchor="t"/>
-          <a:lstStyle/>
-          <a:p>
-            <a:pPr indent="0" marL="0">
-              <a:buNone/>
-            </a:pPr>
-            <a:r>
-              <a:rPr lang="en-US" sz="900" b="1" dirty="0">
-                <a:solidFill>
-                  <a:srgbClr val="FFFFFF"/>
-                </a:solidFill>
-              </a:rPr>
-              <a:t>Lic. Roque Rafael Reyes</a:t>
-            </a:r>
-            <a:endParaRPr lang="en-US" sz="900" dirty="0"/>
-          </a:p>
-          <a:p>
-            <a:pPr indent="0" marL="0">
-              <a:buNone/>
-            </a:pPr>
-            <a:r>
-              <a:rPr lang="en-US" sz="750" dirty="0">
-                <a:solidFill>
-                  <a:srgbClr val="5CC8F0"/>
-                </a:solidFill>
-              </a:rPr>
-              <a:t>Gerente General en Funciones  ·  Centro Financiero</a:t>
-            </a:r>
-            <a:endParaRPr lang="en-US" sz="900" dirty="0"/>
-          </a:p>
-          <a:p>
-            <a:pPr indent="0" marL="0">
-              <a:buNone/>
-            </a:pPr>
-            <a:r>
-              <a:rPr lang="en-US" sz="750" dirty="0">
-                <a:solidFill>
-                  <a:srgbClr val="9FB0C6"/>
-                </a:solidFill>
-              </a:rPr>
-              <a:t>Observar y evaluar la ejecución de la prueba.</a:t>
-            </a:r>
-            <a:endParaRPr lang="en-US" sz="900" dirty="0"/>
-          </a:p>
-        </p:txBody>
-      </p:sp>
-      <p:sp>
-        <p:nvSpPr>
-          <p:cNvPr id="18" name="Shape 11"/>
-          <p:cNvSpPr/>
-          <p:nvPr/>
-        </p:nvSpPr>
-        <p:spPr>
-          <a:xfrm>
-            <a:off x="8028432" y="2276856"/>
-            <a:ext cx="329184" cy="329184"/>
-          </a:xfrm>
-          <a:prstGeom prst="ellipse">
-            <a:avLst/>
-          </a:prstGeom>
-          <a:solidFill>
-            <a:srgbClr val="1E2F4D"/>
-          </a:solidFill>
-          <a:ln w="12700">
-            <a:solidFill>
-              <a:srgbClr val="1E2F4D"/>
-            </a:solidFill>
-            <a:prstDash val="solid"/>
-          </a:ln>
-        </p:spPr>
-      </p:sp>
-      <p:pic>
-        <p:nvPicPr>
-          <p:cNvPr id="19" name="Image 4" descr="preencoded.png">    </p:cNvPr>
-          <p:cNvPicPr>
-            <a:picLocks noChangeAspect="1"/>
-          </p:cNvPicPr>
-          <p:nvPr/>
-        </p:nvPicPr>
-        <p:blipFill>
-          <a:blip r:embed="rId5"/>
-          <a:stretch>
-            <a:fillRect/>
-          </a:stretch>
-        </p:blipFill>
-        <p:spPr>
-          <a:xfrm>
-            <a:off x="8114020" y="2362444"/>
-            <a:ext cx="158008" cy="158008"/>
-          </a:xfrm>
-          <a:prstGeom prst="rect">
-            <a:avLst/>
-          </a:prstGeom>
-        </p:spPr>
-      </p:pic>
-      <p:sp>
-        <p:nvSpPr>
-          <p:cNvPr id="20" name="Text 12"/>
-          <p:cNvSpPr txBox="1"/>
-          <p:nvPr/>
-        </p:nvSpPr>
-        <p:spPr>
-          <a:xfrm>
-            <a:off x="8467344" y="2221992"/>
-            <a:ext cx="3154680" cy="457200"/>
-          </a:xfrm>
-          <a:prstGeom prst="rect">
-            <a:avLst/>
-          </a:prstGeom>
-          <a:noFill/>
-          <a:ln/>
-        </p:spPr>
-        <p:txBody>
-          <a:bodyPr wrap="square" lIns="0" tIns="0" rIns="0" bIns="0" rtlCol="0" anchor="t"/>
-          <a:lstStyle/>
-          <a:p>
-            <a:pPr indent="0" marL="0">
-              <a:buNone/>
-            </a:pPr>
-            <a:r>
-              <a:rPr lang="en-US" sz="900" b="1" dirty="0">
-                <a:solidFill>
-                  <a:srgbClr val="FFFFFF"/>
-                </a:solidFill>
-              </a:rPr>
-              <a:t>Lic. Henrry Daniel Escamilla Zaldaña</a:t>
-            </a:r>
-            <a:endParaRPr lang="en-US" sz="900" dirty="0"/>
-          </a:p>
-          <a:p>
-            <a:pPr indent="0" marL="0">
-              <a:buNone/>
-            </a:pPr>
-            <a:r>
-              <a:rPr lang="en-US" sz="750" dirty="0">
-                <a:solidFill>
-                  <a:srgbClr val="5CC8F0"/>
-                </a:solidFill>
-              </a:rPr>
-              <a:t>Jefe Administracion de Riesgos  ·  Centro Financiero</a:t>
-            </a:r>
-            <a:endParaRPr lang="en-US" sz="900" dirty="0"/>
-          </a:p>
-          <a:p>
-            <a:pPr indent="0" marL="0">
-              <a:buNone/>
-            </a:pPr>
-            <a:r>
-              <a:rPr lang="en-US" sz="750" dirty="0">
-                <a:solidFill>
-                  <a:srgbClr val="9FB0C6"/>
-                </a:solidFill>
-              </a:rPr>
-              <a:t>Observar y evaluar la ejecución de la prueba.</a:t>
-            </a:r>
-            <a:endParaRPr lang="en-US" sz="900" dirty="0"/>
-          </a:p>
-        </p:txBody>
-      </p:sp>
-      <p:sp>
-        <p:nvSpPr>
-          <p:cNvPr id="21" name="Shape 13"/>
-          <p:cNvSpPr/>
-          <p:nvPr/>
-        </p:nvSpPr>
-        <p:spPr>
-          <a:xfrm>
-            <a:off x="8028432" y="2807208"/>
-            <a:ext cx="329184" cy="329184"/>
-          </a:xfrm>
-          <a:prstGeom prst="ellipse">
-            <a:avLst/>
-          </a:prstGeom>
-          <a:solidFill>
-            <a:srgbClr val="1E2F4D"/>
-          </a:solidFill>
-          <a:ln w="12700">
-            <a:solidFill>
-              <a:srgbClr val="1E2F4D"/>
-            </a:solidFill>
-            <a:prstDash val="solid"/>
-          </a:ln>
-        </p:spPr>
-      </p:sp>
-      <p:pic>
-        <p:nvPicPr>
-          <p:cNvPr id="22" name="Image 5" descr="preencoded.png">    </p:cNvPr>
-          <p:cNvPicPr>
-            <a:picLocks noChangeAspect="1"/>
-          </p:cNvPicPr>
-          <p:nvPr/>
-        </p:nvPicPr>
-        <p:blipFill>
-          <a:blip r:embed="rId6"/>
-          <a:stretch>
-            <a:fillRect/>
-          </a:stretch>
-        </p:blipFill>
-        <p:spPr>
-          <a:xfrm>
-            <a:off x="8114020" y="2892796"/>
-            <a:ext cx="158008" cy="158008"/>
-          </a:xfrm>
-          <a:prstGeom prst="rect">
-            <a:avLst/>
-          </a:prstGeom>
-        </p:spPr>
-      </p:pic>
-      <p:sp>
-        <p:nvSpPr>
-          <p:cNvPr id="23" name="Text 14"/>
-          <p:cNvSpPr txBox="1"/>
-          <p:nvPr/>
-        </p:nvSpPr>
-        <p:spPr>
-          <a:xfrm>
-            <a:off x="8467344" y="2752344"/>
-            <a:ext cx="3154680" cy="457200"/>
-          </a:xfrm>
-          <a:prstGeom prst="rect">
-            <a:avLst/>
-          </a:prstGeom>
-          <a:noFill/>
-          <a:ln/>
-        </p:spPr>
-        <p:txBody>
-          <a:bodyPr wrap="square" lIns="0" tIns="0" rIns="0" bIns="0" rtlCol="0" anchor="t"/>
-          <a:lstStyle/>
-          <a:p>
-            <a:pPr indent="0" marL="0">
-              <a:buNone/>
-            </a:pPr>
-            <a:r>
-              <a:rPr lang="en-US" sz="900" b="1" dirty="0">
-                <a:solidFill>
-                  <a:srgbClr val="FFFFFF"/>
-                </a:solidFill>
-              </a:rPr>
-              <a:t>Licda. Silvia de Ramirez</a:t>
-            </a:r>
-            <a:endParaRPr lang="en-US" sz="900" dirty="0"/>
-          </a:p>
-          <a:p>
-            <a:pPr indent="0" marL="0">
-              <a:buNone/>
-            </a:pPr>
-            <a:r>
-              <a:rPr lang="en-US" sz="750" dirty="0">
-                <a:solidFill>
-                  <a:srgbClr val="5CC8F0"/>
-                </a:solidFill>
-              </a:rPr>
-              <a:t>Analista de Riesgo Operacional  ·  Centro Financiero</a:t>
-            </a:r>
-            <a:endParaRPr lang="en-US" sz="900" dirty="0"/>
-          </a:p>
-          <a:p>
-            <a:pPr indent="0" marL="0">
-              <a:buNone/>
-            </a:pPr>
-            <a:r>
-              <a:rPr lang="en-US" sz="750" dirty="0">
-                <a:solidFill>
-                  <a:srgbClr val="9FB0C6"/>
-                </a:solidFill>
-              </a:rPr>
-              <a:t>Observar y evaluar la ejecución de la prueba.</a:t>
-            </a:r>
-            <a:endParaRPr lang="en-US" sz="900" dirty="0"/>
-          </a:p>
-        </p:txBody>
-      </p:sp>
-      <p:sp>
-        <p:nvSpPr>
-          <p:cNvPr id="24" name="Shape 15"/>
-          <p:cNvSpPr/>
-          <p:nvPr/>
-        </p:nvSpPr>
-        <p:spPr>
-          <a:xfrm>
-            <a:off x="8028432" y="3337560"/>
-            <a:ext cx="329184" cy="329184"/>
-          </a:xfrm>
-          <a:prstGeom prst="ellipse">
-            <a:avLst/>
-          </a:prstGeom>
-          <a:solidFill>
-            <a:srgbClr val="1E2F4D"/>
-          </a:solidFill>
-          <a:ln w="12700">
-            <a:solidFill>
-              <a:srgbClr val="1E2F4D"/>
-            </a:solidFill>
-            <a:prstDash val="solid"/>
-          </a:ln>
-        </p:spPr>
-      </p:sp>
-      <p:pic>
-        <p:nvPicPr>
-          <p:cNvPr id="25" name="Image 6" descr="preencoded.png">    </p:cNvPr>
-          <p:cNvPicPr>
-            <a:picLocks noChangeAspect="1"/>
-          </p:cNvPicPr>
-          <p:nvPr/>
-        </p:nvPicPr>
-        <p:blipFill>
-          <a:blip r:embed="rId7"/>
-          <a:stretch>
-            <a:fillRect/>
-          </a:stretch>
-        </p:blipFill>
-        <p:spPr>
-          <a:xfrm>
-            <a:off x="8114020" y="3423148"/>
-            <a:ext cx="158008" cy="158008"/>
-          </a:xfrm>
-          <a:prstGeom prst="rect">
-            <a:avLst/>
-          </a:prstGeom>
-        </p:spPr>
-      </p:pic>
-      <p:sp>
-        <p:nvSpPr>
-          <p:cNvPr id="26" name="Text 16"/>
-          <p:cNvSpPr txBox="1"/>
-          <p:nvPr/>
-        </p:nvSpPr>
-        <p:spPr>
-          <a:xfrm>
-            <a:off x="8467344" y="3282696"/>
-            <a:ext cx="3154680" cy="457200"/>
-          </a:xfrm>
-          <a:prstGeom prst="rect">
-            <a:avLst/>
-          </a:prstGeom>
-          <a:noFill/>
-          <a:ln/>
-        </p:spPr>
-        <p:txBody>
-          <a:bodyPr wrap="square" lIns="0" tIns="0" rIns="0" bIns="0" rtlCol="0" anchor="t"/>
-          <a:lstStyle/>
-          <a:p>
-            <a:pPr indent="0" marL="0">
-              <a:buNone/>
-            </a:pPr>
-            <a:r>
-              <a:rPr lang="en-US" sz="900" b="1" dirty="0">
-                <a:solidFill>
-                  <a:srgbClr val="FFFFFF"/>
-                </a:solidFill>
-              </a:rPr>
-              <a:t>Licda. Mayeralys Chavez</a:t>
-            </a:r>
-            <a:endParaRPr lang="en-US" sz="900" dirty="0"/>
-          </a:p>
-          <a:p>
-            <a:pPr indent="0" marL="0">
-              <a:buNone/>
-            </a:pPr>
-            <a:r>
-              <a:rPr lang="en-US" sz="750" dirty="0">
-                <a:solidFill>
-                  <a:srgbClr val="5CC8F0"/>
-                </a:solidFill>
-              </a:rPr>
-              <a:t>Auditor Interno en Funciones  ·  Centro Financiero</a:t>
-            </a:r>
-            <a:endParaRPr lang="en-US" sz="900" dirty="0"/>
-          </a:p>
-          <a:p>
-            <a:pPr indent="0" marL="0">
-              <a:buNone/>
-            </a:pPr>
-            <a:r>
-              <a:rPr lang="en-US" sz="750" dirty="0">
-                <a:solidFill>
-                  <a:srgbClr val="9FB0C6"/>
-                </a:solidFill>
-              </a:rPr>
-              <a:t>Observar y evaluar la ejecución de la prueba.</a:t>
-            </a:r>
-            <a:endParaRPr lang="en-US" sz="900" dirty="0"/>
-          </a:p>
-        </p:txBody>
-      </p:sp>
-      <p:sp>
-        <p:nvSpPr>
-          <p:cNvPr id="27" name="Shape 17"/>
-          <p:cNvSpPr/>
-          <p:nvPr/>
-        </p:nvSpPr>
-        <p:spPr>
-          <a:xfrm>
-            <a:off x="457200" y="4142232"/>
-            <a:ext cx="347472" cy="347472"/>
-          </a:xfrm>
-          <a:prstGeom prst="ellipse">
-            <a:avLst/>
-          </a:prstGeom>
-          <a:solidFill>
-            <a:srgbClr val="F5B841"/>
-          </a:solidFill>
-          <a:ln w="12700">
-            <a:solidFill>
-              <a:srgbClr val="F5B841"/>
-            </a:solidFill>
-            <a:prstDash val="solid"/>
-          </a:ln>
-        </p:spPr>
-      </p:sp>
-      <p:pic>
-        <p:nvPicPr>
-          <p:cNvPr id="28" name="Image 7" descr="preencoded.png">    </p:cNvPr>
-          <p:cNvPicPr>
-            <a:picLocks noChangeAspect="1"/>
-          </p:cNvPicPr>
-          <p:nvPr/>
-        </p:nvPicPr>
-        <p:blipFill>
-          <a:blip r:embed="rId8"/>
-          <a:stretch>
-            <a:fillRect/>
-          </a:stretch>
-        </p:blipFill>
-        <p:spPr>
-          <a:xfrm>
-            <a:off x="547543" y="4232575"/>
-            <a:ext cx="166787" cy="166787"/>
-          </a:xfrm>
-          <a:prstGeom prst="rect">
-            <a:avLst/>
-          </a:prstGeom>
-        </p:spPr>
-      </p:pic>
-      <p:sp>
-        <p:nvSpPr>
-          <p:cNvPr id="29" name="Text 18"/>
-          <p:cNvSpPr txBox="1"/>
-          <p:nvPr/>
-        </p:nvSpPr>
-        <p:spPr>
-          <a:xfrm>
-            <a:off x="896112" y="4142232"/>
-            <a:ext cx="6537960" cy="347472"/>
+            <a:off x="7589520" y="4142232"/>
+            <a:ext cx="4142232" cy="274320"/>
           </a:xfrm>
           <a:prstGeom prst="rect">
             <a:avLst/>
@@ -6346,71 +6883,38 @@
           <a:bodyPr wrap="square" lIns="0" tIns="0" rIns="0" bIns="0" rtlCol="0" anchor="ctr"/>
           <a:lstStyle/>
           <a:p>
-            <a:pPr indent="0" marL="0">
+            <a:pPr marL="0" indent="0" algn="r">
               <a:buNone/>
             </a:pPr>
             <a:r>
-              <a:rPr lang="en-US" sz="1100" b="1" dirty="0">
+              <a:rPr lang="es-SV" sz="800" b="1" noProof="0" dirty="0">
                 <a:solidFill>
-                  <a:srgbClr val="F5B841"/>
-                </a:solidFill>
-                <a:latin typeface="Arial" pitchFamily="34" charset="0"/>
-                <a:ea typeface="Arial" pitchFamily="34" charset="-122"/>
-                <a:cs typeface="Arial" pitchFamily="34" charset="-120"/>
-              </a:rPr>
-              <a:t>09  </a:t>
-            </a:r>
-            <a:pPr indent="0" marL="0">
-              <a:buNone/>
-            </a:pPr>
-            <a:r>
-              <a:rPr lang="en-US" sz="1100" b="1" dirty="0">
-                <a:solidFill>
-                  <a:srgbClr val="FFFFFF"/>
-                </a:solidFill>
-                <a:latin typeface="Arial" pitchFamily="34" charset="0"/>
-                <a:ea typeface="Arial" pitchFamily="34" charset="-122"/>
-                <a:cs typeface="Arial" pitchFamily="34" charset="-120"/>
-              </a:rPr>
-              <a:t>DESCRIPCION DE ACTIVIDADES A REALIZAR</a:t>
-            </a:r>
-            <a:endParaRPr lang="en-US" sz="1100" dirty="0"/>
-          </a:p>
-        </p:txBody>
-      </p:sp>
-      <p:sp>
-        <p:nvSpPr>
-          <p:cNvPr id="30" name="Text 19"/>
-          <p:cNvSpPr txBox="1"/>
-          <p:nvPr/>
-        </p:nvSpPr>
-        <p:spPr>
-          <a:xfrm>
-            <a:off x="7589520" y="4142232"/>
-            <a:ext cx="4142232" cy="274320"/>
-          </a:xfrm>
-          <a:prstGeom prst="rect">
-            <a:avLst/>
-          </a:prstGeom>
-          <a:noFill/>
-          <a:ln/>
-        </p:spPr>
-        <p:txBody>
-          <a:bodyPr wrap="square" lIns="0" tIns="0" rIns="0" bIns="0" rtlCol="0" anchor="ctr"/>
-          <a:lstStyle/>
-          <a:p>
-            <a:pPr algn="r" indent="0" marL="0">
-              <a:buNone/>
-            </a:pPr>
-            <a:r>
-              <a:rPr lang="en-US" sz="800" b="1" dirty="0">
-                <a:solidFill>
-                  <a:srgbClr val="9FB0C6"/>
+                  <a:srgbClr val="002060"/>
                 </a:solidFill>
               </a:rPr>
-              <a:t>No.  ·  Descripción de la Actividad  ·  Responsables  ·  Fecha de Cumplimiento</a:t>
+              <a:t>No.  ·  </a:t>
             </a:r>
-            <a:endParaRPr lang="en-US" sz="800" dirty="0"/>
+            <a:r>
+              <a:rPr lang="es-SV" sz="800" b="1" noProof="0" dirty="0" err="1">
+                <a:solidFill>
+                  <a:srgbClr val="002060"/>
+                </a:solidFill>
+              </a:rPr>
+              <a:t>Descripción</a:t>
+            </a:r>
+            <a:r>
+              <a:rPr lang="es-SV" sz="800" b="1" noProof="0" dirty="0">
+                <a:solidFill>
+                  <a:srgbClr val="002060"/>
+                </a:solidFill>
+              </a:rPr>
+              <a:t> de la Actividad  ·  Responsables  ·  Fecha de Cumplimiento</a:t>
+            </a:r>
+            <a:endParaRPr lang="es-SV" sz="800" noProof="0" dirty="0">
+              <a:solidFill>
+                <a:srgbClr val="002060"/>
+              </a:solidFill>
+            </a:endParaRPr>
           </a:p>
         </p:txBody>
       </p:sp>
@@ -6422,8 +6926,8 @@
         </p:nvSpPr>
         <p:spPr>
           <a:xfrm>
-            <a:off x="777240" y="4764024"/>
-            <a:ext cx="10637215" cy="0"/>
+            <a:off x="714330" y="4764024"/>
+            <a:ext cx="10700125" cy="0"/>
           </a:xfrm>
           <a:prstGeom prst="line">
             <a:avLst/>
@@ -6436,16 +6940,23 @@
             <a:prstDash val="dash"/>
           </a:ln>
         </p:spPr>
+        <p:txBody>
+          <a:bodyPr/>
+          <a:lstStyle/>
+          <a:p>
+            <a:endParaRPr lang="es-SV" noProof="0" dirty="0"/>
+          </a:p>
+        </p:txBody>
       </p:sp>
       <p:sp>
         <p:nvSpPr>
-          <p:cNvPr id="32" name="Shape 21"/>
+          <p:cNvPr id="36" name="Shape 25"/>
           <p:cNvSpPr/>
           <p:nvPr/>
         </p:nvSpPr>
         <p:spPr>
           <a:xfrm>
-            <a:off x="548640" y="4581144"/>
+            <a:off x="1622527" y="4581144"/>
             <a:ext cx="365760" cy="365760"/>
           </a:xfrm>
           <a:prstGeom prst="ellipse">
@@ -6461,16 +6972,23 @@
             <a:prstDash val="solid"/>
           </a:ln>
         </p:spPr>
+        <p:txBody>
+          <a:bodyPr/>
+          <a:lstStyle/>
+          <a:p>
+            <a:endParaRPr lang="es-SV" noProof="0" dirty="0"/>
+          </a:p>
+        </p:txBody>
       </p:sp>
       <p:sp>
         <p:nvSpPr>
-          <p:cNvPr id="33" name="Text 22"/>
+          <p:cNvPr id="37" name="Text 26"/>
           <p:cNvSpPr txBox="1"/>
           <p:nvPr/>
         </p:nvSpPr>
         <p:spPr>
           <a:xfrm>
-            <a:off x="548640" y="4581144"/>
+            <a:off x="1622527" y="4581144"/>
             <a:ext cx="365760" cy="365760"/>
           </a:xfrm>
           <a:prstGeom prst="rect">
@@ -6483,134 +7001,189 @@
           <a:bodyPr wrap="square" lIns="0" tIns="0" rIns="0" bIns="0" rtlCol="0" anchor="ctr"/>
           <a:lstStyle/>
           <a:p>
-            <a:pPr algn="ctr" indent="0" marL="0">
+            <a:pPr marL="0" indent="0" algn="ctr">
               <a:buNone/>
             </a:pPr>
             <a:r>
-              <a:rPr lang="en-US" sz="1200" b="1" dirty="0">
+              <a:rPr lang="es-SV" sz="1200" b="1" noProof="0" dirty="0">
                 <a:solidFill>
                   <a:srgbClr val="0B1220"/>
                 </a:solidFill>
               </a:rPr>
               <a:t>1</a:t>
             </a:r>
-            <a:endParaRPr lang="en-US" sz="1200" dirty="0"/>
+            <a:endParaRPr lang="es-SV" sz="1200" noProof="0" dirty="0"/>
           </a:p>
         </p:txBody>
       </p:sp>
-      <p:sp>
-        <p:nvSpPr>
-          <p:cNvPr id="34" name="Shape 23"/>
-          <p:cNvSpPr/>
-          <p:nvPr/>
-        </p:nvSpPr>
-        <p:spPr>
-          <a:xfrm>
-            <a:off x="457200" y="5074920"/>
-            <a:ext cx="2145731" cy="1600200"/>
-          </a:xfrm>
-          <a:prstGeom prst="roundRect">
-            <a:avLst>
-              <a:gd name="adj" fmla="val 4571"/>
-            </a:avLst>
-          </a:prstGeom>
-          <a:solidFill>
-            <a:srgbClr val="16233A"/>
-          </a:solidFill>
-          <a:ln w="9525">
+      <p:grpSp>
+        <p:nvGrpSpPr>
+          <p:cNvPr id="57" name="Grupo 56">
+            <a:extLst>
+              <a:ext uri="{FF2B5EF4-FFF2-40B4-BE49-F238E27FC236}">
+                <a16:creationId xmlns:a16="http://schemas.microsoft.com/office/drawing/2014/main" id="{FAB80F44-58EA-197F-291A-DC62B52114CD}"/>
+              </a:ext>
+            </a:extLst>
+          </p:cNvPr>
+          <p:cNvGrpSpPr/>
+          <p:nvPr/>
+        </p:nvGrpSpPr>
+        <p:grpSpPr>
+          <a:xfrm>
+            <a:off x="465542" y="5056632"/>
+            <a:ext cx="2679730" cy="1600200"/>
+            <a:chOff x="878007" y="5029200"/>
+            <a:chExt cx="2145731" cy="1600200"/>
+          </a:xfrm>
+        </p:grpSpPr>
+        <p:sp>
+          <p:nvSpPr>
+            <p:cNvPr id="38" name="Shape 27"/>
+            <p:cNvSpPr/>
+            <p:nvPr/>
+          </p:nvSpPr>
+          <p:spPr>
+            <a:xfrm>
+              <a:off x="878007" y="5029200"/>
+              <a:ext cx="2145731" cy="1600200"/>
+            </a:xfrm>
+            <a:prstGeom prst="roundRect">
+              <a:avLst>
+                <a:gd name="adj" fmla="val 4571"/>
+              </a:avLst>
+            </a:prstGeom>
             <a:solidFill>
               <a:srgbClr val="16233A"/>
             </a:solidFill>
-            <a:prstDash val="solid"/>
-          </a:ln>
-          <a:effectLst>
-            <a:outerShdw sx="100000" sy="100000" kx="0" ky="0" algn="bl" rotWithShape="0" blurRad="76200" dist="19050" dir="5400000">
-              <a:srgbClr val="000000">
-                <a:alpha val="35000"/>
-              </a:srgbClr>
-            </a:outerShdw>
-          </a:effectLst>
-        </p:spPr>
-      </p:sp>
+            <a:ln w="9525">
+              <a:solidFill>
+                <a:srgbClr val="16233A"/>
+              </a:solidFill>
+              <a:prstDash val="solid"/>
+            </a:ln>
+            <a:effectLst>
+              <a:outerShdw blurRad="76200" dist="19050" dir="5400000" algn="bl" rotWithShape="0">
+                <a:srgbClr val="000000">
+                  <a:alpha val="35000"/>
+                </a:srgbClr>
+              </a:outerShdw>
+            </a:effectLst>
+          </p:spPr>
+          <p:txBody>
+            <a:bodyPr/>
+            <a:lstStyle/>
+            <a:p>
+              <a:endParaRPr lang="es-SV" noProof="0" dirty="0"/>
+            </a:p>
+          </p:txBody>
+        </p:sp>
+        <p:sp>
+          <p:nvSpPr>
+            <p:cNvPr id="39" name="Text 28"/>
+            <p:cNvSpPr txBox="1"/>
+            <p:nvPr/>
+          </p:nvSpPr>
+          <p:spPr>
+            <a:xfrm>
+              <a:off x="987735" y="5102352"/>
+              <a:ext cx="1986682" cy="1481328"/>
+            </a:xfrm>
+            <a:prstGeom prst="rect">
+              <a:avLst/>
+            </a:prstGeom>
+            <a:noFill/>
+            <a:ln/>
+          </p:spPr>
+          <p:txBody>
+            <a:bodyPr wrap="square" lIns="0" tIns="0" rIns="0" bIns="0" rtlCol="0" anchor="t"/>
+            <a:lstStyle/>
+            <a:p>
+              <a:pPr marL="0" indent="0">
+                <a:spcAft>
+                  <a:spcPts val="300"/>
+                </a:spcAft>
+                <a:buNone/>
+              </a:pPr>
+              <a:r>
+                <a:rPr lang="es-SV" sz="1000" b="1" noProof="0" dirty="0">
+                  <a:solidFill>
+                    <a:srgbClr val="F5B841"/>
+                  </a:solidFill>
+                  <a:latin typeface="+mj-lt"/>
+                </a:rPr>
+                <a:t>Noviembre 2026</a:t>
+              </a:r>
+              <a:endParaRPr lang="es-SV" sz="1000" noProof="0" dirty="0">
+                <a:latin typeface="+mj-lt"/>
+              </a:endParaRPr>
+            </a:p>
+            <a:p>
+              <a:pPr marL="0" indent="0" algn="just">
+                <a:spcAft>
+                  <a:spcPts val="400"/>
+                </a:spcAft>
+                <a:buNone/>
+              </a:pPr>
+              <a:r>
+                <a:rPr lang="es-SV" sz="900" b="1" noProof="0" dirty="0">
+                  <a:solidFill>
+                    <a:srgbClr val="FFFFFF"/>
+                  </a:solidFill>
+                  <a:latin typeface="+mj-lt"/>
+                </a:rPr>
+                <a:t>Ejecución de la Prueba No. 3: Evaluación de Continuidad y Desempeño del Proveedor Crítico de Comunicaciones ante Interrupción Simulada de Conectividad.</a:t>
+              </a:r>
+              <a:endParaRPr lang="es-SV" sz="1000" noProof="0" dirty="0">
+                <a:latin typeface="+mj-lt"/>
+              </a:endParaRPr>
+            </a:p>
+            <a:p>
+              <a:pPr marL="0" indent="0">
+                <a:buNone/>
+              </a:pPr>
+              <a:r>
+                <a:rPr lang="es-SV" sz="800" noProof="0" dirty="0">
+                  <a:solidFill>
+                    <a:srgbClr val="9FB0C6"/>
+                  </a:solidFill>
+                  <a:latin typeface="+mj-lt"/>
+                </a:rPr>
+                <a:t>1. Gerente de Sistemas  2. Sub Gerente de Canales  3. Jefe de Análisis y Programación  4. Jefe de Operaciones y Soporte Técnico  5. Oficial de Seguridad de la Información  6. Jefe de </a:t>
+              </a:r>
+              <a:r>
+                <a:rPr lang="es-SV" sz="800" noProof="0" dirty="0" err="1">
+                  <a:solidFill>
+                    <a:srgbClr val="9FB0C6"/>
+                  </a:solidFill>
+                  <a:latin typeface="+mj-lt"/>
+                </a:rPr>
+                <a:t>Administracion</a:t>
+              </a:r>
+              <a:r>
+                <a:rPr lang="es-SV" sz="800" noProof="0" dirty="0">
+                  <a:solidFill>
+                    <a:srgbClr val="9FB0C6"/>
+                  </a:solidFill>
+                  <a:latin typeface="+mj-lt"/>
+                </a:rPr>
+                <a:t> de Riesgos</a:t>
+              </a:r>
+              <a:endParaRPr lang="es-SV" sz="1000" noProof="0" dirty="0">
+                <a:latin typeface="+mj-lt"/>
+              </a:endParaRPr>
+            </a:p>
+          </p:txBody>
+        </p:sp>
+      </p:grpSp>
       <p:sp>
         <p:nvSpPr>
-          <p:cNvPr id="35" name="Text 24"/>
-          <p:cNvSpPr txBox="1"/>
+          <p:cNvPr id="40" name="Shape 29"/>
+          <p:cNvSpPr/>
           <p:nvPr/>
         </p:nvSpPr>
         <p:spPr>
           <a:xfrm>
-            <a:off x="566928" y="5148072"/>
-            <a:ext cx="1926275" cy="1481328"/>
-          </a:xfrm>
-          <a:prstGeom prst="rect">
-            <a:avLst/>
-          </a:prstGeom>
-          <a:noFill/>
-          <a:ln/>
-        </p:spPr>
-        <p:txBody>
-          <a:bodyPr wrap="square" lIns="0" tIns="0" rIns="0" bIns="0" rtlCol="0" anchor="t"/>
-          <a:lstStyle/>
-          <a:p>
-            <a:pPr indent="0" marL="0">
-              <a:spcAft>
-                <a:spcPts val="300"/>
-              </a:spcAft>
-              <a:buNone/>
-            </a:pPr>
-            <a:r>
-              <a:rPr lang="en-US" sz="900" b="1" dirty="0">
-                <a:solidFill>
-                  <a:srgbClr val="F5B841"/>
-                </a:solidFill>
-              </a:rPr>
-              <a:t>Septiembre 2026</a:t>
-            </a:r>
-            <a:endParaRPr lang="en-US" sz="900" dirty="0"/>
-          </a:p>
-          <a:p>
-            <a:pPr indent="0" marL="0">
-              <a:spcAft>
-                <a:spcPts val="400"/>
-              </a:spcAft>
-              <a:buNone/>
-            </a:pPr>
-            <a:r>
-              <a:rPr lang="en-US" sz="850" b="1" dirty="0">
-                <a:solidFill>
-                  <a:srgbClr val="FFFFFF"/>
-                </a:solidFill>
-              </a:rPr>
-              <a:t>Reuniones con los líderes de ejecutar el Guión de Pruebas</a:t>
-            </a:r>
-            <a:endParaRPr lang="en-US" sz="900" dirty="0"/>
-          </a:p>
-          <a:p>
-            <a:pPr indent="0" marL="0">
-              <a:buNone/>
-            </a:pPr>
-            <a:r>
-              <a:rPr lang="en-US" sz="700" dirty="0">
-                <a:solidFill>
-                  <a:srgbClr val="9FB0C6"/>
-                </a:solidFill>
-              </a:rPr>
-              <a:t>1. Gerente General  2. Gerente de Sistemas  3. Sub Gerente de Canales  4. Coordinador de Programa de transformación Digital  5. Jefe de Soporte Tecnico.  6. Jefes de Analisis y Programacion  7. Administrador de Base de Datos  8. Jefe de Servicios Generales  9. Coordinador de Monitoreo  10. Jefe de Seguridad de la Información y Ciberseguridad  11. Auditor Interno  12. Jefe de Administración de Riesgos</a:t>
-            </a:r>
-            <a:endParaRPr lang="en-US" sz="900" dirty="0"/>
-          </a:p>
-        </p:txBody>
-      </p:sp>
-      <p:sp>
-        <p:nvSpPr>
-          <p:cNvPr id="36" name="Shape 25"/>
-          <p:cNvSpPr/>
-          <p:nvPr/>
-        </p:nvSpPr>
-        <p:spPr>
-          <a:xfrm>
-            <a:off x="2831531" y="4581144"/>
+            <a:off x="4541647" y="4581144"/>
             <a:ext cx="365760" cy="365760"/>
           </a:xfrm>
           <a:prstGeom prst="ellipse">
@@ -6626,16 +7199,23 @@
             <a:prstDash val="solid"/>
           </a:ln>
         </p:spPr>
+        <p:txBody>
+          <a:bodyPr/>
+          <a:lstStyle/>
+          <a:p>
+            <a:endParaRPr lang="es-SV" noProof="0" dirty="0"/>
+          </a:p>
+        </p:txBody>
       </p:sp>
       <p:sp>
         <p:nvSpPr>
-          <p:cNvPr id="37" name="Text 26"/>
+          <p:cNvPr id="41" name="Text 30"/>
           <p:cNvSpPr txBox="1"/>
           <p:nvPr/>
         </p:nvSpPr>
         <p:spPr>
           <a:xfrm>
-            <a:off x="2831531" y="4581144"/>
+            <a:off x="4541647" y="4581144"/>
             <a:ext cx="365760" cy="365760"/>
           </a:xfrm>
           <a:prstGeom prst="rect">
@@ -6648,134 +7228,171 @@
           <a:bodyPr wrap="square" lIns="0" tIns="0" rIns="0" bIns="0" rtlCol="0" anchor="ctr"/>
           <a:lstStyle/>
           <a:p>
-            <a:pPr algn="ctr" indent="0" marL="0">
+            <a:pPr marL="0" indent="0" algn="ctr">
               <a:buNone/>
             </a:pPr>
             <a:r>
-              <a:rPr lang="en-US" sz="1200" b="1" dirty="0">
+              <a:rPr lang="es-SV" sz="1200" b="1" noProof="0" dirty="0">
                 <a:solidFill>
                   <a:srgbClr val="0B1220"/>
                 </a:solidFill>
               </a:rPr>
               <a:t>2</a:t>
             </a:r>
-            <a:endParaRPr lang="en-US" sz="1200" dirty="0"/>
+            <a:endParaRPr lang="es-SV" sz="1200" noProof="0" dirty="0"/>
           </a:p>
         </p:txBody>
       </p:sp>
-      <p:sp>
-        <p:nvSpPr>
-          <p:cNvPr id="38" name="Shape 27"/>
-          <p:cNvSpPr/>
-          <p:nvPr/>
-        </p:nvSpPr>
-        <p:spPr>
-          <a:xfrm>
-            <a:off x="2740091" y="5074920"/>
-            <a:ext cx="2145731" cy="1600200"/>
-          </a:xfrm>
-          <a:prstGeom prst="roundRect">
-            <a:avLst>
-              <a:gd name="adj" fmla="val 4571"/>
-            </a:avLst>
-          </a:prstGeom>
-          <a:solidFill>
-            <a:srgbClr val="16233A"/>
-          </a:solidFill>
-          <a:ln w="9525">
+      <p:grpSp>
+        <p:nvGrpSpPr>
+          <p:cNvPr id="56" name="Grupo 55">
+            <a:extLst>
+              <a:ext uri="{FF2B5EF4-FFF2-40B4-BE49-F238E27FC236}">
+                <a16:creationId xmlns:a16="http://schemas.microsoft.com/office/drawing/2014/main" id="{C2295BB1-06B2-02A3-2EEA-8686A8D72351}"/>
+              </a:ext>
+            </a:extLst>
+          </p:cNvPr>
+          <p:cNvGrpSpPr/>
+          <p:nvPr/>
+        </p:nvGrpSpPr>
+        <p:grpSpPr>
+          <a:xfrm>
+            <a:off x="3384663" y="5052060"/>
+            <a:ext cx="2679729" cy="1600200"/>
+            <a:chOff x="3160898" y="5029200"/>
+            <a:chExt cx="2145731" cy="1600200"/>
+          </a:xfrm>
+        </p:grpSpPr>
+        <p:sp>
+          <p:nvSpPr>
+            <p:cNvPr id="42" name="Shape 31"/>
+            <p:cNvSpPr/>
+            <p:nvPr/>
+          </p:nvSpPr>
+          <p:spPr>
+            <a:xfrm>
+              <a:off x="3160898" y="5029200"/>
+              <a:ext cx="2145731" cy="1600200"/>
+            </a:xfrm>
+            <a:prstGeom prst="roundRect">
+              <a:avLst>
+                <a:gd name="adj" fmla="val 4571"/>
+              </a:avLst>
+            </a:prstGeom>
             <a:solidFill>
               <a:srgbClr val="16233A"/>
             </a:solidFill>
-            <a:prstDash val="solid"/>
-          </a:ln>
-          <a:effectLst>
-            <a:outerShdw sx="100000" sy="100000" kx="0" ky="0" algn="bl" rotWithShape="0" blurRad="76200" dist="19050" dir="5400000">
-              <a:srgbClr val="000000">
-                <a:alpha val="35000"/>
-              </a:srgbClr>
-            </a:outerShdw>
-          </a:effectLst>
-        </p:spPr>
-      </p:sp>
+            <a:ln w="9525">
+              <a:solidFill>
+                <a:srgbClr val="16233A"/>
+              </a:solidFill>
+              <a:prstDash val="solid"/>
+            </a:ln>
+            <a:effectLst>
+              <a:outerShdw blurRad="76200" dist="19050" dir="5400000" algn="bl" rotWithShape="0">
+                <a:srgbClr val="000000">
+                  <a:alpha val="35000"/>
+                </a:srgbClr>
+              </a:outerShdw>
+            </a:effectLst>
+          </p:spPr>
+          <p:txBody>
+            <a:bodyPr/>
+            <a:lstStyle/>
+            <a:p>
+              <a:endParaRPr lang="es-SV" noProof="0" dirty="0"/>
+            </a:p>
+          </p:txBody>
+        </p:sp>
+        <p:sp>
+          <p:nvSpPr>
+            <p:cNvPr id="43" name="Text 32"/>
+            <p:cNvSpPr txBox="1"/>
+            <p:nvPr/>
+          </p:nvSpPr>
+          <p:spPr>
+            <a:xfrm>
+              <a:off x="3270626" y="5102351"/>
+              <a:ext cx="1926275" cy="884963"/>
+            </a:xfrm>
+            <a:prstGeom prst="rect">
+              <a:avLst/>
+            </a:prstGeom>
+            <a:noFill/>
+            <a:ln/>
+          </p:spPr>
+          <p:txBody>
+            <a:bodyPr wrap="square" lIns="0" tIns="0" rIns="0" bIns="0" rtlCol="0" anchor="t"/>
+            <a:lstStyle/>
+            <a:p>
+              <a:pPr marL="0" indent="0" algn="just">
+                <a:spcAft>
+                  <a:spcPts val="300"/>
+                </a:spcAft>
+                <a:buNone/>
+              </a:pPr>
+              <a:r>
+                <a:rPr lang="es-SV" sz="900" b="1" noProof="0" dirty="0">
+                  <a:solidFill>
+                    <a:srgbClr val="F5B841"/>
+                  </a:solidFill>
+                  <a:latin typeface="+mj-lt"/>
+                </a:rPr>
+                <a:t>Noviembre 2026</a:t>
+              </a:r>
+              <a:endParaRPr lang="es-SV" sz="900" noProof="0" dirty="0">
+                <a:latin typeface="+mj-lt"/>
+              </a:endParaRPr>
+            </a:p>
+            <a:p>
+              <a:pPr marL="0" indent="0" algn="just">
+                <a:spcAft>
+                  <a:spcPts val="400"/>
+                </a:spcAft>
+                <a:buNone/>
+              </a:pPr>
+              <a:r>
+                <a:rPr lang="es-SV" sz="900" b="1" noProof="0" dirty="0">
+                  <a:solidFill>
+                    <a:srgbClr val="FFFFFF"/>
+                  </a:solidFill>
+                  <a:latin typeface="+mj-lt"/>
+                </a:rPr>
+                <a:t>Elaboración y presentación de informes de resultados por los responsables de cada prueba</a:t>
+              </a:r>
+              <a:endParaRPr lang="es-SV" sz="900" noProof="0" dirty="0">
+                <a:latin typeface="+mj-lt"/>
+              </a:endParaRPr>
+            </a:p>
+            <a:p>
+              <a:pPr marL="0" indent="0" algn="just">
+                <a:buNone/>
+              </a:pPr>
+              <a:r>
+                <a:rPr lang="es-SV" sz="800" noProof="0" dirty="0">
+                  <a:solidFill>
+                    <a:srgbClr val="9FB0C6"/>
+                  </a:solidFill>
+                  <a:latin typeface="+mj-lt"/>
+                </a:rPr>
+                <a:t>1. Gerente de Sistemas</a:t>
+              </a:r>
+              <a:endParaRPr lang="es-SV" sz="1000" noProof="0" dirty="0">
+                <a:latin typeface="+mj-lt"/>
+              </a:endParaRPr>
+            </a:p>
+          </p:txBody>
+        </p:sp>
+      </p:grpSp>
       <p:sp>
         <p:nvSpPr>
-          <p:cNvPr id="39" name="Text 28"/>
-          <p:cNvSpPr txBox="1"/>
+          <p:cNvPr id="44" name="Shape 33"/>
+          <p:cNvSpPr/>
           <p:nvPr/>
         </p:nvSpPr>
         <p:spPr>
           <a:xfrm>
-            <a:off x="2849819" y="5148072"/>
-            <a:ext cx="1926275" cy="1481328"/>
-          </a:xfrm>
-          <a:prstGeom prst="rect">
-            <a:avLst/>
-          </a:prstGeom>
-          <a:noFill/>
-          <a:ln/>
-        </p:spPr>
-        <p:txBody>
-          <a:bodyPr wrap="square" lIns="0" tIns="0" rIns="0" bIns="0" rtlCol="0" anchor="t"/>
-          <a:lstStyle/>
-          <a:p>
-            <a:pPr indent="0" marL="0">
-              <a:spcAft>
-                <a:spcPts val="300"/>
-              </a:spcAft>
-              <a:buNone/>
-            </a:pPr>
-            <a:r>
-              <a:rPr lang="en-US" sz="900" b="1" dirty="0">
-                <a:solidFill>
-                  <a:srgbClr val="F5B841"/>
-                </a:solidFill>
-              </a:rPr>
-              <a:t>Noviembre 2026</a:t>
-            </a:r>
-            <a:endParaRPr lang="en-US" sz="900" dirty="0"/>
-          </a:p>
-          <a:p>
-            <a:pPr indent="0" marL="0">
-              <a:spcAft>
-                <a:spcPts val="400"/>
-              </a:spcAft>
-              <a:buNone/>
-            </a:pPr>
-            <a:r>
-              <a:rPr lang="en-US" sz="850" b="1" dirty="0">
-                <a:solidFill>
-                  <a:srgbClr val="FFFFFF"/>
-                </a:solidFill>
-              </a:rPr>
-              <a:t>Ejecución de la Prueba No. 3: Evaluación de Continuidad y Desempeño del Proveedor Crítico de Comunicaciones ante Interrupción Simulada de Conectividad.</a:t>
-            </a:r>
-            <a:endParaRPr lang="en-US" sz="900" dirty="0"/>
-          </a:p>
-          <a:p>
-            <a:pPr indent="0" marL="0">
-              <a:buNone/>
-            </a:pPr>
-            <a:r>
-              <a:rPr lang="en-US" sz="700" dirty="0">
-                <a:solidFill>
-                  <a:srgbClr val="9FB0C6"/>
-                </a:solidFill>
-              </a:rPr>
-              <a:t>1. Gerente de Sistemas  2. Sub Gerente de Canales  3. Jefe de Análisis y Programación  4. Jefe de Operaciones y Soporte Técnico  5. Oficial de Seguridad de la Información  6. Jefe de Administracion de Riesgos</a:t>
-            </a:r>
-            <a:endParaRPr lang="en-US" sz="900" dirty="0"/>
-          </a:p>
-        </p:txBody>
-      </p:sp>
-      <p:sp>
-        <p:nvSpPr>
-          <p:cNvPr id="40" name="Shape 29"/>
-          <p:cNvSpPr/>
-          <p:nvPr/>
-        </p:nvSpPr>
-        <p:spPr>
-          <a:xfrm>
-            <a:off x="5114422" y="4581144"/>
+            <a:off x="7460767" y="4581144"/>
             <a:ext cx="365760" cy="365760"/>
           </a:xfrm>
           <a:prstGeom prst="ellipse">
@@ -6791,16 +7408,23 @@
             <a:prstDash val="solid"/>
           </a:ln>
         </p:spPr>
+        <p:txBody>
+          <a:bodyPr/>
+          <a:lstStyle/>
+          <a:p>
+            <a:endParaRPr lang="es-SV" noProof="0" dirty="0"/>
+          </a:p>
+        </p:txBody>
       </p:sp>
       <p:sp>
         <p:nvSpPr>
-          <p:cNvPr id="41" name="Text 30"/>
+          <p:cNvPr id="45" name="Text 34"/>
           <p:cNvSpPr txBox="1"/>
           <p:nvPr/>
         </p:nvSpPr>
         <p:spPr>
           <a:xfrm>
-            <a:off x="5114422" y="4581144"/>
+            <a:off x="7460767" y="4581144"/>
             <a:ext cx="365760" cy="365760"/>
           </a:xfrm>
           <a:prstGeom prst="rect">
@@ -6813,134 +7437,225 @@
           <a:bodyPr wrap="square" lIns="0" tIns="0" rIns="0" bIns="0" rtlCol="0" anchor="ctr"/>
           <a:lstStyle/>
           <a:p>
-            <a:pPr algn="ctr" indent="0" marL="0">
+            <a:pPr marL="0" indent="0" algn="ctr">
               <a:buNone/>
             </a:pPr>
             <a:r>
-              <a:rPr lang="en-US" sz="1200" b="1" dirty="0">
+              <a:rPr lang="es-SV" sz="1200" b="1" noProof="0" dirty="0">
                 <a:solidFill>
                   <a:srgbClr val="0B1220"/>
                 </a:solidFill>
               </a:rPr>
               <a:t>3</a:t>
             </a:r>
-            <a:endParaRPr lang="en-US" sz="1200" dirty="0"/>
+            <a:endParaRPr lang="es-SV" sz="1200" noProof="0" dirty="0"/>
           </a:p>
         </p:txBody>
       </p:sp>
-      <p:sp>
-        <p:nvSpPr>
-          <p:cNvPr id="42" name="Shape 31"/>
-          <p:cNvSpPr/>
-          <p:nvPr/>
-        </p:nvSpPr>
-        <p:spPr>
-          <a:xfrm>
-            <a:off x="5022982" y="5074920"/>
-            <a:ext cx="2145731" cy="1600200"/>
-          </a:xfrm>
-          <a:prstGeom prst="roundRect">
-            <a:avLst>
-              <a:gd name="adj" fmla="val 4571"/>
-            </a:avLst>
-          </a:prstGeom>
-          <a:solidFill>
-            <a:srgbClr val="16233A"/>
-          </a:solidFill>
-          <a:ln w="9525">
+      <p:grpSp>
+        <p:nvGrpSpPr>
+          <p:cNvPr id="55" name="Grupo 54">
+            <a:extLst>
+              <a:ext uri="{FF2B5EF4-FFF2-40B4-BE49-F238E27FC236}">
+                <a16:creationId xmlns:a16="http://schemas.microsoft.com/office/drawing/2014/main" id="{47DE344E-2F1C-E246-453D-334E098089AD}"/>
+              </a:ext>
+            </a:extLst>
+          </p:cNvPr>
+          <p:cNvGrpSpPr/>
+          <p:nvPr/>
+        </p:nvGrpSpPr>
+        <p:grpSpPr>
+          <a:xfrm>
+            <a:off x="6303783" y="5056632"/>
+            <a:ext cx="2679729" cy="1600200"/>
+            <a:chOff x="5443789" y="5029200"/>
+            <a:chExt cx="2145731" cy="1600200"/>
+          </a:xfrm>
+        </p:grpSpPr>
+        <p:sp>
+          <p:nvSpPr>
+            <p:cNvPr id="46" name="Shape 35"/>
+            <p:cNvSpPr/>
+            <p:nvPr/>
+          </p:nvSpPr>
+          <p:spPr>
+            <a:xfrm>
+              <a:off x="5443789" y="5029200"/>
+              <a:ext cx="2145731" cy="1600200"/>
+            </a:xfrm>
+            <a:prstGeom prst="roundRect">
+              <a:avLst>
+                <a:gd name="adj" fmla="val 4571"/>
+              </a:avLst>
+            </a:prstGeom>
             <a:solidFill>
               <a:srgbClr val="16233A"/>
             </a:solidFill>
-            <a:prstDash val="solid"/>
-          </a:ln>
-          <a:effectLst>
-            <a:outerShdw sx="100000" sy="100000" kx="0" ky="0" algn="bl" rotWithShape="0" blurRad="76200" dist="19050" dir="5400000">
-              <a:srgbClr val="000000">
-                <a:alpha val="35000"/>
-              </a:srgbClr>
-            </a:outerShdw>
-          </a:effectLst>
-        </p:spPr>
-      </p:sp>
+            <a:ln w="9525">
+              <a:solidFill>
+                <a:srgbClr val="16233A"/>
+              </a:solidFill>
+              <a:prstDash val="solid"/>
+            </a:ln>
+            <a:effectLst>
+              <a:outerShdw blurRad="76200" dist="19050" dir="5400000" algn="bl" rotWithShape="0">
+                <a:srgbClr val="000000">
+                  <a:alpha val="35000"/>
+                </a:srgbClr>
+              </a:outerShdw>
+            </a:effectLst>
+          </p:spPr>
+          <p:txBody>
+            <a:bodyPr/>
+            <a:lstStyle/>
+            <a:p>
+              <a:endParaRPr lang="es-SV" noProof="0" dirty="0"/>
+            </a:p>
+          </p:txBody>
+        </p:sp>
+        <p:sp>
+          <p:nvSpPr>
+            <p:cNvPr id="47" name="Text 36"/>
+            <p:cNvSpPr txBox="1"/>
+            <p:nvPr/>
+          </p:nvSpPr>
+          <p:spPr>
+            <a:xfrm>
+              <a:off x="5553516" y="5102352"/>
+              <a:ext cx="1984676" cy="1481328"/>
+            </a:xfrm>
+            <a:prstGeom prst="rect">
+              <a:avLst/>
+            </a:prstGeom>
+            <a:noFill/>
+            <a:ln/>
+          </p:spPr>
+          <p:txBody>
+            <a:bodyPr wrap="square" lIns="0" tIns="0" rIns="0" bIns="0" rtlCol="0" anchor="t"/>
+            <a:lstStyle/>
+            <a:p>
+              <a:pPr marL="0" indent="0">
+                <a:spcAft>
+                  <a:spcPts val="300"/>
+                </a:spcAft>
+                <a:buNone/>
+              </a:pPr>
+              <a:r>
+                <a:rPr lang="es-SV" sz="1000" b="1" noProof="0" dirty="0">
+                  <a:solidFill>
+                    <a:srgbClr val="F5B841"/>
+                  </a:solidFill>
+                  <a:latin typeface="+mj-lt"/>
+                </a:rPr>
+                <a:t>Noviembre 2026</a:t>
+              </a:r>
+              <a:endParaRPr lang="es-SV" sz="1000" noProof="0" dirty="0">
+                <a:latin typeface="+mj-lt"/>
+              </a:endParaRPr>
+            </a:p>
+            <a:p>
+              <a:pPr marL="0" indent="0" algn="just">
+                <a:spcAft>
+                  <a:spcPts val="400"/>
+                </a:spcAft>
+                <a:buNone/>
+              </a:pPr>
+              <a:r>
+                <a:rPr lang="es-SV" sz="900" b="1" noProof="0" dirty="0">
+                  <a:solidFill>
+                    <a:srgbClr val="FFFFFF"/>
+                  </a:solidFill>
+                  <a:latin typeface="+mj-lt"/>
+                </a:rPr>
+                <a:t>Reunión Equipo de Respuesta a Incidentes sobre los resultados de las pruebas</a:t>
+              </a:r>
+              <a:endParaRPr lang="es-SV" sz="1000" noProof="0" dirty="0">
+                <a:latin typeface="+mj-lt"/>
+              </a:endParaRPr>
+            </a:p>
+            <a:p>
+              <a:pPr marL="0" indent="0" algn="just">
+                <a:buNone/>
+              </a:pPr>
+              <a:r>
+                <a:rPr lang="es-SV" sz="800" noProof="0" dirty="0">
+                  <a:solidFill>
+                    <a:srgbClr val="9FB0C6"/>
+                  </a:solidFill>
+                  <a:latin typeface="+mj-lt"/>
+                </a:rPr>
+                <a:t>1. Gerente General  2. Gerente de Sistemas  3. Sub Gerente de Canales  4. Coordinador de Programa de transformación Digital  5. Jefe de Soporte </a:t>
+              </a:r>
+              <a:r>
+                <a:rPr lang="es-SV" sz="800" noProof="0" dirty="0" err="1">
+                  <a:solidFill>
+                    <a:srgbClr val="9FB0C6"/>
+                  </a:solidFill>
+                  <a:latin typeface="+mj-lt"/>
+                </a:rPr>
+                <a:t>Tecnico</a:t>
+              </a:r>
+              <a:r>
+                <a:rPr lang="es-SV" sz="800" noProof="0" dirty="0">
+                  <a:solidFill>
+                    <a:srgbClr val="9FB0C6"/>
+                  </a:solidFill>
+                  <a:latin typeface="+mj-lt"/>
+                </a:rPr>
+                <a:t>.  6. Jefes de </a:t>
+              </a:r>
+              <a:r>
+                <a:rPr lang="es-SV" sz="800" noProof="0" dirty="0" err="1">
+                  <a:solidFill>
+                    <a:srgbClr val="9FB0C6"/>
+                  </a:solidFill>
+                  <a:latin typeface="+mj-lt"/>
+                </a:rPr>
+                <a:t>Analisis</a:t>
+              </a:r>
+              <a:r>
+                <a:rPr lang="es-SV" sz="800" noProof="0" dirty="0">
+                  <a:solidFill>
+                    <a:srgbClr val="9FB0C6"/>
+                  </a:solidFill>
+                  <a:latin typeface="+mj-lt"/>
+                </a:rPr>
+                <a:t> y </a:t>
+              </a:r>
+              <a:r>
+                <a:rPr lang="es-SV" sz="800" noProof="0" dirty="0" err="1">
+                  <a:solidFill>
+                    <a:srgbClr val="9FB0C6"/>
+                  </a:solidFill>
+                  <a:latin typeface="+mj-lt"/>
+                </a:rPr>
+                <a:t>Programacion</a:t>
+              </a:r>
+              <a:r>
+                <a:rPr lang="es-SV" sz="800" noProof="0" dirty="0">
+                  <a:solidFill>
+                    <a:srgbClr val="9FB0C6"/>
+                  </a:solidFill>
+                  <a:latin typeface="+mj-lt"/>
+                </a:rPr>
+                <a:t>  7. Administrador de Base de Datos  8. Jefe de Servicios Generales  9. Coordinador de Monitoreo  10. Jefe de Seguridad de la Información y Ciberseguridad  11. Auditor Interno  12. Jefe de Administración de Riesgos</a:t>
+              </a:r>
+              <a:endParaRPr lang="es-SV" sz="1000" noProof="0" dirty="0">
+                <a:latin typeface="+mj-lt"/>
+              </a:endParaRPr>
+            </a:p>
+          </p:txBody>
+        </p:sp>
+      </p:grpSp>
       <p:sp>
         <p:nvSpPr>
-          <p:cNvPr id="43" name="Text 32"/>
-          <p:cNvSpPr txBox="1"/>
+          <p:cNvPr id="48" name="Shape 37"/>
+          <p:cNvSpPr/>
           <p:nvPr/>
         </p:nvSpPr>
         <p:spPr>
           <a:xfrm>
-            <a:off x="5132710" y="5148072"/>
-            <a:ext cx="1926275" cy="1481328"/>
-          </a:xfrm>
-          <a:prstGeom prst="rect">
-            <a:avLst/>
-          </a:prstGeom>
-          <a:noFill/>
-          <a:ln/>
-        </p:spPr>
-        <p:txBody>
-          <a:bodyPr wrap="square" lIns="0" tIns="0" rIns="0" bIns="0" rtlCol="0" anchor="t"/>
-          <a:lstStyle/>
-          <a:p>
-            <a:pPr indent="0" marL="0">
-              <a:spcAft>
-                <a:spcPts val="300"/>
-              </a:spcAft>
-              <a:buNone/>
-            </a:pPr>
-            <a:r>
-              <a:rPr lang="en-US" sz="900" b="1" dirty="0">
-                <a:solidFill>
-                  <a:srgbClr val="F5B841"/>
-                </a:solidFill>
-              </a:rPr>
-              <a:t>Noviembre 2026</a:t>
-            </a:r>
-            <a:endParaRPr lang="en-US" sz="900" dirty="0"/>
-          </a:p>
-          <a:p>
-            <a:pPr indent="0" marL="0">
-              <a:spcAft>
-                <a:spcPts val="400"/>
-              </a:spcAft>
-              <a:buNone/>
-            </a:pPr>
-            <a:r>
-              <a:rPr lang="en-US" sz="850" b="1" dirty="0">
-                <a:solidFill>
-                  <a:srgbClr val="FFFFFF"/>
-                </a:solidFill>
-              </a:rPr>
-              <a:t>Elaboración y presentación de informes de resultados por los responsables de cada prueba</a:t>
-            </a:r>
-            <a:endParaRPr lang="en-US" sz="900" dirty="0"/>
-          </a:p>
-          <a:p>
-            <a:pPr indent="0" marL="0">
-              <a:buNone/>
-            </a:pPr>
-            <a:r>
-              <a:rPr lang="en-US" sz="700" dirty="0">
-                <a:solidFill>
-                  <a:srgbClr val="9FB0C6"/>
-                </a:solidFill>
-              </a:rPr>
-              <a:t>1. Gerente de Sistemas</a:t>
-            </a:r>
-            <a:endParaRPr lang="en-US" sz="900" dirty="0"/>
-          </a:p>
-        </p:txBody>
-      </p:sp>
-      <p:sp>
-        <p:nvSpPr>
-          <p:cNvPr id="44" name="Shape 33"/>
-          <p:cNvSpPr/>
-          <p:nvPr/>
-        </p:nvSpPr>
-        <p:spPr>
-          <a:xfrm>
-            <a:off x="7397313" y="4581144"/>
+            <a:off x="10379887" y="4581144"/>
             <a:ext cx="365760" cy="365760"/>
           </a:xfrm>
           <a:prstGeom prst="ellipse">
@@ -6956,16 +7671,23 @@
             <a:prstDash val="solid"/>
           </a:ln>
         </p:spPr>
+        <p:txBody>
+          <a:bodyPr/>
+          <a:lstStyle/>
+          <a:p>
+            <a:endParaRPr lang="es-SV" noProof="0" dirty="0"/>
+          </a:p>
+        </p:txBody>
       </p:sp>
       <p:sp>
         <p:nvSpPr>
-          <p:cNvPr id="45" name="Text 34"/>
+          <p:cNvPr id="49" name="Text 38"/>
           <p:cNvSpPr txBox="1"/>
           <p:nvPr/>
         </p:nvSpPr>
         <p:spPr>
           <a:xfrm>
-            <a:off x="7397313" y="4581144"/>
+            <a:off x="10379887" y="4581144"/>
             <a:ext cx="365760" cy="365760"/>
           </a:xfrm>
           <a:prstGeom prst="rect">
@@ -6978,287 +7700,224 @@
           <a:bodyPr wrap="square" lIns="0" tIns="0" rIns="0" bIns="0" rtlCol="0" anchor="ctr"/>
           <a:lstStyle/>
           <a:p>
-            <a:pPr algn="ctr" indent="0" marL="0">
+            <a:pPr marL="0" indent="0" algn="ctr">
               <a:buNone/>
             </a:pPr>
             <a:r>
-              <a:rPr lang="en-US" sz="1200" b="1" dirty="0">
+              <a:rPr lang="es-SV" sz="1200" b="1" noProof="0" dirty="0">
                 <a:solidFill>
                   <a:srgbClr val="0B1220"/>
                 </a:solidFill>
               </a:rPr>
               <a:t>4</a:t>
             </a:r>
-            <a:endParaRPr lang="en-US" sz="1200" dirty="0"/>
+            <a:endParaRPr lang="es-SV" sz="1200" noProof="0" dirty="0"/>
           </a:p>
         </p:txBody>
       </p:sp>
-      <p:sp>
-        <p:nvSpPr>
-          <p:cNvPr id="46" name="Shape 35"/>
-          <p:cNvSpPr/>
-          <p:nvPr/>
-        </p:nvSpPr>
-        <p:spPr>
-          <a:xfrm>
-            <a:off x="7305873" y="5074920"/>
-            <a:ext cx="2145731" cy="1600200"/>
-          </a:xfrm>
-          <a:prstGeom prst="roundRect">
-            <a:avLst>
-              <a:gd name="adj" fmla="val 4571"/>
-            </a:avLst>
-          </a:prstGeom>
-          <a:solidFill>
-            <a:srgbClr val="16233A"/>
-          </a:solidFill>
-          <a:ln w="9525">
+      <p:grpSp>
+        <p:nvGrpSpPr>
+          <p:cNvPr id="54" name="Grupo 53">
+            <a:extLst>
+              <a:ext uri="{FF2B5EF4-FFF2-40B4-BE49-F238E27FC236}">
+                <a16:creationId xmlns:a16="http://schemas.microsoft.com/office/drawing/2014/main" id="{163A99E2-5369-B338-AD3C-04C1EDE2FD54}"/>
+              </a:ext>
+            </a:extLst>
+          </p:cNvPr>
+          <p:cNvGrpSpPr/>
+          <p:nvPr/>
+        </p:nvGrpSpPr>
+        <p:grpSpPr>
+          <a:xfrm>
+            <a:off x="9222903" y="5052060"/>
+            <a:ext cx="2679729" cy="1600200"/>
+            <a:chOff x="7726680" y="5029200"/>
+            <a:chExt cx="2145731" cy="1600200"/>
+          </a:xfrm>
+        </p:grpSpPr>
+        <p:sp>
+          <p:nvSpPr>
+            <p:cNvPr id="50" name="Shape 39"/>
+            <p:cNvSpPr/>
+            <p:nvPr/>
+          </p:nvSpPr>
+          <p:spPr>
+            <a:xfrm>
+              <a:off x="7726680" y="5029200"/>
+              <a:ext cx="2145731" cy="1600200"/>
+            </a:xfrm>
+            <a:prstGeom prst="roundRect">
+              <a:avLst>
+                <a:gd name="adj" fmla="val 4571"/>
+              </a:avLst>
+            </a:prstGeom>
             <a:solidFill>
               <a:srgbClr val="16233A"/>
             </a:solidFill>
-            <a:prstDash val="solid"/>
-          </a:ln>
-          <a:effectLst>
-            <a:outerShdw sx="100000" sy="100000" kx="0" ky="0" algn="bl" rotWithShape="0" blurRad="76200" dist="19050" dir="5400000">
-              <a:srgbClr val="000000">
-                <a:alpha val="35000"/>
-              </a:srgbClr>
-            </a:outerShdw>
-          </a:effectLst>
-        </p:spPr>
-      </p:sp>
+            <a:ln w="9525">
+              <a:solidFill>
+                <a:srgbClr val="16233A"/>
+              </a:solidFill>
+              <a:prstDash val="solid"/>
+            </a:ln>
+            <a:effectLst>
+              <a:outerShdw blurRad="76200" dist="19050" dir="5400000" algn="bl" rotWithShape="0">
+                <a:srgbClr val="000000">
+                  <a:alpha val="35000"/>
+                </a:srgbClr>
+              </a:outerShdw>
+            </a:effectLst>
+          </p:spPr>
+          <p:txBody>
+            <a:bodyPr/>
+            <a:lstStyle/>
+            <a:p>
+              <a:endParaRPr lang="es-SV" noProof="0" dirty="0"/>
+            </a:p>
+          </p:txBody>
+        </p:sp>
+        <p:sp>
+          <p:nvSpPr>
+            <p:cNvPr id="51" name="Text 40"/>
+            <p:cNvSpPr txBox="1"/>
+            <p:nvPr/>
+          </p:nvSpPr>
+          <p:spPr>
+            <a:xfrm>
+              <a:off x="7836408" y="5102352"/>
+              <a:ext cx="1926275" cy="1481328"/>
+            </a:xfrm>
+            <a:prstGeom prst="rect">
+              <a:avLst/>
+            </a:prstGeom>
+            <a:noFill/>
+            <a:ln/>
+          </p:spPr>
+          <p:txBody>
+            <a:bodyPr wrap="square" lIns="0" tIns="0" rIns="0" bIns="0" rtlCol="0" anchor="t"/>
+            <a:lstStyle/>
+            <a:p>
+              <a:pPr marL="0" indent="0" algn="just">
+                <a:spcAft>
+                  <a:spcPts val="300"/>
+                </a:spcAft>
+                <a:buNone/>
+              </a:pPr>
+              <a:r>
+                <a:rPr lang="es-SV" sz="1050" b="1" noProof="0" dirty="0">
+                  <a:solidFill>
+                    <a:srgbClr val="F5B841"/>
+                  </a:solidFill>
+                  <a:latin typeface="+mj-lt"/>
+                </a:rPr>
+                <a:t>Diciembre 2026</a:t>
+              </a:r>
+              <a:endParaRPr lang="es-SV" sz="1050" noProof="0" dirty="0">
+                <a:latin typeface="+mj-lt"/>
+              </a:endParaRPr>
+            </a:p>
+            <a:p>
+              <a:pPr marL="0" indent="0" algn="just">
+                <a:spcAft>
+                  <a:spcPts val="400"/>
+                </a:spcAft>
+                <a:buNone/>
+              </a:pPr>
+              <a:r>
+                <a:rPr lang="es-SV" sz="1000" b="1" noProof="0" dirty="0">
+                  <a:solidFill>
+                    <a:srgbClr val="FFFFFF"/>
+                  </a:solidFill>
+                  <a:latin typeface="+mj-lt"/>
+                </a:rPr>
+                <a:t>Informes de resultados de la prueba</a:t>
+              </a:r>
+              <a:endParaRPr lang="es-SV" sz="1050" noProof="0" dirty="0">
+                <a:latin typeface="+mj-lt"/>
+              </a:endParaRPr>
+            </a:p>
+            <a:p>
+              <a:pPr marL="0" indent="0" algn="just">
+                <a:buNone/>
+              </a:pPr>
+              <a:r>
+                <a:rPr lang="es-SV" sz="900" noProof="0" dirty="0">
+                  <a:solidFill>
+                    <a:srgbClr val="9FB0C6"/>
+                  </a:solidFill>
+                  <a:latin typeface="+mj-lt"/>
+                </a:rPr>
+                <a:t>Jefe de Administración de Riesgos</a:t>
+              </a:r>
+              <a:endParaRPr lang="es-SV" sz="1050" noProof="0" dirty="0">
+                <a:latin typeface="+mj-lt"/>
+              </a:endParaRPr>
+            </a:p>
+          </p:txBody>
+        </p:sp>
+      </p:grpSp>
       <p:sp>
         <p:nvSpPr>
-          <p:cNvPr id="47" name="Text 36"/>
-          <p:cNvSpPr txBox="1"/>
+          <p:cNvPr id="53" name="Freeform 11">
+            <a:extLst>
+              <a:ext uri="{FF2B5EF4-FFF2-40B4-BE49-F238E27FC236}">
+                <a16:creationId xmlns:a16="http://schemas.microsoft.com/office/drawing/2014/main" id="{75E927EE-8E7A-544A-FC27-B58EC66527C6}"/>
+              </a:ext>
+            </a:extLst>
+          </p:cNvPr>
+          <p:cNvSpPr/>
           <p:nvPr/>
         </p:nvSpPr>
         <p:spPr>
           <a:xfrm>
-            <a:off x="7415601" y="5148072"/>
-            <a:ext cx="1926275" cy="1481328"/>
-          </a:xfrm>
-          <a:prstGeom prst="rect">
+            <a:off x="10138847" y="-99476"/>
+            <a:ext cx="1759347" cy="1219616"/>
+          </a:xfrm>
+          <a:custGeom>
             <a:avLst/>
-          </a:prstGeom>
-          <a:noFill/>
-          <a:ln/>
+            <a:gdLst/>
+            <a:ahLst/>
+            <a:cxnLst/>
+            <a:rect l="l" t="t" r="r" b="b"/>
+            <a:pathLst>
+              <a:path w="5067635" h="3714752">
+                <a:moveTo>
+                  <a:pt x="0" y="0"/>
+                </a:moveTo>
+                <a:lnTo>
+                  <a:pt x="5067636" y="0"/>
+                </a:lnTo>
+                <a:lnTo>
+                  <a:pt x="5067636" y="3714751"/>
+                </a:lnTo>
+                <a:lnTo>
+                  <a:pt x="0" y="3714751"/>
+                </a:lnTo>
+                <a:lnTo>
+                  <a:pt x="0" y="0"/>
+                </a:lnTo>
+                <a:close/>
+              </a:path>
+            </a:pathLst>
+          </a:custGeom>
+          <a:blipFill>
+            <a:blip r:embed="rId5"/>
+            <a:stretch>
+              <a:fillRect/>
+            </a:stretch>
+          </a:blipFill>
         </p:spPr>
         <p:txBody>
-          <a:bodyPr wrap="square" lIns="0" tIns="0" rIns="0" bIns="0" rtlCol="0" anchor="t"/>
+          <a:bodyPr/>
           <a:lstStyle/>
           <a:p>
-            <a:pPr indent="0" marL="0">
-              <a:spcAft>
-                <a:spcPts val="300"/>
-              </a:spcAft>
-              <a:buNone/>
-            </a:pPr>
-            <a:r>
-              <a:rPr lang="en-US" sz="900" b="1" dirty="0">
-                <a:solidFill>
-                  <a:srgbClr val="F5B841"/>
-                </a:solidFill>
-              </a:rPr>
-              <a:t>Noviembre 2026</a:t>
-            </a:r>
-            <a:endParaRPr lang="en-US" sz="900" dirty="0"/>
-          </a:p>
-          <a:p>
-            <a:pPr indent="0" marL="0">
-              <a:spcAft>
-                <a:spcPts val="400"/>
-              </a:spcAft>
-              <a:buNone/>
-            </a:pPr>
-            <a:r>
-              <a:rPr lang="en-US" sz="850" b="1" dirty="0">
-                <a:solidFill>
-                  <a:srgbClr val="FFFFFF"/>
-                </a:solidFill>
-              </a:rPr>
-              <a:t>Reunión Equipo de Respuesta a Incidentes sobre los resultados de las pruebas</a:t>
-            </a:r>
-            <a:endParaRPr lang="en-US" sz="900" dirty="0"/>
-          </a:p>
-          <a:p>
-            <a:pPr indent="0" marL="0">
-              <a:buNone/>
-            </a:pPr>
-            <a:r>
-              <a:rPr lang="en-US" sz="700" dirty="0">
-                <a:solidFill>
-                  <a:srgbClr val="9FB0C6"/>
-                </a:solidFill>
-              </a:rPr>
-              <a:t>1. Gerente General  2. Gerente de Sistemas  3. Sub Gerente de Canales  4. Coordinador de Programa de transformación Digital  5. Jefe de Soporte Tecnico.  6. Jefes de Analisis y Programacion  7. Administrador de Base de Datos  8. Jefe de Servicios Generales  9. Coordinador de Monitoreo  10. Jefe de Seguridad de la Información y Ciberseguridad  11. Auditor Interno  12. Jefe de Administración de Riesgos</a:t>
-            </a:r>
-            <a:endParaRPr lang="en-US" sz="900" dirty="0"/>
-          </a:p>
-        </p:txBody>
-      </p:sp>
-      <p:sp>
-        <p:nvSpPr>
-          <p:cNvPr id="48" name="Shape 37"/>
-          <p:cNvSpPr/>
-          <p:nvPr/>
-        </p:nvSpPr>
-        <p:spPr>
-          <a:xfrm>
-            <a:off x="9680204" y="4581144"/>
-            <a:ext cx="365760" cy="365760"/>
-          </a:xfrm>
-          <a:prstGeom prst="ellipse">
-            <a:avLst/>
-          </a:prstGeom>
-          <a:solidFill>
-            <a:srgbClr val="F5B841"/>
-          </a:solidFill>
-          <a:ln w="25400">
-            <a:solidFill>
-              <a:srgbClr val="0B1220"/>
-            </a:solidFill>
-            <a:prstDash val="solid"/>
-          </a:ln>
-        </p:spPr>
-      </p:sp>
-      <p:sp>
-        <p:nvSpPr>
-          <p:cNvPr id="49" name="Text 38"/>
-          <p:cNvSpPr txBox="1"/>
-          <p:nvPr/>
-        </p:nvSpPr>
-        <p:spPr>
-          <a:xfrm>
-            <a:off x="9680204" y="4581144"/>
-            <a:ext cx="365760" cy="365760"/>
-          </a:xfrm>
-          <a:prstGeom prst="rect">
-            <a:avLst/>
-          </a:prstGeom>
-          <a:noFill/>
-          <a:ln/>
-        </p:spPr>
-        <p:txBody>
-          <a:bodyPr wrap="square" lIns="0" tIns="0" rIns="0" bIns="0" rtlCol="0" anchor="ctr"/>
-          <a:lstStyle/>
-          <a:p>
-            <a:pPr algn="ctr" indent="0" marL="0">
-              <a:buNone/>
-            </a:pPr>
-            <a:r>
-              <a:rPr lang="en-US" sz="1200" b="1" dirty="0">
-                <a:solidFill>
-                  <a:srgbClr val="0B1220"/>
-                </a:solidFill>
-              </a:rPr>
-              <a:t>5</a:t>
-            </a:r>
-            <a:endParaRPr lang="en-US" sz="1200" dirty="0"/>
-          </a:p>
-        </p:txBody>
-      </p:sp>
-      <p:sp>
-        <p:nvSpPr>
-          <p:cNvPr id="50" name="Shape 39"/>
-          <p:cNvSpPr/>
-          <p:nvPr/>
-        </p:nvSpPr>
-        <p:spPr>
-          <a:xfrm>
-            <a:off x="9588764" y="5074920"/>
-            <a:ext cx="2145731" cy="1600200"/>
-          </a:xfrm>
-          <a:prstGeom prst="roundRect">
-            <a:avLst>
-              <a:gd name="adj" fmla="val 4571"/>
-            </a:avLst>
-          </a:prstGeom>
-          <a:solidFill>
-            <a:srgbClr val="16233A"/>
-          </a:solidFill>
-          <a:ln w="9525">
-            <a:solidFill>
-              <a:srgbClr val="16233A"/>
-            </a:solidFill>
-            <a:prstDash val="solid"/>
-          </a:ln>
-          <a:effectLst>
-            <a:outerShdw sx="100000" sy="100000" kx="0" ky="0" algn="bl" rotWithShape="0" blurRad="76200" dist="19050" dir="5400000">
-              <a:srgbClr val="000000">
-                <a:alpha val="35000"/>
-              </a:srgbClr>
-            </a:outerShdw>
-          </a:effectLst>
-        </p:spPr>
-      </p:sp>
-      <p:sp>
-        <p:nvSpPr>
-          <p:cNvPr id="51" name="Text 40"/>
-          <p:cNvSpPr txBox="1"/>
-          <p:nvPr/>
-        </p:nvSpPr>
-        <p:spPr>
-          <a:xfrm>
-            <a:off x="9698492" y="5148072"/>
-            <a:ext cx="1926275" cy="1481328"/>
-          </a:xfrm>
-          <a:prstGeom prst="rect">
-            <a:avLst/>
-          </a:prstGeom>
-          <a:noFill/>
-          <a:ln/>
-        </p:spPr>
-        <p:txBody>
-          <a:bodyPr wrap="square" lIns="0" tIns="0" rIns="0" bIns="0" rtlCol="0" anchor="t"/>
-          <a:lstStyle/>
-          <a:p>
-            <a:pPr indent="0" marL="0">
-              <a:spcAft>
-                <a:spcPts val="300"/>
-              </a:spcAft>
-              <a:buNone/>
-            </a:pPr>
-            <a:r>
-              <a:rPr lang="en-US" sz="900" b="1" dirty="0">
-                <a:solidFill>
-                  <a:srgbClr val="F5B841"/>
-                </a:solidFill>
-              </a:rPr>
-              <a:t>Diciembre 2026</a:t>
-            </a:r>
-            <a:endParaRPr lang="en-US" sz="900" dirty="0"/>
-          </a:p>
-          <a:p>
-            <a:pPr indent="0" marL="0">
-              <a:spcAft>
-                <a:spcPts val="400"/>
-              </a:spcAft>
-              <a:buNone/>
-            </a:pPr>
-            <a:r>
-              <a:rPr lang="en-US" sz="850" b="1" dirty="0">
-                <a:solidFill>
-                  <a:srgbClr val="FFFFFF"/>
-                </a:solidFill>
-              </a:rPr>
-              <a:t>Informes de resultados de la prueba</a:t>
-            </a:r>
-            <a:endParaRPr lang="en-US" sz="900" dirty="0"/>
-          </a:p>
-          <a:p>
-            <a:pPr indent="0" marL="0">
-              <a:buNone/>
-            </a:pPr>
-            <a:r>
-              <a:rPr lang="en-US" sz="700" dirty="0">
-                <a:solidFill>
-                  <a:srgbClr val="9FB0C6"/>
-                </a:solidFill>
-              </a:rPr>
-              <a:t>Jefe de Administración de Riesgos</a:t>
-            </a:r>
-            <a:endParaRPr lang="en-US" sz="900" dirty="0"/>
+            <a:endParaRPr lang="es-SV" sz="1200" noProof="0" dirty="0">
+              <a:solidFill>
+                <a:srgbClr val="002060"/>
+              </a:solidFill>
+              <a:latin typeface="Arial" panose="020B0604020202020204" pitchFamily="34" charset="0"/>
+              <a:cs typeface="Arial" panose="020B0604020202020204" pitchFamily="34" charset="0"/>
+            </a:endParaRPr>
           </a:p>
         </p:txBody>
       </p:sp>
@@ -7563,4 +8222,319 @@
     </a:ext>
   </a:extLst>
 </a:theme>
+</file>
+
+<file path=ppt/theme/theme2.xml><?xml version="1.0" encoding="utf-8"?>
+<a:theme xmlns:a="http://schemas.openxmlformats.org/drawingml/2006/main" name="Tema de Office">
+  <a:themeElements>
+    <a:clrScheme name="Office">
+      <a:dk1>
+        <a:sysClr val="windowText" lastClr="000000"/>
+      </a:dk1>
+      <a:lt1>
+        <a:sysClr val="window" lastClr="FFFFFF"/>
+      </a:lt1>
+      <a:dk2>
+        <a:srgbClr val="0E2841"/>
+      </a:dk2>
+      <a:lt2>
+        <a:srgbClr val="E8E8E8"/>
+      </a:lt2>
+      <a:accent1>
+        <a:srgbClr val="156082"/>
+      </a:accent1>
+      <a:accent2>
+        <a:srgbClr val="E97132"/>
+      </a:accent2>
+      <a:accent3>
+        <a:srgbClr val="196B24"/>
+      </a:accent3>
+      <a:accent4>
+        <a:srgbClr val="0F9ED5"/>
+      </a:accent4>
+      <a:accent5>
+        <a:srgbClr val="A02B93"/>
+      </a:accent5>
+      <a:accent6>
+        <a:srgbClr val="4EA72E"/>
+      </a:accent6>
+      <a:hlink>
+        <a:srgbClr val="467886"/>
+      </a:hlink>
+      <a:folHlink>
+        <a:srgbClr val="96607D"/>
+      </a:folHlink>
+    </a:clrScheme>
+    <a:fontScheme name="Office">
+      <a:majorFont>
+        <a:latin typeface="Aptos Display" panose="02110004020202020204"/>
+        <a:ea typeface=""/>
+        <a:cs typeface=""/>
+        <a:font script="Jpan" typeface="游ゴシック Light"/>
+        <a:font script="Hang" typeface="맑은 고딕"/>
+        <a:font script="Hans" typeface="等线 Light"/>
+        <a:font script="Hant" typeface="新細明體"/>
+        <a:font script="Arab" typeface="Times New Roman"/>
+        <a:font script="Hebr" typeface="Times New Roman"/>
+        <a:font script="Thai" typeface="Angsana New"/>
+        <a:font script="Ethi" typeface="Nyala"/>
+        <a:font script="Beng" typeface="Vrinda"/>
+        <a:font script="Gujr" typeface="Shruti"/>
+        <a:font script="Khmr" typeface="MoolBoran"/>
+        <a:font script="Knda" typeface="Tunga"/>
+        <a:font script="Guru" typeface="Raavi"/>
+        <a:font script="Cans" typeface="Euphemia"/>
+        <a:font script="Cher" typeface="Plantagenet Cherokee"/>
+        <a:font script="Yiii" typeface="Microsoft Yi Baiti"/>
+        <a:font script="Tibt" typeface="Microsoft Himalaya"/>
+        <a:font script="Thaa" typeface="MV Boli"/>
+        <a:font script="Deva" typeface="Mangal"/>
+        <a:font script="Telu" typeface="Gautami"/>
+        <a:font script="Taml" typeface="Latha"/>
+        <a:font script="Syrc" typeface="Estrangelo Edessa"/>
+        <a:font script="Orya" typeface="Kalinga"/>
+        <a:font script="Mlym" typeface="Kartika"/>
+        <a:font script="Laoo" typeface="DokChampa"/>
+        <a:font script="Sinh" typeface="Iskoola Pota"/>
+        <a:font script="Mong" typeface="Mongolian Baiti"/>
+        <a:font script="Viet" typeface="Times New Roman"/>
+        <a:font script="Uigh" typeface="Microsoft Uighur"/>
+        <a:font script="Geor" typeface="Sylfaen"/>
+        <a:font script="Armn" typeface="Arial"/>
+        <a:font script="Bugi" typeface="Leelawadee UI"/>
+        <a:font script="Bopo" typeface="Microsoft JhengHei"/>
+        <a:font script="Java" typeface="Javanese Text"/>
+        <a:font script="Lisu" typeface="Segoe UI"/>
+        <a:font script="Mymr" typeface="Myanmar Text"/>
+        <a:font script="Nkoo" typeface="Ebrima"/>
+        <a:font script="Olck" typeface="Nirmala UI"/>
+        <a:font script="Osma" typeface="Ebrima"/>
+        <a:font script="Phag" typeface="Phagspa"/>
+        <a:font script="Syrn" typeface="Estrangelo Edessa"/>
+        <a:font script="Syrj" typeface="Estrangelo Edessa"/>
+        <a:font script="Syre" typeface="Estrangelo Edessa"/>
+        <a:font script="Sora" typeface="Nirmala UI"/>
+        <a:font script="Tale" typeface="Microsoft Tai Le"/>
+        <a:font script="Talu" typeface="Microsoft New Tai Lue"/>
+        <a:font script="Tfng" typeface="Ebrima"/>
+      </a:majorFont>
+      <a:minorFont>
+        <a:latin typeface="Aptos" panose="02110004020202020204"/>
+        <a:ea typeface=""/>
+        <a:cs typeface=""/>
+        <a:font script="Jpan" typeface="游ゴシック"/>
+        <a:font script="Hang" typeface="맑은 고딕"/>
+        <a:font script="Hans" typeface="等线"/>
+        <a:font script="Hant" typeface="新細明體"/>
+        <a:font script="Arab" typeface="Arial"/>
+        <a:font script="Hebr" typeface="Arial"/>
+        <a:font script="Thai" typeface="Cordia New"/>
+        <a:font script="Ethi" typeface="Nyala"/>
+        <a:font script="Beng" typeface="Vrinda"/>
+        <a:font script="Gujr" typeface="Shruti"/>
+        <a:font script="Khmr" typeface="DaunPenh"/>
+        <a:font script="Knda" typeface="Tunga"/>
+        <a:font script="Guru" typeface="Raavi"/>
+        <a:font script="Cans" typeface="Euphemia"/>
+        <a:font script="Cher" typeface="Plantagenet Cherokee"/>
+        <a:font script="Yiii" typeface="Microsoft Yi Baiti"/>
+        <a:font script="Tibt" typeface="Microsoft Himalaya"/>
+        <a:font script="Thaa" typeface="MV Boli"/>
+        <a:font script="Deva" typeface="Mangal"/>
+        <a:font script="Telu" typeface="Gautami"/>
+        <a:font script="Taml" typeface="Latha"/>
+        <a:font script="Syrc" typeface="Estrangelo Edessa"/>
+        <a:font script="Orya" typeface="Kalinga"/>
+        <a:font script="Mlym" typeface="Kartika"/>
+        <a:font script="Laoo" typeface="DokChampa"/>
+        <a:font script="Sinh" typeface="Iskoola Pota"/>
+        <a:font script="Mong" typeface="Mongolian Baiti"/>
+        <a:font script="Viet" typeface="Arial"/>
+        <a:font script="Uigh" typeface="Microsoft Uighur"/>
+        <a:font script="Geor" typeface="Sylfaen"/>
+        <a:font script="Armn" typeface="Arial"/>
+        <a:font script="Bugi" typeface="Leelawadee UI"/>
+        <a:font script="Bopo" typeface="Microsoft JhengHei"/>
+        <a:font script="Java" typeface="Javanese Text"/>
+        <a:font script="Lisu" typeface="Segoe UI"/>
+        <a:font script="Mymr" typeface="Myanmar Text"/>
+        <a:font script="Nkoo" typeface="Ebrima"/>
+        <a:font script="Olck" typeface="Nirmala UI"/>
+        <a:font script="Osma" typeface="Ebrima"/>
+        <a:font script="Phag" typeface="Phagspa"/>
+        <a:font script="Syrn" typeface="Estrangelo Edessa"/>
+        <a:font script="Syrj" typeface="Estrangelo Edessa"/>
+        <a:font script="Syre" typeface="Estrangelo Edessa"/>
+        <a:font script="Sora" typeface="Nirmala UI"/>
+        <a:font script="Tale" typeface="Microsoft Tai Le"/>
+        <a:font script="Talu" typeface="Microsoft New Tai Lue"/>
+        <a:font script="Tfng" typeface="Ebrima"/>
+      </a:minorFont>
+    </a:fontScheme>
+    <a:fmtScheme name="Office">
+      <a:fillStyleLst>
+        <a:solidFill>
+          <a:schemeClr val="phClr"/>
+        </a:solidFill>
+        <a:gradFill rotWithShape="1">
+          <a:gsLst>
+            <a:gs pos="0">
+              <a:schemeClr val="phClr">
+                <a:lumMod val="110000"/>
+                <a:satMod val="105000"/>
+                <a:tint val="67000"/>
+              </a:schemeClr>
+            </a:gs>
+            <a:gs pos="50000">
+              <a:schemeClr val="phClr">
+                <a:lumMod val="105000"/>
+                <a:satMod val="103000"/>
+                <a:tint val="73000"/>
+              </a:schemeClr>
+            </a:gs>
+            <a:gs pos="100000">
+              <a:schemeClr val="phClr">
+                <a:lumMod val="105000"/>
+                <a:satMod val="109000"/>
+                <a:tint val="81000"/>
+              </a:schemeClr>
+            </a:gs>
+          </a:gsLst>
+          <a:lin ang="5400000" scaled="0"/>
+        </a:gradFill>
+        <a:gradFill rotWithShape="1">
+          <a:gsLst>
+            <a:gs pos="0">
+              <a:schemeClr val="phClr">
+                <a:satMod val="103000"/>
+                <a:lumMod val="102000"/>
+                <a:tint val="94000"/>
+              </a:schemeClr>
+            </a:gs>
+            <a:gs pos="50000">
+              <a:schemeClr val="phClr">
+                <a:satMod val="110000"/>
+                <a:lumMod val="100000"/>
+                <a:shade val="100000"/>
+              </a:schemeClr>
+            </a:gs>
+            <a:gs pos="100000">
+              <a:schemeClr val="phClr">
+                <a:lumMod val="99000"/>
+                <a:satMod val="120000"/>
+                <a:shade val="78000"/>
+              </a:schemeClr>
+            </a:gs>
+          </a:gsLst>
+          <a:lin ang="5400000" scaled="0"/>
+        </a:gradFill>
+      </a:fillStyleLst>
+      <a:lnStyleLst>
+        <a:ln w="12700" cap="flat" cmpd="sng" algn="ctr">
+          <a:solidFill>
+            <a:schemeClr val="phClr"/>
+          </a:solidFill>
+          <a:prstDash val="solid"/>
+          <a:miter lim="800000"/>
+        </a:ln>
+        <a:ln w="19050" cap="flat" cmpd="sng" algn="ctr">
+          <a:solidFill>
+            <a:schemeClr val="phClr"/>
+          </a:solidFill>
+          <a:prstDash val="solid"/>
+          <a:miter lim="800000"/>
+        </a:ln>
+        <a:ln w="25400" cap="flat" cmpd="sng" algn="ctr">
+          <a:solidFill>
+            <a:schemeClr val="phClr"/>
+          </a:solidFill>
+          <a:prstDash val="solid"/>
+          <a:miter lim="800000"/>
+        </a:ln>
+      </a:lnStyleLst>
+      <a:effectStyleLst>
+        <a:effectStyle>
+          <a:effectLst/>
+        </a:effectStyle>
+        <a:effectStyle>
+          <a:effectLst/>
+        </a:effectStyle>
+        <a:effectStyle>
+          <a:effectLst>
+            <a:outerShdw blurRad="57150" dist="19050" dir="5400000" algn="ctr" rotWithShape="0">
+              <a:srgbClr val="000000">
+                <a:alpha val="63000"/>
+              </a:srgbClr>
+            </a:outerShdw>
+          </a:effectLst>
+        </a:effectStyle>
+      </a:effectStyleLst>
+      <a:bgFillStyleLst>
+        <a:solidFill>
+          <a:schemeClr val="phClr"/>
+        </a:solidFill>
+        <a:solidFill>
+          <a:schemeClr val="phClr">
+            <a:tint val="95000"/>
+            <a:satMod val="170000"/>
+          </a:schemeClr>
+        </a:solidFill>
+        <a:gradFill rotWithShape="1">
+          <a:gsLst>
+            <a:gs pos="0">
+              <a:schemeClr val="phClr">
+                <a:tint val="93000"/>
+                <a:satMod val="150000"/>
+                <a:shade val="98000"/>
+                <a:lumMod val="102000"/>
+              </a:schemeClr>
+            </a:gs>
+            <a:gs pos="50000">
+              <a:schemeClr val="phClr">
+                <a:tint val="98000"/>
+                <a:satMod val="130000"/>
+                <a:shade val="90000"/>
+                <a:lumMod val="103000"/>
+              </a:schemeClr>
+            </a:gs>
+            <a:gs pos="100000">
+              <a:schemeClr val="phClr">
+                <a:shade val="63000"/>
+                <a:satMod val="120000"/>
+              </a:schemeClr>
+            </a:gs>
+          </a:gsLst>
+          <a:lin ang="5400000" scaled="0"/>
+        </a:gradFill>
+      </a:bgFillStyleLst>
+    </a:fmtScheme>
+  </a:themeElements>
+  <a:objectDefaults>
+    <a:lnDef>
+      <a:spPr/>
+      <a:bodyPr/>
+      <a:lstStyle/>
+      <a:style>
+        <a:lnRef idx="2">
+          <a:schemeClr val="accent1"/>
+        </a:lnRef>
+        <a:fillRef idx="0">
+          <a:schemeClr val="accent1"/>
+        </a:fillRef>
+        <a:effectRef idx="1">
+          <a:schemeClr val="accent1"/>
+        </a:effectRef>
+        <a:fontRef idx="minor">
+          <a:schemeClr val="tx1"/>
+        </a:fontRef>
+      </a:style>
+    </a:lnDef>
+  </a:objectDefaults>
+  <a:extraClrSchemeLst/>
+  <a:extLst>
+    <a:ext uri="{05A4C25C-085E-4340-85A3-A5531E510DB2}">
+      <thm15:themeFamily xmlns:thm15="http://schemas.microsoft.com/office/thememl/2012/main" name="Office Theme" id="{2E142A2C-CD16-42D6-873A-C26D2A0506FA}" vid="{1BDDFF52-6CD6-40A5-AB3C-68EB2F1E4D0A}"/>
+    </a:ext>
+  </a:extLst>
+</a:theme>
 </file>